--- a/2 занятие/Презентация.pptx
+++ b/2 занятие/Презентация.pptx
@@ -5,7 +5,7 @@
     <p:sldMasterId id="2147483648" r:id="rId1"/>
   </p:sldMasterIdLst>
   <p:notesMasterIdLst>
-    <p:notesMasterId r:id="rId10"/>
+    <p:notesMasterId r:id="rId12"/>
   </p:notesMasterIdLst>
   <p:sldIdLst>
     <p:sldId id="340" r:id="rId2"/>
@@ -14,8 +14,10 @@
     <p:sldId id="351" r:id="rId5"/>
     <p:sldId id="344" r:id="rId6"/>
     <p:sldId id="345" r:id="rId7"/>
-    <p:sldId id="352" r:id="rId8"/>
-    <p:sldId id="350" r:id="rId9"/>
+    <p:sldId id="353" r:id="rId8"/>
+    <p:sldId id="354" r:id="rId9"/>
+    <p:sldId id="352" r:id="rId10"/>
+    <p:sldId id="350" r:id="rId11"/>
   </p:sldIdLst>
   <p:sldSz cx="12192000" cy="6858000"/>
   <p:notesSz cx="6858000" cy="9144000"/>
@@ -115,22 +117,6 @@
     </a:lvl9pPr>
   </p:defaultTextStyle>
   <p:extLst>
-    <p:ext uri="{521415D9-36F7-43E2-AB2F-B90AF26B5E84}">
-      <p14:sectionLst xmlns:p14="http://schemas.microsoft.com/office/powerpoint/2010/main">
-        <p14:section name="Пример презентации" id="{6AA03373-22ED-49D6-9AE8-039D1DE66E44}">
-          <p14:sldIdLst>
-            <p14:sldId id="340"/>
-            <p14:sldId id="347"/>
-            <p14:sldId id="341"/>
-            <p14:sldId id="351"/>
-            <p14:sldId id="344"/>
-            <p14:sldId id="345"/>
-            <p14:sldId id="352"/>
-            <p14:sldId id="350"/>
-          </p14:sldIdLst>
-        </p14:section>
-      </p14:sectionLst>
-    </p:ext>
     <p:ext uri="{EFAFB233-063F-42B5-8137-9DF3F51BA10A}">
       <p15:sldGuideLst xmlns:p15="http://schemas.microsoft.com/office/powerpoint/2012/main"/>
     </p:ext>
@@ -220,7 +206,7 @@
           <a:p>
             <a:fld id="{67773027-2AB3-4DAB-83B2-DF4B13C5C569}" type="datetimeFigureOut">
               <a:rPr lang="ru-RU" smtClean="0"/>
-              <a:t>11.10.2026</a:t>
+              <a:t>24.10.2026</a:t>
             </a:fld>
             <a:endParaRPr lang="ru-RU"/>
           </a:p>
@@ -1891,6 +1877,272 @@
         <p:cNvPr id="1" name="">
           <a:extLst>
             <a:ext uri="{FF2B5EF4-FFF2-40B4-BE49-F238E27FC236}">
+              <a16:creationId xmlns:a16="http://schemas.microsoft.com/office/drawing/2014/main" id="{982D80E8-B78E-FFD9-2CFF-39F5EC2055F9}"/>
+            </a:ext>
+          </a:extLst>
+        </p:cNvPr>
+        <p:cNvGrpSpPr/>
+        <p:nvPr/>
+      </p:nvGrpSpPr>
+      <p:grpSpPr>
+        <a:xfrm>
+          <a:off x="0" y="0"/>
+          <a:ext cx="0" cy="0"/>
+          <a:chOff x="0" y="0"/>
+          <a:chExt cx="0" cy="0"/>
+        </a:xfrm>
+      </p:grpSpPr>
+      <p:sp>
+        <p:nvSpPr>
+          <p:cNvPr id="2" name="Образ слайда 1">
+            <a:extLst>
+              <a:ext uri="{FF2B5EF4-FFF2-40B4-BE49-F238E27FC236}">
+                <a16:creationId xmlns:a16="http://schemas.microsoft.com/office/drawing/2014/main" id="{BA11A332-9D15-861C-BE5D-0CADC3649321}"/>
+              </a:ext>
+            </a:extLst>
+          </p:cNvPr>
+          <p:cNvSpPr>
+            <a:spLocks noGrp="1" noRot="1" noChangeAspect="1"/>
+          </p:cNvSpPr>
+          <p:nvPr>
+            <p:ph type="sldImg"/>
+          </p:nvPr>
+        </p:nvSpPr>
+        <p:spPr/>
+      </p:sp>
+      <p:sp>
+        <p:nvSpPr>
+          <p:cNvPr id="3" name="Заметки 2">
+            <a:extLst>
+              <a:ext uri="{FF2B5EF4-FFF2-40B4-BE49-F238E27FC236}">
+                <a16:creationId xmlns:a16="http://schemas.microsoft.com/office/drawing/2014/main" id="{2FA583AE-4E5E-862B-9028-8EA4F094549A}"/>
+              </a:ext>
+            </a:extLst>
+          </p:cNvPr>
+          <p:cNvSpPr>
+            <a:spLocks noGrp="1"/>
+          </p:cNvSpPr>
+          <p:nvPr>
+            <p:ph type="body" idx="1"/>
+          </p:nvPr>
+        </p:nvSpPr>
+        <p:spPr/>
+        <p:txBody>
+          <a:bodyPr/>
+          <a:lstStyle/>
+          <a:p>
+            <a:pPr marL="0" marR="0" lvl="0" indent="0" algn="l" defTabSz="914400" rtl="0" eaLnBrk="1" fontAlgn="auto" latinLnBrk="0" hangingPunct="1">
+              <a:lnSpc>
+                <a:spcPct val="100000"/>
+              </a:lnSpc>
+              <a:spcBef>
+                <a:spcPts val="0"/>
+              </a:spcBef>
+              <a:spcAft>
+                <a:spcPts val="0"/>
+              </a:spcAft>
+              <a:buClrTx/>
+              <a:buSzTx/>
+              <a:buFontTx/>
+              <a:buNone/>
+              <a:tabLst/>
+              <a:defRPr/>
+            </a:pPr>
+            <a:endParaRPr lang="ru-RU" sz="1200" b="0" kern="1200" dirty="0">
+              <a:solidFill>
+                <a:schemeClr val="tx1"/>
+              </a:solidFill>
+              <a:effectLst/>
+              <a:latin typeface="+mn-lt"/>
+              <a:ea typeface="+mn-ea"/>
+              <a:cs typeface="+mn-cs"/>
+            </a:endParaRPr>
+          </a:p>
+        </p:txBody>
+      </p:sp>
+      <p:sp>
+        <p:nvSpPr>
+          <p:cNvPr id="4" name="Номер слайда 3">
+            <a:extLst>
+              <a:ext uri="{FF2B5EF4-FFF2-40B4-BE49-F238E27FC236}">
+                <a16:creationId xmlns:a16="http://schemas.microsoft.com/office/drawing/2014/main" id="{16D6FD3A-BA2D-9391-7DA7-1BD1B3CF4AFB}"/>
+              </a:ext>
+            </a:extLst>
+          </p:cNvPr>
+          <p:cNvSpPr>
+            <a:spLocks noGrp="1"/>
+          </p:cNvSpPr>
+          <p:nvPr>
+            <p:ph type="sldNum" sz="quarter" idx="5"/>
+          </p:nvPr>
+        </p:nvSpPr>
+        <p:spPr/>
+        <p:txBody>
+          <a:bodyPr/>
+          <a:lstStyle/>
+          <a:p>
+            <a:fld id="{027685D7-C350-491D-A933-7035F35F7262}" type="slidenum">
+              <a:rPr lang="ru-RU" smtClean="0"/>
+              <a:t>7</a:t>
+            </a:fld>
+            <a:endParaRPr lang="ru-RU"/>
+          </a:p>
+        </p:txBody>
+      </p:sp>
+    </p:spTree>
+    <p:extLst>
+      <p:ext uri="{BB962C8B-B14F-4D97-AF65-F5344CB8AC3E}">
+        <p14:creationId xmlns:p14="http://schemas.microsoft.com/office/powerpoint/2010/main" val="3896610220"/>
+      </p:ext>
+    </p:extLst>
+  </p:cSld>
+  <p:clrMapOvr>
+    <a:masterClrMapping/>
+  </p:clrMapOvr>
+</p:notes>
+</file>
+
+<file path=ppt/notesSlides/notesSlide6.xml><?xml version="1.0" encoding="utf-8"?>
+<p:notes xmlns:a="http://schemas.openxmlformats.org/drawingml/2006/main" xmlns:r="http://schemas.openxmlformats.org/officeDocument/2006/relationships" xmlns:p="http://schemas.openxmlformats.org/presentationml/2006/main">
+  <p:cSld>
+    <p:spTree>
+      <p:nvGrpSpPr>
+        <p:cNvPr id="1" name="">
+          <a:extLst>
+            <a:ext uri="{FF2B5EF4-FFF2-40B4-BE49-F238E27FC236}">
+              <a16:creationId xmlns:a16="http://schemas.microsoft.com/office/drawing/2014/main" id="{1A506935-99FA-CE00-848E-5D2363B07ED9}"/>
+            </a:ext>
+          </a:extLst>
+        </p:cNvPr>
+        <p:cNvGrpSpPr/>
+        <p:nvPr/>
+      </p:nvGrpSpPr>
+      <p:grpSpPr>
+        <a:xfrm>
+          <a:off x="0" y="0"/>
+          <a:ext cx="0" cy="0"/>
+          <a:chOff x="0" y="0"/>
+          <a:chExt cx="0" cy="0"/>
+        </a:xfrm>
+      </p:grpSpPr>
+      <p:sp>
+        <p:nvSpPr>
+          <p:cNvPr id="2" name="Образ слайда 1">
+            <a:extLst>
+              <a:ext uri="{FF2B5EF4-FFF2-40B4-BE49-F238E27FC236}">
+                <a16:creationId xmlns:a16="http://schemas.microsoft.com/office/drawing/2014/main" id="{69C56A15-48FE-A206-508B-39C3F026C218}"/>
+              </a:ext>
+            </a:extLst>
+          </p:cNvPr>
+          <p:cNvSpPr>
+            <a:spLocks noGrp="1" noRot="1" noChangeAspect="1"/>
+          </p:cNvSpPr>
+          <p:nvPr>
+            <p:ph type="sldImg"/>
+          </p:nvPr>
+        </p:nvSpPr>
+        <p:spPr/>
+      </p:sp>
+      <p:sp>
+        <p:nvSpPr>
+          <p:cNvPr id="3" name="Заметки 2">
+            <a:extLst>
+              <a:ext uri="{FF2B5EF4-FFF2-40B4-BE49-F238E27FC236}">
+                <a16:creationId xmlns:a16="http://schemas.microsoft.com/office/drawing/2014/main" id="{2F44A6DE-26FB-8AC5-52DE-D1489CC36D44}"/>
+              </a:ext>
+            </a:extLst>
+          </p:cNvPr>
+          <p:cNvSpPr>
+            <a:spLocks noGrp="1"/>
+          </p:cNvSpPr>
+          <p:nvPr>
+            <p:ph type="body" idx="1"/>
+          </p:nvPr>
+        </p:nvSpPr>
+        <p:spPr/>
+        <p:txBody>
+          <a:bodyPr/>
+          <a:lstStyle/>
+          <a:p>
+            <a:pPr marL="0" marR="0" lvl="0" indent="0" algn="l" defTabSz="914400" rtl="0" eaLnBrk="1" fontAlgn="auto" latinLnBrk="0" hangingPunct="1">
+              <a:lnSpc>
+                <a:spcPct val="100000"/>
+              </a:lnSpc>
+              <a:spcBef>
+                <a:spcPts val="0"/>
+              </a:spcBef>
+              <a:spcAft>
+                <a:spcPts val="0"/>
+              </a:spcAft>
+              <a:buClrTx/>
+              <a:buSzTx/>
+              <a:buFontTx/>
+              <a:buNone/>
+              <a:tabLst/>
+              <a:defRPr/>
+            </a:pPr>
+            <a:endParaRPr lang="ru-RU" sz="1200" b="0" kern="1200" dirty="0">
+              <a:solidFill>
+                <a:schemeClr val="tx1"/>
+              </a:solidFill>
+              <a:effectLst/>
+              <a:latin typeface="+mn-lt"/>
+              <a:ea typeface="+mn-ea"/>
+              <a:cs typeface="+mn-cs"/>
+            </a:endParaRPr>
+          </a:p>
+        </p:txBody>
+      </p:sp>
+      <p:sp>
+        <p:nvSpPr>
+          <p:cNvPr id="4" name="Номер слайда 3">
+            <a:extLst>
+              <a:ext uri="{FF2B5EF4-FFF2-40B4-BE49-F238E27FC236}">
+                <a16:creationId xmlns:a16="http://schemas.microsoft.com/office/drawing/2014/main" id="{10B8166E-F914-4CF0-0708-96C551C41B2B}"/>
+              </a:ext>
+            </a:extLst>
+          </p:cNvPr>
+          <p:cNvSpPr>
+            <a:spLocks noGrp="1"/>
+          </p:cNvSpPr>
+          <p:nvPr>
+            <p:ph type="sldNum" sz="quarter" idx="5"/>
+          </p:nvPr>
+        </p:nvSpPr>
+        <p:spPr/>
+        <p:txBody>
+          <a:bodyPr/>
+          <a:lstStyle/>
+          <a:p>
+            <a:fld id="{027685D7-C350-491D-A933-7035F35F7262}" type="slidenum">
+              <a:rPr lang="ru-RU" smtClean="0"/>
+              <a:t>8</a:t>
+            </a:fld>
+            <a:endParaRPr lang="ru-RU"/>
+          </a:p>
+        </p:txBody>
+      </p:sp>
+    </p:spTree>
+    <p:extLst>
+      <p:ext uri="{BB962C8B-B14F-4D97-AF65-F5344CB8AC3E}">
+        <p14:creationId xmlns:p14="http://schemas.microsoft.com/office/powerpoint/2010/main" val="104902148"/>
+      </p:ext>
+    </p:extLst>
+  </p:cSld>
+  <p:clrMapOvr>
+    <a:masterClrMapping/>
+  </p:clrMapOvr>
+</p:notes>
+</file>
+
+<file path=ppt/notesSlides/notesSlide7.xml><?xml version="1.0" encoding="utf-8"?>
+<p:notes xmlns:a="http://schemas.openxmlformats.org/drawingml/2006/main" xmlns:r="http://schemas.openxmlformats.org/officeDocument/2006/relationships" xmlns:p="http://schemas.openxmlformats.org/presentationml/2006/main">
+  <p:cSld>
+    <p:spTree>
+      <p:nvGrpSpPr>
+        <p:cNvPr id="1" name="">
+          <a:extLst>
+            <a:ext uri="{FF2B5EF4-FFF2-40B4-BE49-F238E27FC236}">
               <a16:creationId xmlns:a16="http://schemas.microsoft.com/office/drawing/2014/main" id="{531F584D-87B9-6D42-609C-C74102489E33}"/>
             </a:ext>
           </a:extLst>
@@ -2828,7 +3080,7 @@
           <a:p>
             <a:fld id="{027685D7-C350-491D-A933-7035F35F7262}" type="slidenum">
               <a:rPr lang="ru-RU" smtClean="0"/>
-              <a:t>7</a:t>
+              <a:t>9</a:t>
             </a:fld>
             <a:endParaRPr lang="ru-RU"/>
           </a:p>
@@ -2976,7 +3228,7 @@
           <a:p>
             <a:fld id="{787ECD41-0511-49CF-9DE9-CF7B1A97A83F}" type="datetimeFigureOut">
               <a:rPr lang="ru-RU" smtClean="0"/>
-              <a:t>11.10.2026</a:t>
+              <a:t>24.10.2026</a:t>
             </a:fld>
             <a:endParaRPr lang="ru-RU"/>
           </a:p>
@@ -3144,7 +3396,7 @@
           <a:p>
             <a:fld id="{787ECD41-0511-49CF-9DE9-CF7B1A97A83F}" type="datetimeFigureOut">
               <a:rPr lang="ru-RU" smtClean="0"/>
-              <a:t>11.10.2026</a:t>
+              <a:t>24.10.2026</a:t>
             </a:fld>
             <a:endParaRPr lang="ru-RU"/>
           </a:p>
@@ -3322,7 +3574,7 @@
           <a:p>
             <a:fld id="{787ECD41-0511-49CF-9DE9-CF7B1A97A83F}" type="datetimeFigureOut">
               <a:rPr lang="ru-RU" smtClean="0"/>
-              <a:t>11.10.2026</a:t>
+              <a:t>24.10.2026</a:t>
             </a:fld>
             <a:endParaRPr lang="ru-RU"/>
           </a:p>
@@ -3490,7 +3742,7 @@
           <a:p>
             <a:fld id="{787ECD41-0511-49CF-9DE9-CF7B1A97A83F}" type="datetimeFigureOut">
               <a:rPr lang="ru-RU" smtClean="0"/>
-              <a:t>11.10.2026</a:t>
+              <a:t>24.10.2026</a:t>
             </a:fld>
             <a:endParaRPr lang="ru-RU"/>
           </a:p>
@@ -3735,7 +3987,7 @@
           <a:p>
             <a:fld id="{787ECD41-0511-49CF-9DE9-CF7B1A97A83F}" type="datetimeFigureOut">
               <a:rPr lang="ru-RU" smtClean="0"/>
-              <a:t>11.10.2026</a:t>
+              <a:t>24.10.2026</a:t>
             </a:fld>
             <a:endParaRPr lang="ru-RU"/>
           </a:p>
@@ -3964,7 +4216,7 @@
           <a:p>
             <a:fld id="{787ECD41-0511-49CF-9DE9-CF7B1A97A83F}" type="datetimeFigureOut">
               <a:rPr lang="ru-RU" smtClean="0"/>
-              <a:t>11.10.2026</a:t>
+              <a:t>24.10.2026</a:t>
             </a:fld>
             <a:endParaRPr lang="ru-RU"/>
           </a:p>
@@ -4328,7 +4580,7 @@
           <a:p>
             <a:fld id="{787ECD41-0511-49CF-9DE9-CF7B1A97A83F}" type="datetimeFigureOut">
               <a:rPr lang="ru-RU" smtClean="0"/>
-              <a:t>11.10.2026</a:t>
+              <a:t>24.10.2026</a:t>
             </a:fld>
             <a:endParaRPr lang="ru-RU"/>
           </a:p>
@@ -4445,7 +4697,7 @@
           <a:p>
             <a:fld id="{787ECD41-0511-49CF-9DE9-CF7B1A97A83F}" type="datetimeFigureOut">
               <a:rPr lang="ru-RU" smtClean="0"/>
-              <a:t>11.10.2026</a:t>
+              <a:t>24.10.2026</a:t>
             </a:fld>
             <a:endParaRPr lang="ru-RU"/>
           </a:p>
@@ -4540,7 +4792,7 @@
           <a:p>
             <a:fld id="{787ECD41-0511-49CF-9DE9-CF7B1A97A83F}" type="datetimeFigureOut">
               <a:rPr lang="ru-RU" smtClean="0"/>
-              <a:t>11.10.2026</a:t>
+              <a:t>24.10.2026</a:t>
             </a:fld>
             <a:endParaRPr lang="ru-RU"/>
           </a:p>
@@ -4815,7 +5067,7 @@
           <a:p>
             <a:fld id="{787ECD41-0511-49CF-9DE9-CF7B1A97A83F}" type="datetimeFigureOut">
               <a:rPr lang="ru-RU" smtClean="0"/>
-              <a:t>11.10.2026</a:t>
+              <a:t>24.10.2026</a:t>
             </a:fld>
             <a:endParaRPr lang="ru-RU"/>
           </a:p>
@@ -5067,7 +5319,7 @@
           <a:p>
             <a:fld id="{787ECD41-0511-49CF-9DE9-CF7B1A97A83F}" type="datetimeFigureOut">
               <a:rPr lang="ru-RU" smtClean="0"/>
-              <a:t>11.10.2026</a:t>
+              <a:t>24.10.2026</a:t>
             </a:fld>
             <a:endParaRPr lang="ru-RU"/>
           </a:p>
@@ -5278,7 +5530,7 @@
           <a:p>
             <a:fld id="{787ECD41-0511-49CF-9DE9-CF7B1A97A83F}" type="datetimeFigureOut">
               <a:rPr lang="ru-RU" smtClean="0"/>
-              <a:t>11.10.2026</a:t>
+              <a:t>24.10.2026</a:t>
             </a:fld>
             <a:endParaRPr lang="ru-RU"/>
           </a:p>
@@ -6154,6 +6406,300 @@
 </p:sld>
 </file>
 
+<file path=ppt/slides/slide10.xml><?xml version="1.0" encoding="utf-8"?>
+<p:sld xmlns:a="http://schemas.openxmlformats.org/drawingml/2006/main" xmlns:r="http://schemas.openxmlformats.org/officeDocument/2006/relationships" xmlns:p="http://schemas.openxmlformats.org/presentationml/2006/main">
+  <p:cSld>
+    <p:spTree>
+      <p:nvGrpSpPr>
+        <p:cNvPr id="1" name="">
+          <a:extLst>
+            <a:ext uri="{FF2B5EF4-FFF2-40B4-BE49-F238E27FC236}">
+              <a16:creationId xmlns:a16="http://schemas.microsoft.com/office/drawing/2014/main" id="{8C5D4276-4AF3-5F49-4C87-1563081110F6}"/>
+            </a:ext>
+          </a:extLst>
+        </p:cNvPr>
+        <p:cNvGrpSpPr/>
+        <p:nvPr/>
+      </p:nvGrpSpPr>
+      <p:grpSpPr>
+        <a:xfrm>
+          <a:off x="0" y="0"/>
+          <a:ext cx="0" cy="0"/>
+          <a:chOff x="0" y="0"/>
+          <a:chExt cx="0" cy="0"/>
+        </a:xfrm>
+      </p:grpSpPr>
+      <p:pic>
+        <p:nvPicPr>
+          <p:cNvPr id="3" name="Рисунок 2">
+            <a:extLst>
+              <a:ext uri="{FF2B5EF4-FFF2-40B4-BE49-F238E27FC236}">
+                <a16:creationId xmlns:a16="http://schemas.microsoft.com/office/drawing/2014/main" id="{0F7DC897-35C1-018A-2269-FFC91DEC757F}"/>
+              </a:ext>
+            </a:extLst>
+          </p:cNvPr>
+          <p:cNvPicPr>
+            <a:picLocks noChangeAspect="1"/>
+          </p:cNvPicPr>
+          <p:nvPr/>
+        </p:nvPicPr>
+        <p:blipFill>
+          <a:blip r:embed="rId2">
+            <a:extLst>
+              <a:ext uri="{28A0092B-C50C-407E-A947-70E740481C1C}">
+                <a14:useLocalDpi xmlns:a14="http://schemas.microsoft.com/office/drawing/2010/main" val="0"/>
+              </a:ext>
+            </a:extLst>
+          </a:blip>
+          <a:stretch>
+            <a:fillRect/>
+          </a:stretch>
+        </p:blipFill>
+        <p:spPr>
+          <a:xfrm>
+            <a:off x="0" y="0"/>
+            <a:ext cx="12191999" cy="6858000"/>
+          </a:xfrm>
+          <a:prstGeom prst="rect">
+            <a:avLst/>
+          </a:prstGeom>
+        </p:spPr>
+      </p:pic>
+      <p:sp>
+        <p:nvSpPr>
+          <p:cNvPr id="5" name="Rectangle 6">
+            <a:extLst>
+              <a:ext uri="{FF2B5EF4-FFF2-40B4-BE49-F238E27FC236}">
+                <a16:creationId xmlns:a16="http://schemas.microsoft.com/office/drawing/2014/main" id="{130F4290-6452-4D11-C374-B58B5B0B5D49}"/>
+              </a:ext>
+            </a:extLst>
+          </p:cNvPr>
+          <p:cNvSpPr>
+            <a:spLocks noChangeArrowheads="1"/>
+          </p:cNvSpPr>
+          <p:nvPr/>
+        </p:nvSpPr>
+        <p:spPr bwMode="auto">
+          <a:xfrm>
+            <a:off x="2274600" y="3005807"/>
+            <a:ext cx="7642798" cy="846386"/>
+          </a:xfrm>
+          <a:prstGeom prst="rect">
+            <a:avLst/>
+          </a:prstGeom>
+          <a:noFill/>
+          <a:ln>
+            <a:noFill/>
+          </a:ln>
+          <a:extLst>
+            <a:ext uri="{909E8E84-426E-40DD-AFC4-6F175D3DCCD1}">
+              <a14:hiddenFill xmlns:a14="http://schemas.microsoft.com/office/drawing/2010/main">
+                <a:solidFill>
+                  <a:srgbClr val="FFFFFF"/>
+                </a:solidFill>
+              </a14:hiddenFill>
+            </a:ext>
+            <a:ext uri="{91240B29-F687-4F45-9708-019B960494DF}">
+              <a14:hiddenLine xmlns:a14="http://schemas.microsoft.com/office/drawing/2010/main" w="9525">
+                <a:solidFill>
+                  <a:srgbClr val="000000"/>
+                </a:solidFill>
+                <a:miter lim="800000"/>
+                <a:headEnd/>
+                <a:tailEnd/>
+              </a14:hiddenLine>
+            </a:ext>
+          </a:extLst>
+        </p:spPr>
+        <p:txBody>
+          <a:bodyPr vert="horz" wrap="none" lIns="0" tIns="0" rIns="0" bIns="0" numCol="1" anchor="t" anchorCtr="0" compatLnSpc="1">
+            <a:prstTxWarp prst="textNoShape">
+              <a:avLst/>
+            </a:prstTxWarp>
+            <a:spAutoFit/>
+          </a:bodyPr>
+          <a:lstStyle>
+            <a:lvl1pPr eaLnBrk="0" fontAlgn="base" hangingPunct="0">
+              <a:spcBef>
+                <a:spcPct val="0"/>
+              </a:spcBef>
+              <a:spcAft>
+                <a:spcPct val="0"/>
+              </a:spcAft>
+              <a:defRPr>
+                <a:solidFill>
+                  <a:schemeClr val="tx1"/>
+                </a:solidFill>
+                <a:latin typeface="Arial" panose="020B0604020202020204" pitchFamily="34" charset="0"/>
+              </a:defRPr>
+            </a:lvl1pPr>
+            <a:lvl2pPr eaLnBrk="0" fontAlgn="base" hangingPunct="0">
+              <a:spcBef>
+                <a:spcPct val="0"/>
+              </a:spcBef>
+              <a:spcAft>
+                <a:spcPct val="0"/>
+              </a:spcAft>
+              <a:defRPr>
+                <a:solidFill>
+                  <a:schemeClr val="tx1"/>
+                </a:solidFill>
+                <a:latin typeface="Arial" panose="020B0604020202020204" pitchFamily="34" charset="0"/>
+              </a:defRPr>
+            </a:lvl2pPr>
+            <a:lvl3pPr eaLnBrk="0" fontAlgn="base" hangingPunct="0">
+              <a:spcBef>
+                <a:spcPct val="0"/>
+              </a:spcBef>
+              <a:spcAft>
+                <a:spcPct val="0"/>
+              </a:spcAft>
+              <a:defRPr>
+                <a:solidFill>
+                  <a:schemeClr val="tx1"/>
+                </a:solidFill>
+                <a:latin typeface="Arial" panose="020B0604020202020204" pitchFamily="34" charset="0"/>
+              </a:defRPr>
+            </a:lvl3pPr>
+            <a:lvl4pPr eaLnBrk="0" fontAlgn="base" hangingPunct="0">
+              <a:spcBef>
+                <a:spcPct val="0"/>
+              </a:spcBef>
+              <a:spcAft>
+                <a:spcPct val="0"/>
+              </a:spcAft>
+              <a:defRPr>
+                <a:solidFill>
+                  <a:schemeClr val="tx1"/>
+                </a:solidFill>
+                <a:latin typeface="Arial" panose="020B0604020202020204" pitchFamily="34" charset="0"/>
+              </a:defRPr>
+            </a:lvl4pPr>
+            <a:lvl5pPr eaLnBrk="0" fontAlgn="base" hangingPunct="0">
+              <a:spcBef>
+                <a:spcPct val="0"/>
+              </a:spcBef>
+              <a:spcAft>
+                <a:spcPct val="0"/>
+              </a:spcAft>
+              <a:defRPr>
+                <a:solidFill>
+                  <a:schemeClr val="tx1"/>
+                </a:solidFill>
+                <a:latin typeface="Arial" panose="020B0604020202020204" pitchFamily="34" charset="0"/>
+              </a:defRPr>
+            </a:lvl5pPr>
+            <a:lvl6pPr eaLnBrk="0" fontAlgn="base" hangingPunct="0">
+              <a:spcBef>
+                <a:spcPct val="0"/>
+              </a:spcBef>
+              <a:spcAft>
+                <a:spcPct val="0"/>
+              </a:spcAft>
+              <a:defRPr>
+                <a:solidFill>
+                  <a:schemeClr val="tx1"/>
+                </a:solidFill>
+                <a:latin typeface="Arial" panose="020B0604020202020204" pitchFamily="34" charset="0"/>
+              </a:defRPr>
+            </a:lvl6pPr>
+            <a:lvl7pPr eaLnBrk="0" fontAlgn="base" hangingPunct="0">
+              <a:spcBef>
+                <a:spcPct val="0"/>
+              </a:spcBef>
+              <a:spcAft>
+                <a:spcPct val="0"/>
+              </a:spcAft>
+              <a:defRPr>
+                <a:solidFill>
+                  <a:schemeClr val="tx1"/>
+                </a:solidFill>
+                <a:latin typeface="Arial" panose="020B0604020202020204" pitchFamily="34" charset="0"/>
+              </a:defRPr>
+            </a:lvl7pPr>
+            <a:lvl8pPr eaLnBrk="0" fontAlgn="base" hangingPunct="0">
+              <a:spcBef>
+                <a:spcPct val="0"/>
+              </a:spcBef>
+              <a:spcAft>
+                <a:spcPct val="0"/>
+              </a:spcAft>
+              <a:defRPr>
+                <a:solidFill>
+                  <a:schemeClr val="tx1"/>
+                </a:solidFill>
+                <a:latin typeface="Arial" panose="020B0604020202020204" pitchFamily="34" charset="0"/>
+              </a:defRPr>
+            </a:lvl8pPr>
+            <a:lvl9pPr eaLnBrk="0" fontAlgn="base" hangingPunct="0">
+              <a:spcBef>
+                <a:spcPct val="0"/>
+              </a:spcBef>
+              <a:spcAft>
+                <a:spcPct val="0"/>
+              </a:spcAft>
+              <a:defRPr>
+                <a:solidFill>
+                  <a:schemeClr val="tx1"/>
+                </a:solidFill>
+                <a:latin typeface="Arial" panose="020B0604020202020204" pitchFamily="34" charset="0"/>
+              </a:defRPr>
+            </a:lvl9pPr>
+          </a:lstStyle>
+          <a:p>
+            <a:pPr marL="0" marR="0" lvl="0" indent="0" algn="l" defTabSz="914400" rtl="0" eaLnBrk="0" fontAlgn="base" latinLnBrk="0" hangingPunct="0">
+              <a:lnSpc>
+                <a:spcPct val="100000"/>
+              </a:lnSpc>
+              <a:spcBef>
+                <a:spcPct val="0"/>
+              </a:spcBef>
+              <a:spcAft>
+                <a:spcPct val="0"/>
+              </a:spcAft>
+              <a:buClrTx/>
+              <a:buSzTx/>
+              <a:buFontTx/>
+              <a:buNone/>
+              <a:tabLst/>
+            </a:pPr>
+            <a:r>
+              <a:rPr lang="ru-RU" altLang="ru-RU" sz="5500" b="1" dirty="0">
+                <a:solidFill>
+                  <a:srgbClr val="000000"/>
+                </a:solidFill>
+                <a:latin typeface="Times New Roman" panose="02020603050405020304" pitchFamily="18" charset="0"/>
+                <a:cs typeface="Times New Roman" panose="02020603050405020304" pitchFamily="18" charset="0"/>
+              </a:rPr>
+              <a:t>Переходим к практике !</a:t>
+            </a:r>
+            <a:endParaRPr kumimoji="0" lang="ru-RU" altLang="ru-RU" sz="1800" b="0" i="0" u="none" strike="noStrike" cap="none" normalizeH="0" baseline="0" dirty="0">
+              <a:ln>
+                <a:noFill/>
+              </a:ln>
+              <a:solidFill>
+                <a:schemeClr val="tx1"/>
+              </a:solidFill>
+              <a:effectLst/>
+              <a:latin typeface="Times New Roman" panose="02020603050405020304" pitchFamily="18" charset="0"/>
+              <a:cs typeface="Times New Roman" panose="02020603050405020304" pitchFamily="18" charset="0"/>
+            </a:endParaRPr>
+          </a:p>
+        </p:txBody>
+      </p:sp>
+    </p:spTree>
+    <p:extLst>
+      <p:ext uri="{BB962C8B-B14F-4D97-AF65-F5344CB8AC3E}">
+        <p14:creationId xmlns:p14="http://schemas.microsoft.com/office/powerpoint/2010/main" val="2581744596"/>
+      </p:ext>
+    </p:extLst>
+  </p:cSld>
+  <p:clrMapOvr>
+    <a:masterClrMapping/>
+  </p:clrMapOvr>
+</p:sld>
+</file>
+
 <file path=ppt/slides/slide2.xml><?xml version="1.0" encoding="utf-8"?>
 <p:sld xmlns:a="http://schemas.openxmlformats.org/drawingml/2006/main" xmlns:r="http://schemas.openxmlformats.org/officeDocument/2006/relationships" xmlns:p="http://schemas.openxmlformats.org/presentationml/2006/main">
   <p:cSld>
@@ -8145,6 +8691,786 @@
         <p:cNvPr id="1" name="">
           <a:extLst>
             <a:ext uri="{FF2B5EF4-FFF2-40B4-BE49-F238E27FC236}">
+              <a16:creationId xmlns:a16="http://schemas.microsoft.com/office/drawing/2014/main" id="{F87DB84A-7AA5-CF18-F56F-DCE77A929DBC}"/>
+            </a:ext>
+          </a:extLst>
+        </p:cNvPr>
+        <p:cNvGrpSpPr/>
+        <p:nvPr/>
+      </p:nvGrpSpPr>
+      <p:grpSpPr>
+        <a:xfrm>
+          <a:off x="0" y="0"/>
+          <a:ext cx="0" cy="0"/>
+          <a:chOff x="0" y="0"/>
+          <a:chExt cx="0" cy="0"/>
+        </a:xfrm>
+      </p:grpSpPr>
+      <p:pic>
+        <p:nvPicPr>
+          <p:cNvPr id="2075" name="Рисунок 2074">
+            <a:extLst>
+              <a:ext uri="{FF2B5EF4-FFF2-40B4-BE49-F238E27FC236}">
+                <a16:creationId xmlns:a16="http://schemas.microsoft.com/office/drawing/2014/main" id="{C4AA57FA-E6BD-EF7C-45D1-C9B48B6E388E}"/>
+              </a:ext>
+            </a:extLst>
+          </p:cNvPr>
+          <p:cNvPicPr>
+            <a:picLocks noChangeAspect="1"/>
+          </p:cNvPicPr>
+          <p:nvPr/>
+        </p:nvPicPr>
+        <p:blipFill>
+          <a:blip r:embed="rId3">
+            <a:extLst>
+              <a:ext uri="{28A0092B-C50C-407E-A947-70E740481C1C}">
+                <a14:useLocalDpi xmlns:a14="http://schemas.microsoft.com/office/drawing/2010/main" val="0"/>
+              </a:ext>
+            </a:extLst>
+          </a:blip>
+          <a:stretch>
+            <a:fillRect/>
+          </a:stretch>
+        </p:blipFill>
+        <p:spPr>
+          <a:xfrm>
+            <a:off x="0" y="0"/>
+            <a:ext cx="12191999" cy="6858000"/>
+          </a:xfrm>
+          <a:prstGeom prst="rect">
+            <a:avLst/>
+          </a:prstGeom>
+        </p:spPr>
+      </p:pic>
+      <p:sp>
+        <p:nvSpPr>
+          <p:cNvPr id="5" name="Rectangle 6">
+            <a:extLst>
+              <a:ext uri="{FF2B5EF4-FFF2-40B4-BE49-F238E27FC236}">
+                <a16:creationId xmlns:a16="http://schemas.microsoft.com/office/drawing/2014/main" id="{5308429C-5F4A-CC6B-6208-E7E24632024A}"/>
+              </a:ext>
+            </a:extLst>
+          </p:cNvPr>
+          <p:cNvSpPr>
+            <a:spLocks noChangeArrowheads="1"/>
+          </p:cNvSpPr>
+          <p:nvPr/>
+        </p:nvSpPr>
+        <p:spPr bwMode="auto">
+          <a:xfrm>
+            <a:off x="485775" y="412750"/>
+            <a:ext cx="7160293" cy="846386"/>
+          </a:xfrm>
+          <a:prstGeom prst="rect">
+            <a:avLst/>
+          </a:prstGeom>
+          <a:noFill/>
+          <a:ln>
+            <a:noFill/>
+          </a:ln>
+          <a:extLst>
+            <a:ext uri="{909E8E84-426E-40DD-AFC4-6F175D3DCCD1}">
+              <a14:hiddenFill xmlns:a14="http://schemas.microsoft.com/office/drawing/2010/main">
+                <a:solidFill>
+                  <a:srgbClr val="FFFFFF"/>
+                </a:solidFill>
+              </a14:hiddenFill>
+            </a:ext>
+            <a:ext uri="{91240B29-F687-4F45-9708-019B960494DF}">
+              <a14:hiddenLine xmlns:a14="http://schemas.microsoft.com/office/drawing/2010/main" w="9525">
+                <a:solidFill>
+                  <a:srgbClr val="000000"/>
+                </a:solidFill>
+                <a:miter lim="800000"/>
+                <a:headEnd/>
+                <a:tailEnd/>
+              </a14:hiddenLine>
+            </a:ext>
+          </a:extLst>
+        </p:spPr>
+        <p:txBody>
+          <a:bodyPr vert="horz" wrap="none" lIns="0" tIns="0" rIns="0" bIns="0" numCol="1" anchor="t" anchorCtr="0" compatLnSpc="1">
+            <a:prstTxWarp prst="textNoShape">
+              <a:avLst/>
+            </a:prstTxWarp>
+            <a:spAutoFit/>
+          </a:bodyPr>
+          <a:lstStyle>
+            <a:lvl1pPr eaLnBrk="0" fontAlgn="base" hangingPunct="0">
+              <a:spcBef>
+                <a:spcPct val="0"/>
+              </a:spcBef>
+              <a:spcAft>
+                <a:spcPct val="0"/>
+              </a:spcAft>
+              <a:defRPr>
+                <a:solidFill>
+                  <a:schemeClr val="tx1"/>
+                </a:solidFill>
+                <a:latin typeface="Arial" panose="020B0604020202020204" pitchFamily="34" charset="0"/>
+              </a:defRPr>
+            </a:lvl1pPr>
+            <a:lvl2pPr eaLnBrk="0" fontAlgn="base" hangingPunct="0">
+              <a:spcBef>
+                <a:spcPct val="0"/>
+              </a:spcBef>
+              <a:spcAft>
+                <a:spcPct val="0"/>
+              </a:spcAft>
+              <a:defRPr>
+                <a:solidFill>
+                  <a:schemeClr val="tx1"/>
+                </a:solidFill>
+                <a:latin typeface="Arial" panose="020B0604020202020204" pitchFamily="34" charset="0"/>
+              </a:defRPr>
+            </a:lvl2pPr>
+            <a:lvl3pPr eaLnBrk="0" fontAlgn="base" hangingPunct="0">
+              <a:spcBef>
+                <a:spcPct val="0"/>
+              </a:spcBef>
+              <a:spcAft>
+                <a:spcPct val="0"/>
+              </a:spcAft>
+              <a:defRPr>
+                <a:solidFill>
+                  <a:schemeClr val="tx1"/>
+                </a:solidFill>
+                <a:latin typeface="Arial" panose="020B0604020202020204" pitchFamily="34" charset="0"/>
+              </a:defRPr>
+            </a:lvl3pPr>
+            <a:lvl4pPr eaLnBrk="0" fontAlgn="base" hangingPunct="0">
+              <a:spcBef>
+                <a:spcPct val="0"/>
+              </a:spcBef>
+              <a:spcAft>
+                <a:spcPct val="0"/>
+              </a:spcAft>
+              <a:defRPr>
+                <a:solidFill>
+                  <a:schemeClr val="tx1"/>
+                </a:solidFill>
+                <a:latin typeface="Arial" panose="020B0604020202020204" pitchFamily="34" charset="0"/>
+              </a:defRPr>
+            </a:lvl4pPr>
+            <a:lvl5pPr eaLnBrk="0" fontAlgn="base" hangingPunct="0">
+              <a:spcBef>
+                <a:spcPct val="0"/>
+              </a:spcBef>
+              <a:spcAft>
+                <a:spcPct val="0"/>
+              </a:spcAft>
+              <a:defRPr>
+                <a:solidFill>
+                  <a:schemeClr val="tx1"/>
+                </a:solidFill>
+                <a:latin typeface="Arial" panose="020B0604020202020204" pitchFamily="34" charset="0"/>
+              </a:defRPr>
+            </a:lvl5pPr>
+            <a:lvl6pPr eaLnBrk="0" fontAlgn="base" hangingPunct="0">
+              <a:spcBef>
+                <a:spcPct val="0"/>
+              </a:spcBef>
+              <a:spcAft>
+                <a:spcPct val="0"/>
+              </a:spcAft>
+              <a:defRPr>
+                <a:solidFill>
+                  <a:schemeClr val="tx1"/>
+                </a:solidFill>
+                <a:latin typeface="Arial" panose="020B0604020202020204" pitchFamily="34" charset="0"/>
+              </a:defRPr>
+            </a:lvl6pPr>
+            <a:lvl7pPr eaLnBrk="0" fontAlgn="base" hangingPunct="0">
+              <a:spcBef>
+                <a:spcPct val="0"/>
+              </a:spcBef>
+              <a:spcAft>
+                <a:spcPct val="0"/>
+              </a:spcAft>
+              <a:defRPr>
+                <a:solidFill>
+                  <a:schemeClr val="tx1"/>
+                </a:solidFill>
+                <a:latin typeface="Arial" panose="020B0604020202020204" pitchFamily="34" charset="0"/>
+              </a:defRPr>
+            </a:lvl7pPr>
+            <a:lvl8pPr eaLnBrk="0" fontAlgn="base" hangingPunct="0">
+              <a:spcBef>
+                <a:spcPct val="0"/>
+              </a:spcBef>
+              <a:spcAft>
+                <a:spcPct val="0"/>
+              </a:spcAft>
+              <a:defRPr>
+                <a:solidFill>
+                  <a:schemeClr val="tx1"/>
+                </a:solidFill>
+                <a:latin typeface="Arial" panose="020B0604020202020204" pitchFamily="34" charset="0"/>
+              </a:defRPr>
+            </a:lvl8pPr>
+            <a:lvl9pPr eaLnBrk="0" fontAlgn="base" hangingPunct="0">
+              <a:spcBef>
+                <a:spcPct val="0"/>
+              </a:spcBef>
+              <a:spcAft>
+                <a:spcPct val="0"/>
+              </a:spcAft>
+              <a:defRPr>
+                <a:solidFill>
+                  <a:schemeClr val="tx1"/>
+                </a:solidFill>
+                <a:latin typeface="Arial" panose="020B0604020202020204" pitchFamily="34" charset="0"/>
+              </a:defRPr>
+            </a:lvl9pPr>
+          </a:lstStyle>
+          <a:p>
+            <a:pPr lvl="0"/>
+            <a:r>
+              <a:rPr lang="ru-RU" altLang="ru-RU" sz="5500" b="1" dirty="0">
+                <a:solidFill>
+                  <a:srgbClr val="000000"/>
+                </a:solidFill>
+                <a:latin typeface="Times New Roman" panose="02020603050405020304" pitchFamily="18" charset="0"/>
+                <a:cs typeface="Times New Roman" panose="02020603050405020304" pitchFamily="18" charset="0"/>
+              </a:rPr>
+              <a:t>Операторы сравнения</a:t>
+            </a:r>
+            <a:endParaRPr kumimoji="0" lang="ru-RU" altLang="ru-RU" sz="1800" b="0" i="0" u="none" strike="noStrike" cap="none" normalizeH="0" baseline="0" dirty="0">
+              <a:ln>
+                <a:noFill/>
+              </a:ln>
+              <a:solidFill>
+                <a:schemeClr val="tx1"/>
+              </a:solidFill>
+              <a:effectLst/>
+              <a:latin typeface="Times New Roman" panose="02020603050405020304" pitchFamily="18" charset="0"/>
+              <a:cs typeface="Times New Roman" panose="02020603050405020304" pitchFamily="18" charset="0"/>
+            </a:endParaRPr>
+          </a:p>
+        </p:txBody>
+      </p:sp>
+      <p:pic>
+        <p:nvPicPr>
+          <p:cNvPr id="3" name="Рисунок 2">
+            <a:extLst>
+              <a:ext uri="{FF2B5EF4-FFF2-40B4-BE49-F238E27FC236}">
+                <a16:creationId xmlns:a16="http://schemas.microsoft.com/office/drawing/2014/main" id="{05FBBF50-82A5-7955-B6EA-74409D50B8AA}"/>
+              </a:ext>
+            </a:extLst>
+          </p:cNvPr>
+          <p:cNvPicPr>
+            <a:picLocks noChangeAspect="1"/>
+          </p:cNvPicPr>
+          <p:nvPr/>
+        </p:nvPicPr>
+        <p:blipFill>
+          <a:blip r:embed="rId4"/>
+          <a:stretch>
+            <a:fillRect/>
+          </a:stretch>
+        </p:blipFill>
+        <p:spPr>
+          <a:xfrm>
+            <a:off x="1975637" y="1671886"/>
+            <a:ext cx="8240725" cy="4817655"/>
+          </a:xfrm>
+          <a:prstGeom prst="rect">
+            <a:avLst/>
+          </a:prstGeom>
+          <a:solidFill>
+            <a:srgbClr val="FFFFFF">
+              <a:shade val="85000"/>
+            </a:srgbClr>
+          </a:solidFill>
+          <a:ln w="88900" cap="sq">
+            <a:solidFill>
+              <a:srgbClr val="FFFFFF"/>
+            </a:solidFill>
+            <a:miter lim="800000"/>
+          </a:ln>
+          <a:effectLst>
+            <a:outerShdw blurRad="55000" dist="18000" dir="5400000" algn="tl" rotWithShape="0">
+              <a:srgbClr val="000000">
+                <a:alpha val="40000"/>
+              </a:srgbClr>
+            </a:outerShdw>
+          </a:effectLst>
+          <a:scene3d>
+            <a:camera prst="orthographicFront"/>
+            <a:lightRig rig="twoPt" dir="t">
+              <a:rot lat="0" lon="0" rev="7200000"/>
+            </a:lightRig>
+          </a:scene3d>
+          <a:sp3d>
+            <a:bevelT w="25400" h="19050"/>
+            <a:contourClr>
+              <a:srgbClr val="FFFFFF"/>
+            </a:contourClr>
+          </a:sp3d>
+        </p:spPr>
+      </p:pic>
+    </p:spTree>
+    <p:extLst>
+      <p:ext uri="{BB962C8B-B14F-4D97-AF65-F5344CB8AC3E}">
+        <p14:creationId xmlns:p14="http://schemas.microsoft.com/office/powerpoint/2010/main" val="3783972418"/>
+      </p:ext>
+    </p:extLst>
+  </p:cSld>
+  <p:clrMapOvr>
+    <a:masterClrMapping/>
+  </p:clrMapOvr>
+</p:sld>
+</file>
+
+<file path=ppt/slides/slide8.xml><?xml version="1.0" encoding="utf-8"?>
+<p:sld xmlns:a="http://schemas.openxmlformats.org/drawingml/2006/main" xmlns:r="http://schemas.openxmlformats.org/officeDocument/2006/relationships" xmlns:p="http://schemas.openxmlformats.org/presentationml/2006/main">
+  <p:cSld>
+    <p:spTree>
+      <p:nvGrpSpPr>
+        <p:cNvPr id="1" name="">
+          <a:extLst>
+            <a:ext uri="{FF2B5EF4-FFF2-40B4-BE49-F238E27FC236}">
+              <a16:creationId xmlns:a16="http://schemas.microsoft.com/office/drawing/2014/main" id="{5B1CB0E8-A473-6AA2-1C46-F78204130D1F}"/>
+            </a:ext>
+          </a:extLst>
+        </p:cNvPr>
+        <p:cNvGrpSpPr/>
+        <p:nvPr/>
+      </p:nvGrpSpPr>
+      <p:grpSpPr>
+        <a:xfrm>
+          <a:off x="0" y="0"/>
+          <a:ext cx="0" cy="0"/>
+          <a:chOff x="0" y="0"/>
+          <a:chExt cx="0" cy="0"/>
+        </a:xfrm>
+      </p:grpSpPr>
+      <p:pic>
+        <p:nvPicPr>
+          <p:cNvPr id="2075" name="Рисунок 2074">
+            <a:extLst>
+              <a:ext uri="{FF2B5EF4-FFF2-40B4-BE49-F238E27FC236}">
+                <a16:creationId xmlns:a16="http://schemas.microsoft.com/office/drawing/2014/main" id="{837DA8E5-EB8A-ADA7-C815-283B4E2D9D6E}"/>
+              </a:ext>
+            </a:extLst>
+          </p:cNvPr>
+          <p:cNvPicPr>
+            <a:picLocks noChangeAspect="1"/>
+          </p:cNvPicPr>
+          <p:nvPr/>
+        </p:nvPicPr>
+        <p:blipFill>
+          <a:blip r:embed="rId3">
+            <a:extLst>
+              <a:ext uri="{28A0092B-C50C-407E-A947-70E740481C1C}">
+                <a14:useLocalDpi xmlns:a14="http://schemas.microsoft.com/office/drawing/2010/main" val="0"/>
+              </a:ext>
+            </a:extLst>
+          </a:blip>
+          <a:stretch>
+            <a:fillRect/>
+          </a:stretch>
+        </p:blipFill>
+        <p:spPr>
+          <a:xfrm>
+            <a:off x="0" y="0"/>
+            <a:ext cx="12191999" cy="6858000"/>
+          </a:xfrm>
+          <a:prstGeom prst="rect">
+            <a:avLst/>
+          </a:prstGeom>
+        </p:spPr>
+      </p:pic>
+      <p:sp>
+        <p:nvSpPr>
+          <p:cNvPr id="5" name="Rectangle 6">
+            <a:extLst>
+              <a:ext uri="{FF2B5EF4-FFF2-40B4-BE49-F238E27FC236}">
+                <a16:creationId xmlns:a16="http://schemas.microsoft.com/office/drawing/2014/main" id="{1D0A65D1-E5B6-3C5D-A4E3-326FD1A12F97}"/>
+              </a:ext>
+            </a:extLst>
+          </p:cNvPr>
+          <p:cNvSpPr>
+            <a:spLocks noChangeArrowheads="1"/>
+          </p:cNvSpPr>
+          <p:nvPr/>
+        </p:nvSpPr>
+        <p:spPr bwMode="auto">
+          <a:xfrm>
+            <a:off x="485775" y="412750"/>
+            <a:ext cx="8818696" cy="923330"/>
+          </a:xfrm>
+          <a:prstGeom prst="rect">
+            <a:avLst/>
+          </a:prstGeom>
+          <a:noFill/>
+          <a:ln>
+            <a:noFill/>
+          </a:ln>
+          <a:extLst>
+            <a:ext uri="{909E8E84-426E-40DD-AFC4-6F175D3DCCD1}">
+              <a14:hiddenFill xmlns:a14="http://schemas.microsoft.com/office/drawing/2010/main">
+                <a:solidFill>
+                  <a:srgbClr val="FFFFFF"/>
+                </a:solidFill>
+              </a14:hiddenFill>
+            </a:ext>
+            <a:ext uri="{91240B29-F687-4F45-9708-019B960494DF}">
+              <a14:hiddenLine xmlns:a14="http://schemas.microsoft.com/office/drawing/2010/main" w="9525">
+                <a:solidFill>
+                  <a:srgbClr val="000000"/>
+                </a:solidFill>
+                <a:miter lim="800000"/>
+                <a:headEnd/>
+                <a:tailEnd/>
+              </a14:hiddenLine>
+            </a:ext>
+          </a:extLst>
+        </p:spPr>
+        <p:txBody>
+          <a:bodyPr vert="horz" wrap="none" lIns="0" tIns="0" rIns="0" bIns="0" numCol="1" anchor="t" anchorCtr="0" compatLnSpc="1">
+            <a:prstTxWarp prst="textNoShape">
+              <a:avLst/>
+            </a:prstTxWarp>
+            <a:spAutoFit/>
+          </a:bodyPr>
+          <a:lstStyle>
+            <a:lvl1pPr eaLnBrk="0" fontAlgn="base" hangingPunct="0">
+              <a:spcBef>
+                <a:spcPct val="0"/>
+              </a:spcBef>
+              <a:spcAft>
+                <a:spcPct val="0"/>
+              </a:spcAft>
+              <a:defRPr>
+                <a:solidFill>
+                  <a:schemeClr val="tx1"/>
+                </a:solidFill>
+                <a:latin typeface="Arial" panose="020B0604020202020204" pitchFamily="34" charset="0"/>
+              </a:defRPr>
+            </a:lvl1pPr>
+            <a:lvl2pPr eaLnBrk="0" fontAlgn="base" hangingPunct="0">
+              <a:spcBef>
+                <a:spcPct val="0"/>
+              </a:spcBef>
+              <a:spcAft>
+                <a:spcPct val="0"/>
+              </a:spcAft>
+              <a:defRPr>
+                <a:solidFill>
+                  <a:schemeClr val="tx1"/>
+                </a:solidFill>
+                <a:latin typeface="Arial" panose="020B0604020202020204" pitchFamily="34" charset="0"/>
+              </a:defRPr>
+            </a:lvl2pPr>
+            <a:lvl3pPr eaLnBrk="0" fontAlgn="base" hangingPunct="0">
+              <a:spcBef>
+                <a:spcPct val="0"/>
+              </a:spcBef>
+              <a:spcAft>
+                <a:spcPct val="0"/>
+              </a:spcAft>
+              <a:defRPr>
+                <a:solidFill>
+                  <a:schemeClr val="tx1"/>
+                </a:solidFill>
+                <a:latin typeface="Arial" panose="020B0604020202020204" pitchFamily="34" charset="0"/>
+              </a:defRPr>
+            </a:lvl3pPr>
+            <a:lvl4pPr eaLnBrk="0" fontAlgn="base" hangingPunct="0">
+              <a:spcBef>
+                <a:spcPct val="0"/>
+              </a:spcBef>
+              <a:spcAft>
+                <a:spcPct val="0"/>
+              </a:spcAft>
+              <a:defRPr>
+                <a:solidFill>
+                  <a:schemeClr val="tx1"/>
+                </a:solidFill>
+                <a:latin typeface="Arial" panose="020B0604020202020204" pitchFamily="34" charset="0"/>
+              </a:defRPr>
+            </a:lvl4pPr>
+            <a:lvl5pPr eaLnBrk="0" fontAlgn="base" hangingPunct="0">
+              <a:spcBef>
+                <a:spcPct val="0"/>
+              </a:spcBef>
+              <a:spcAft>
+                <a:spcPct val="0"/>
+              </a:spcAft>
+              <a:defRPr>
+                <a:solidFill>
+                  <a:schemeClr val="tx1"/>
+                </a:solidFill>
+                <a:latin typeface="Arial" panose="020B0604020202020204" pitchFamily="34" charset="0"/>
+              </a:defRPr>
+            </a:lvl5pPr>
+            <a:lvl6pPr eaLnBrk="0" fontAlgn="base" hangingPunct="0">
+              <a:spcBef>
+                <a:spcPct val="0"/>
+              </a:spcBef>
+              <a:spcAft>
+                <a:spcPct val="0"/>
+              </a:spcAft>
+              <a:defRPr>
+                <a:solidFill>
+                  <a:schemeClr val="tx1"/>
+                </a:solidFill>
+                <a:latin typeface="Arial" panose="020B0604020202020204" pitchFamily="34" charset="0"/>
+              </a:defRPr>
+            </a:lvl6pPr>
+            <a:lvl7pPr eaLnBrk="0" fontAlgn="base" hangingPunct="0">
+              <a:spcBef>
+                <a:spcPct val="0"/>
+              </a:spcBef>
+              <a:spcAft>
+                <a:spcPct val="0"/>
+              </a:spcAft>
+              <a:defRPr>
+                <a:solidFill>
+                  <a:schemeClr val="tx1"/>
+                </a:solidFill>
+                <a:latin typeface="Arial" panose="020B0604020202020204" pitchFamily="34" charset="0"/>
+              </a:defRPr>
+            </a:lvl7pPr>
+            <a:lvl8pPr eaLnBrk="0" fontAlgn="base" hangingPunct="0">
+              <a:spcBef>
+                <a:spcPct val="0"/>
+              </a:spcBef>
+              <a:spcAft>
+                <a:spcPct val="0"/>
+              </a:spcAft>
+              <a:defRPr>
+                <a:solidFill>
+                  <a:schemeClr val="tx1"/>
+                </a:solidFill>
+                <a:latin typeface="Arial" panose="020B0604020202020204" pitchFamily="34" charset="0"/>
+              </a:defRPr>
+            </a:lvl8pPr>
+            <a:lvl9pPr eaLnBrk="0" fontAlgn="base" hangingPunct="0">
+              <a:spcBef>
+                <a:spcPct val="0"/>
+              </a:spcBef>
+              <a:spcAft>
+                <a:spcPct val="0"/>
+              </a:spcAft>
+              <a:defRPr>
+                <a:solidFill>
+                  <a:schemeClr val="tx1"/>
+                </a:solidFill>
+                <a:latin typeface="Arial" panose="020B0604020202020204" pitchFamily="34" charset="0"/>
+              </a:defRPr>
+            </a:lvl9pPr>
+          </a:lstStyle>
+          <a:p>
+            <a:r>
+              <a:rPr lang="ru-RU" sz="6000" b="1" dirty="0"/>
+              <a:t>Логические операторы</a:t>
+            </a:r>
+          </a:p>
+        </p:txBody>
+      </p:sp>
+      <p:pic>
+        <p:nvPicPr>
+          <p:cNvPr id="3" name="Рисунок 2">
+            <a:extLst>
+              <a:ext uri="{FF2B5EF4-FFF2-40B4-BE49-F238E27FC236}">
+                <a16:creationId xmlns:a16="http://schemas.microsoft.com/office/drawing/2014/main" id="{B67F111E-26CD-0612-130E-D95701D1661B}"/>
+              </a:ext>
+            </a:extLst>
+          </p:cNvPr>
+          <p:cNvPicPr>
+            <a:picLocks noChangeAspect="1"/>
+          </p:cNvPicPr>
+          <p:nvPr/>
+        </p:nvPicPr>
+        <p:blipFill>
+          <a:blip r:embed="rId4"/>
+          <a:stretch>
+            <a:fillRect/>
+          </a:stretch>
+        </p:blipFill>
+        <p:spPr>
+          <a:xfrm>
+            <a:off x="3242847" y="1646826"/>
+            <a:ext cx="5706303" cy="1782174"/>
+          </a:xfrm>
+          <a:prstGeom prst="rect">
+            <a:avLst/>
+          </a:prstGeom>
+          <a:solidFill>
+            <a:srgbClr val="FFFFFF">
+              <a:shade val="85000"/>
+            </a:srgbClr>
+          </a:solidFill>
+          <a:ln w="88900" cap="sq">
+            <a:solidFill>
+              <a:srgbClr val="FFFFFF"/>
+            </a:solidFill>
+            <a:miter lim="800000"/>
+          </a:ln>
+          <a:effectLst>
+            <a:outerShdw blurRad="55000" dist="18000" dir="5400000" algn="tl" rotWithShape="0">
+              <a:srgbClr val="000000">
+                <a:alpha val="40000"/>
+              </a:srgbClr>
+            </a:outerShdw>
+          </a:effectLst>
+          <a:scene3d>
+            <a:camera prst="orthographicFront"/>
+            <a:lightRig rig="twoPt" dir="t">
+              <a:rot lat="0" lon="0" rev="7200000"/>
+            </a:lightRig>
+          </a:scene3d>
+          <a:sp3d>
+            <a:bevelT w="25400" h="19050"/>
+            <a:contourClr>
+              <a:srgbClr val="FFFFFF"/>
+            </a:contourClr>
+          </a:sp3d>
+        </p:spPr>
+      </p:pic>
+      <p:pic>
+        <p:nvPicPr>
+          <p:cNvPr id="6" name="Рисунок 5">
+            <a:extLst>
+              <a:ext uri="{FF2B5EF4-FFF2-40B4-BE49-F238E27FC236}">
+                <a16:creationId xmlns:a16="http://schemas.microsoft.com/office/drawing/2014/main" id="{BDECA11B-9497-AEE5-04F7-461AAD08BDF2}"/>
+              </a:ext>
+            </a:extLst>
+          </p:cNvPr>
+          <p:cNvPicPr>
+            <a:picLocks noChangeAspect="1"/>
+          </p:cNvPicPr>
+          <p:nvPr/>
+        </p:nvPicPr>
+        <p:blipFill>
+          <a:blip r:embed="rId5"/>
+          <a:stretch>
+            <a:fillRect/>
+          </a:stretch>
+        </p:blipFill>
+        <p:spPr>
+          <a:xfrm>
+            <a:off x="7342047" y="3928742"/>
+            <a:ext cx="3924848" cy="2400635"/>
+          </a:xfrm>
+          <a:prstGeom prst="rect">
+            <a:avLst/>
+          </a:prstGeom>
+          <a:solidFill>
+            <a:srgbClr val="FFFFFF">
+              <a:shade val="85000"/>
+            </a:srgbClr>
+          </a:solidFill>
+          <a:ln w="88900" cap="sq">
+            <a:solidFill>
+              <a:srgbClr val="FFFFFF"/>
+            </a:solidFill>
+            <a:miter lim="800000"/>
+          </a:ln>
+          <a:effectLst>
+            <a:outerShdw blurRad="55000" dist="18000" dir="5400000" algn="tl" rotWithShape="0">
+              <a:srgbClr val="000000">
+                <a:alpha val="40000"/>
+              </a:srgbClr>
+            </a:outerShdw>
+          </a:effectLst>
+          <a:scene3d>
+            <a:camera prst="orthographicFront"/>
+            <a:lightRig rig="twoPt" dir="t">
+              <a:rot lat="0" lon="0" rev="7200000"/>
+            </a:lightRig>
+          </a:scene3d>
+          <a:sp3d>
+            <a:bevelT w="25400" h="19050"/>
+            <a:contourClr>
+              <a:srgbClr val="FFFFFF"/>
+            </a:contourClr>
+          </a:sp3d>
+        </p:spPr>
+      </p:pic>
+      <p:pic>
+        <p:nvPicPr>
+          <p:cNvPr id="8" name="Рисунок 7">
+            <a:extLst>
+              <a:ext uri="{FF2B5EF4-FFF2-40B4-BE49-F238E27FC236}">
+                <a16:creationId xmlns:a16="http://schemas.microsoft.com/office/drawing/2014/main" id="{BE2AFAAC-ECCD-9396-C354-AFAFD9434DD8}"/>
+              </a:ext>
+            </a:extLst>
+          </p:cNvPr>
+          <p:cNvPicPr>
+            <a:picLocks noChangeAspect="1"/>
+          </p:cNvPicPr>
+          <p:nvPr/>
+        </p:nvPicPr>
+        <p:blipFill>
+          <a:blip r:embed="rId6"/>
+          <a:stretch>
+            <a:fillRect/>
+          </a:stretch>
+        </p:blipFill>
+        <p:spPr>
+          <a:xfrm>
+            <a:off x="485775" y="3928742"/>
+            <a:ext cx="3886742" cy="2438740"/>
+          </a:xfrm>
+          <a:prstGeom prst="rect">
+            <a:avLst/>
+          </a:prstGeom>
+          <a:solidFill>
+            <a:srgbClr val="FFFFFF">
+              <a:shade val="85000"/>
+            </a:srgbClr>
+          </a:solidFill>
+          <a:ln w="88900" cap="sq">
+            <a:solidFill>
+              <a:srgbClr val="FFFFFF"/>
+            </a:solidFill>
+            <a:miter lim="800000"/>
+          </a:ln>
+          <a:effectLst>
+            <a:outerShdw blurRad="55000" dist="18000" dir="5400000" algn="tl" rotWithShape="0">
+              <a:srgbClr val="000000">
+                <a:alpha val="40000"/>
+              </a:srgbClr>
+            </a:outerShdw>
+          </a:effectLst>
+          <a:scene3d>
+            <a:camera prst="orthographicFront"/>
+            <a:lightRig rig="twoPt" dir="t">
+              <a:rot lat="0" lon="0" rev="7200000"/>
+            </a:lightRig>
+          </a:scene3d>
+          <a:sp3d>
+            <a:bevelT w="25400" h="19050"/>
+            <a:contourClr>
+              <a:srgbClr val="FFFFFF"/>
+            </a:contourClr>
+          </a:sp3d>
+        </p:spPr>
+      </p:pic>
+    </p:spTree>
+    <p:extLst>
+      <p:ext uri="{BB962C8B-B14F-4D97-AF65-F5344CB8AC3E}">
+        <p14:creationId xmlns:p14="http://schemas.microsoft.com/office/powerpoint/2010/main" val="1037235786"/>
+      </p:ext>
+    </p:extLst>
+  </p:cSld>
+  <p:clrMapOvr>
+    <a:masterClrMapping/>
+  </p:clrMapOvr>
+</p:sld>
+</file>
+
+<file path=ppt/slides/slide9.xml><?xml version="1.0" encoding="utf-8"?>
+<p:sld xmlns:a="http://schemas.openxmlformats.org/drawingml/2006/main" xmlns:r="http://schemas.openxmlformats.org/officeDocument/2006/relationships" xmlns:p="http://schemas.openxmlformats.org/presentationml/2006/main">
+  <p:cSld>
+    <p:spTree>
+      <p:nvGrpSpPr>
+        <p:cNvPr id="1" name="">
+          <a:extLst>
+            <a:ext uri="{FF2B5EF4-FFF2-40B4-BE49-F238E27FC236}">
               <a16:creationId xmlns:a16="http://schemas.microsoft.com/office/drawing/2014/main" id="{4D451EF6-1669-D0BE-5C75-31ABD253BE6F}"/>
             </a:ext>
           </a:extLst>
@@ -8486,300 +9812,6 @@
     <p:extLst>
       <p:ext uri="{BB962C8B-B14F-4D97-AF65-F5344CB8AC3E}">
         <p14:creationId xmlns:p14="http://schemas.microsoft.com/office/powerpoint/2010/main" val="1462149807"/>
-      </p:ext>
-    </p:extLst>
-  </p:cSld>
-  <p:clrMapOvr>
-    <a:masterClrMapping/>
-  </p:clrMapOvr>
-</p:sld>
-</file>
-
-<file path=ppt/slides/slide8.xml><?xml version="1.0" encoding="utf-8"?>
-<p:sld xmlns:a="http://schemas.openxmlformats.org/drawingml/2006/main" xmlns:r="http://schemas.openxmlformats.org/officeDocument/2006/relationships" xmlns:p="http://schemas.openxmlformats.org/presentationml/2006/main">
-  <p:cSld>
-    <p:spTree>
-      <p:nvGrpSpPr>
-        <p:cNvPr id="1" name="">
-          <a:extLst>
-            <a:ext uri="{FF2B5EF4-FFF2-40B4-BE49-F238E27FC236}">
-              <a16:creationId xmlns:a16="http://schemas.microsoft.com/office/drawing/2014/main" id="{8C5D4276-4AF3-5F49-4C87-1563081110F6}"/>
-            </a:ext>
-          </a:extLst>
-        </p:cNvPr>
-        <p:cNvGrpSpPr/>
-        <p:nvPr/>
-      </p:nvGrpSpPr>
-      <p:grpSpPr>
-        <a:xfrm>
-          <a:off x="0" y="0"/>
-          <a:ext cx="0" cy="0"/>
-          <a:chOff x="0" y="0"/>
-          <a:chExt cx="0" cy="0"/>
-        </a:xfrm>
-      </p:grpSpPr>
-      <p:pic>
-        <p:nvPicPr>
-          <p:cNvPr id="3" name="Рисунок 2">
-            <a:extLst>
-              <a:ext uri="{FF2B5EF4-FFF2-40B4-BE49-F238E27FC236}">
-                <a16:creationId xmlns:a16="http://schemas.microsoft.com/office/drawing/2014/main" id="{0F7DC897-35C1-018A-2269-FFC91DEC757F}"/>
-              </a:ext>
-            </a:extLst>
-          </p:cNvPr>
-          <p:cNvPicPr>
-            <a:picLocks noChangeAspect="1"/>
-          </p:cNvPicPr>
-          <p:nvPr/>
-        </p:nvPicPr>
-        <p:blipFill>
-          <a:blip r:embed="rId2">
-            <a:extLst>
-              <a:ext uri="{28A0092B-C50C-407E-A947-70E740481C1C}">
-                <a14:useLocalDpi xmlns:a14="http://schemas.microsoft.com/office/drawing/2010/main" val="0"/>
-              </a:ext>
-            </a:extLst>
-          </a:blip>
-          <a:stretch>
-            <a:fillRect/>
-          </a:stretch>
-        </p:blipFill>
-        <p:spPr>
-          <a:xfrm>
-            <a:off x="0" y="0"/>
-            <a:ext cx="12191999" cy="6858000"/>
-          </a:xfrm>
-          <a:prstGeom prst="rect">
-            <a:avLst/>
-          </a:prstGeom>
-        </p:spPr>
-      </p:pic>
-      <p:sp>
-        <p:nvSpPr>
-          <p:cNvPr id="5" name="Rectangle 6">
-            <a:extLst>
-              <a:ext uri="{FF2B5EF4-FFF2-40B4-BE49-F238E27FC236}">
-                <a16:creationId xmlns:a16="http://schemas.microsoft.com/office/drawing/2014/main" id="{130F4290-6452-4D11-C374-B58B5B0B5D49}"/>
-              </a:ext>
-            </a:extLst>
-          </p:cNvPr>
-          <p:cNvSpPr>
-            <a:spLocks noChangeArrowheads="1"/>
-          </p:cNvSpPr>
-          <p:nvPr/>
-        </p:nvSpPr>
-        <p:spPr bwMode="auto">
-          <a:xfrm>
-            <a:off x="2274600" y="3005807"/>
-            <a:ext cx="7642798" cy="846386"/>
-          </a:xfrm>
-          <a:prstGeom prst="rect">
-            <a:avLst/>
-          </a:prstGeom>
-          <a:noFill/>
-          <a:ln>
-            <a:noFill/>
-          </a:ln>
-          <a:extLst>
-            <a:ext uri="{909E8E84-426E-40DD-AFC4-6F175D3DCCD1}">
-              <a14:hiddenFill xmlns:a14="http://schemas.microsoft.com/office/drawing/2010/main">
-                <a:solidFill>
-                  <a:srgbClr val="FFFFFF"/>
-                </a:solidFill>
-              </a14:hiddenFill>
-            </a:ext>
-            <a:ext uri="{91240B29-F687-4F45-9708-019B960494DF}">
-              <a14:hiddenLine xmlns:a14="http://schemas.microsoft.com/office/drawing/2010/main" w="9525">
-                <a:solidFill>
-                  <a:srgbClr val="000000"/>
-                </a:solidFill>
-                <a:miter lim="800000"/>
-                <a:headEnd/>
-                <a:tailEnd/>
-              </a14:hiddenLine>
-            </a:ext>
-          </a:extLst>
-        </p:spPr>
-        <p:txBody>
-          <a:bodyPr vert="horz" wrap="none" lIns="0" tIns="0" rIns="0" bIns="0" numCol="1" anchor="t" anchorCtr="0" compatLnSpc="1">
-            <a:prstTxWarp prst="textNoShape">
-              <a:avLst/>
-            </a:prstTxWarp>
-            <a:spAutoFit/>
-          </a:bodyPr>
-          <a:lstStyle>
-            <a:lvl1pPr eaLnBrk="0" fontAlgn="base" hangingPunct="0">
-              <a:spcBef>
-                <a:spcPct val="0"/>
-              </a:spcBef>
-              <a:spcAft>
-                <a:spcPct val="0"/>
-              </a:spcAft>
-              <a:defRPr>
-                <a:solidFill>
-                  <a:schemeClr val="tx1"/>
-                </a:solidFill>
-                <a:latin typeface="Arial" panose="020B0604020202020204" pitchFamily="34" charset="0"/>
-              </a:defRPr>
-            </a:lvl1pPr>
-            <a:lvl2pPr eaLnBrk="0" fontAlgn="base" hangingPunct="0">
-              <a:spcBef>
-                <a:spcPct val="0"/>
-              </a:spcBef>
-              <a:spcAft>
-                <a:spcPct val="0"/>
-              </a:spcAft>
-              <a:defRPr>
-                <a:solidFill>
-                  <a:schemeClr val="tx1"/>
-                </a:solidFill>
-                <a:latin typeface="Arial" panose="020B0604020202020204" pitchFamily="34" charset="0"/>
-              </a:defRPr>
-            </a:lvl2pPr>
-            <a:lvl3pPr eaLnBrk="0" fontAlgn="base" hangingPunct="0">
-              <a:spcBef>
-                <a:spcPct val="0"/>
-              </a:spcBef>
-              <a:spcAft>
-                <a:spcPct val="0"/>
-              </a:spcAft>
-              <a:defRPr>
-                <a:solidFill>
-                  <a:schemeClr val="tx1"/>
-                </a:solidFill>
-                <a:latin typeface="Arial" panose="020B0604020202020204" pitchFamily="34" charset="0"/>
-              </a:defRPr>
-            </a:lvl3pPr>
-            <a:lvl4pPr eaLnBrk="0" fontAlgn="base" hangingPunct="0">
-              <a:spcBef>
-                <a:spcPct val="0"/>
-              </a:spcBef>
-              <a:spcAft>
-                <a:spcPct val="0"/>
-              </a:spcAft>
-              <a:defRPr>
-                <a:solidFill>
-                  <a:schemeClr val="tx1"/>
-                </a:solidFill>
-                <a:latin typeface="Arial" panose="020B0604020202020204" pitchFamily="34" charset="0"/>
-              </a:defRPr>
-            </a:lvl4pPr>
-            <a:lvl5pPr eaLnBrk="0" fontAlgn="base" hangingPunct="0">
-              <a:spcBef>
-                <a:spcPct val="0"/>
-              </a:spcBef>
-              <a:spcAft>
-                <a:spcPct val="0"/>
-              </a:spcAft>
-              <a:defRPr>
-                <a:solidFill>
-                  <a:schemeClr val="tx1"/>
-                </a:solidFill>
-                <a:latin typeface="Arial" panose="020B0604020202020204" pitchFamily="34" charset="0"/>
-              </a:defRPr>
-            </a:lvl5pPr>
-            <a:lvl6pPr eaLnBrk="0" fontAlgn="base" hangingPunct="0">
-              <a:spcBef>
-                <a:spcPct val="0"/>
-              </a:spcBef>
-              <a:spcAft>
-                <a:spcPct val="0"/>
-              </a:spcAft>
-              <a:defRPr>
-                <a:solidFill>
-                  <a:schemeClr val="tx1"/>
-                </a:solidFill>
-                <a:latin typeface="Arial" panose="020B0604020202020204" pitchFamily="34" charset="0"/>
-              </a:defRPr>
-            </a:lvl6pPr>
-            <a:lvl7pPr eaLnBrk="0" fontAlgn="base" hangingPunct="0">
-              <a:spcBef>
-                <a:spcPct val="0"/>
-              </a:spcBef>
-              <a:spcAft>
-                <a:spcPct val="0"/>
-              </a:spcAft>
-              <a:defRPr>
-                <a:solidFill>
-                  <a:schemeClr val="tx1"/>
-                </a:solidFill>
-                <a:latin typeface="Arial" panose="020B0604020202020204" pitchFamily="34" charset="0"/>
-              </a:defRPr>
-            </a:lvl7pPr>
-            <a:lvl8pPr eaLnBrk="0" fontAlgn="base" hangingPunct="0">
-              <a:spcBef>
-                <a:spcPct val="0"/>
-              </a:spcBef>
-              <a:spcAft>
-                <a:spcPct val="0"/>
-              </a:spcAft>
-              <a:defRPr>
-                <a:solidFill>
-                  <a:schemeClr val="tx1"/>
-                </a:solidFill>
-                <a:latin typeface="Arial" panose="020B0604020202020204" pitchFamily="34" charset="0"/>
-              </a:defRPr>
-            </a:lvl8pPr>
-            <a:lvl9pPr eaLnBrk="0" fontAlgn="base" hangingPunct="0">
-              <a:spcBef>
-                <a:spcPct val="0"/>
-              </a:spcBef>
-              <a:spcAft>
-                <a:spcPct val="0"/>
-              </a:spcAft>
-              <a:defRPr>
-                <a:solidFill>
-                  <a:schemeClr val="tx1"/>
-                </a:solidFill>
-                <a:latin typeface="Arial" panose="020B0604020202020204" pitchFamily="34" charset="0"/>
-              </a:defRPr>
-            </a:lvl9pPr>
-          </a:lstStyle>
-          <a:p>
-            <a:pPr marL="0" marR="0" lvl="0" indent="0" algn="l" defTabSz="914400" rtl="0" eaLnBrk="0" fontAlgn="base" latinLnBrk="0" hangingPunct="0">
-              <a:lnSpc>
-                <a:spcPct val="100000"/>
-              </a:lnSpc>
-              <a:spcBef>
-                <a:spcPct val="0"/>
-              </a:spcBef>
-              <a:spcAft>
-                <a:spcPct val="0"/>
-              </a:spcAft>
-              <a:buClrTx/>
-              <a:buSzTx/>
-              <a:buFontTx/>
-              <a:buNone/>
-              <a:tabLst/>
-            </a:pPr>
-            <a:r>
-              <a:rPr lang="ru-RU" altLang="ru-RU" sz="5500" b="1" dirty="0">
-                <a:solidFill>
-                  <a:srgbClr val="000000"/>
-                </a:solidFill>
-                <a:latin typeface="Times New Roman" panose="02020603050405020304" pitchFamily="18" charset="0"/>
-                <a:cs typeface="Times New Roman" panose="02020603050405020304" pitchFamily="18" charset="0"/>
-              </a:rPr>
-              <a:t>Переходим к практике !</a:t>
-            </a:r>
-            <a:endParaRPr kumimoji="0" lang="ru-RU" altLang="ru-RU" sz="1800" b="0" i="0" u="none" strike="noStrike" cap="none" normalizeH="0" baseline="0" dirty="0">
-              <a:ln>
-                <a:noFill/>
-              </a:ln>
-              <a:solidFill>
-                <a:schemeClr val="tx1"/>
-              </a:solidFill>
-              <a:effectLst/>
-              <a:latin typeface="Times New Roman" panose="02020603050405020304" pitchFamily="18" charset="0"/>
-              <a:cs typeface="Times New Roman" panose="02020603050405020304" pitchFamily="18" charset="0"/>
-            </a:endParaRPr>
-          </a:p>
-        </p:txBody>
-      </p:sp>
-    </p:spTree>
-    <p:extLst>
-      <p:ext uri="{BB962C8B-B14F-4D97-AF65-F5344CB8AC3E}">
-        <p14:creationId xmlns:p14="http://schemas.microsoft.com/office/powerpoint/2010/main" val="2581744596"/>
       </p:ext>
     </p:extLst>
   </p:cSld>

--- a/2 занятие/Презентация.pptx
+++ b/2 занятие/Презентация.pptx
@@ -5,19 +5,22 @@
     <p:sldMasterId id="2147483648" r:id="rId1"/>
   </p:sldMasterIdLst>
   <p:notesMasterIdLst>
-    <p:notesMasterId r:id="rId12"/>
+    <p:notesMasterId r:id="rId15"/>
   </p:notesMasterIdLst>
   <p:sldIdLst>
     <p:sldId id="340" r:id="rId2"/>
     <p:sldId id="347" r:id="rId3"/>
-    <p:sldId id="341" r:id="rId4"/>
-    <p:sldId id="351" r:id="rId5"/>
-    <p:sldId id="344" r:id="rId6"/>
-    <p:sldId id="345" r:id="rId7"/>
-    <p:sldId id="353" r:id="rId8"/>
-    <p:sldId id="354" r:id="rId9"/>
-    <p:sldId id="352" r:id="rId10"/>
-    <p:sldId id="350" r:id="rId11"/>
+    <p:sldId id="356" r:id="rId4"/>
+    <p:sldId id="355" r:id="rId5"/>
+    <p:sldId id="341" r:id="rId6"/>
+    <p:sldId id="357" r:id="rId7"/>
+    <p:sldId id="351" r:id="rId8"/>
+    <p:sldId id="344" r:id="rId9"/>
+    <p:sldId id="345" r:id="rId10"/>
+    <p:sldId id="353" r:id="rId11"/>
+    <p:sldId id="354" r:id="rId12"/>
+    <p:sldId id="352" r:id="rId13"/>
+    <p:sldId id="350" r:id="rId14"/>
   </p:sldIdLst>
   <p:sldSz cx="12192000" cy="6858000"/>
   <p:notesSz cx="6858000" cy="9144000"/>
@@ -206,7 +209,7 @@
           <a:p>
             <a:fld id="{67773027-2AB3-4DAB-83B2-DF4B13C5C569}" type="datetimeFigureOut">
               <a:rPr lang="ru-RU" smtClean="0"/>
-              <a:t>24.10.2026</a:t>
+              <a:t>31.10.2026</a:t>
             </a:fld>
             <a:endParaRPr lang="ru-RU"/>
           </a:p>
@@ -563,7 +566,7 @@
           <a:p>
             <a:fld id="{027685D7-C350-491D-A933-7035F35F7262}" type="slidenum">
               <a:rPr lang="ru-RU" smtClean="0"/>
-              <a:t>3</a:t>
+              <a:t>5</a:t>
             </a:fld>
             <a:endParaRPr lang="ru-RU"/>
           </a:p>
@@ -583,6 +586,139 @@
 </file>
 
 <file path=ppt/notesSlides/notesSlide2.xml><?xml version="1.0" encoding="utf-8"?>
+<p:notes xmlns:a="http://schemas.openxmlformats.org/drawingml/2006/main" xmlns:r="http://schemas.openxmlformats.org/officeDocument/2006/relationships" xmlns:p="http://schemas.openxmlformats.org/presentationml/2006/main">
+  <p:cSld>
+    <p:spTree>
+      <p:nvGrpSpPr>
+        <p:cNvPr id="1" name="">
+          <a:extLst>
+            <a:ext uri="{FF2B5EF4-FFF2-40B4-BE49-F238E27FC236}">
+              <a16:creationId xmlns:a16="http://schemas.microsoft.com/office/drawing/2014/main" id="{4BECF821-45B1-8ACA-6A39-96FAEC9EE593}"/>
+            </a:ext>
+          </a:extLst>
+        </p:cNvPr>
+        <p:cNvGrpSpPr/>
+        <p:nvPr/>
+      </p:nvGrpSpPr>
+      <p:grpSpPr>
+        <a:xfrm>
+          <a:off x="0" y="0"/>
+          <a:ext cx="0" cy="0"/>
+          <a:chOff x="0" y="0"/>
+          <a:chExt cx="0" cy="0"/>
+        </a:xfrm>
+      </p:grpSpPr>
+      <p:sp>
+        <p:nvSpPr>
+          <p:cNvPr id="2" name="Образ слайда 1">
+            <a:extLst>
+              <a:ext uri="{FF2B5EF4-FFF2-40B4-BE49-F238E27FC236}">
+                <a16:creationId xmlns:a16="http://schemas.microsoft.com/office/drawing/2014/main" id="{9484AE11-64E6-FD01-940B-D1B280760A83}"/>
+              </a:ext>
+            </a:extLst>
+          </p:cNvPr>
+          <p:cNvSpPr>
+            <a:spLocks noGrp="1" noRot="1" noChangeAspect="1"/>
+          </p:cNvSpPr>
+          <p:nvPr>
+            <p:ph type="sldImg"/>
+          </p:nvPr>
+        </p:nvSpPr>
+        <p:spPr/>
+      </p:sp>
+      <p:sp>
+        <p:nvSpPr>
+          <p:cNvPr id="3" name="Заметки 2">
+            <a:extLst>
+              <a:ext uri="{FF2B5EF4-FFF2-40B4-BE49-F238E27FC236}">
+                <a16:creationId xmlns:a16="http://schemas.microsoft.com/office/drawing/2014/main" id="{F74706D4-11FB-E975-3B3D-F540AF14E696}"/>
+              </a:ext>
+            </a:extLst>
+          </p:cNvPr>
+          <p:cNvSpPr>
+            <a:spLocks noGrp="1"/>
+          </p:cNvSpPr>
+          <p:nvPr>
+            <p:ph type="body" idx="1"/>
+          </p:nvPr>
+        </p:nvSpPr>
+        <p:spPr/>
+        <p:txBody>
+          <a:bodyPr/>
+          <a:lstStyle/>
+          <a:p>
+            <a:pPr marL="0" marR="0" lvl="0" indent="0" algn="l" defTabSz="914400" rtl="0" eaLnBrk="1" fontAlgn="auto" latinLnBrk="0" hangingPunct="1">
+              <a:lnSpc>
+                <a:spcPct val="100000"/>
+              </a:lnSpc>
+              <a:spcBef>
+                <a:spcPts val="0"/>
+              </a:spcBef>
+              <a:spcAft>
+                <a:spcPts val="0"/>
+              </a:spcAft>
+              <a:buClrTx/>
+              <a:buSzTx/>
+              <a:buFontTx/>
+              <a:buNone/>
+              <a:tabLst/>
+              <a:defRPr/>
+            </a:pPr>
+            <a:endParaRPr lang="ru-RU" sz="1200" b="0" kern="1200" dirty="0">
+              <a:solidFill>
+                <a:schemeClr val="tx1"/>
+              </a:solidFill>
+              <a:effectLst/>
+              <a:latin typeface="+mn-lt"/>
+              <a:ea typeface="+mn-ea"/>
+              <a:cs typeface="+mn-cs"/>
+            </a:endParaRPr>
+          </a:p>
+        </p:txBody>
+      </p:sp>
+      <p:sp>
+        <p:nvSpPr>
+          <p:cNvPr id="4" name="Номер слайда 3">
+            <a:extLst>
+              <a:ext uri="{FF2B5EF4-FFF2-40B4-BE49-F238E27FC236}">
+                <a16:creationId xmlns:a16="http://schemas.microsoft.com/office/drawing/2014/main" id="{90E72D83-21DD-8A25-4DA0-F58BCD335251}"/>
+              </a:ext>
+            </a:extLst>
+          </p:cNvPr>
+          <p:cNvSpPr>
+            <a:spLocks noGrp="1"/>
+          </p:cNvSpPr>
+          <p:nvPr>
+            <p:ph type="sldNum" sz="quarter" idx="5"/>
+          </p:nvPr>
+        </p:nvSpPr>
+        <p:spPr/>
+        <p:txBody>
+          <a:bodyPr/>
+          <a:lstStyle/>
+          <a:p>
+            <a:fld id="{027685D7-C350-491D-A933-7035F35F7262}" type="slidenum">
+              <a:rPr lang="ru-RU" smtClean="0"/>
+              <a:t>6</a:t>
+            </a:fld>
+            <a:endParaRPr lang="ru-RU"/>
+          </a:p>
+        </p:txBody>
+      </p:sp>
+    </p:spTree>
+    <p:extLst>
+      <p:ext uri="{BB962C8B-B14F-4D97-AF65-F5344CB8AC3E}">
+        <p14:creationId xmlns:p14="http://schemas.microsoft.com/office/powerpoint/2010/main" val="2542168666"/>
+      </p:ext>
+    </p:extLst>
+  </p:cSld>
+  <p:clrMapOvr>
+    <a:masterClrMapping/>
+  </p:clrMapOvr>
+</p:notes>
+</file>
+
+<file path=ppt/notesSlides/notesSlide3.xml><?xml version="1.0" encoding="utf-8"?>
 <p:notes xmlns:a="http://schemas.openxmlformats.org/drawingml/2006/main" xmlns:r="http://schemas.openxmlformats.org/officeDocument/2006/relationships" xmlns:p="http://schemas.openxmlformats.org/presentationml/2006/main">
   <p:cSld>
     <p:spTree>
@@ -696,7 +832,7 @@
           <a:p>
             <a:fld id="{027685D7-C350-491D-A933-7035F35F7262}" type="slidenum">
               <a:rPr lang="ru-RU" smtClean="0"/>
-              <a:t>4</a:t>
+              <a:t>7</a:t>
             </a:fld>
             <a:endParaRPr lang="ru-RU"/>
           </a:p>
@@ -706,510 +842,6 @@
     <p:extLst>
       <p:ext uri="{BB962C8B-B14F-4D97-AF65-F5344CB8AC3E}">
         <p14:creationId xmlns:p14="http://schemas.microsoft.com/office/powerpoint/2010/main" val="4069955846"/>
-      </p:ext>
-    </p:extLst>
-  </p:cSld>
-  <p:clrMapOvr>
-    <a:masterClrMapping/>
-  </p:clrMapOvr>
-</p:notes>
-</file>
-
-<file path=ppt/notesSlides/notesSlide3.xml><?xml version="1.0" encoding="utf-8"?>
-<p:notes xmlns:a="http://schemas.openxmlformats.org/drawingml/2006/main" xmlns:r="http://schemas.openxmlformats.org/officeDocument/2006/relationships" xmlns:p="http://schemas.openxmlformats.org/presentationml/2006/main">
-  <p:cSld>
-    <p:spTree>
-      <p:nvGrpSpPr>
-        <p:cNvPr id="1" name=""/>
-        <p:cNvGrpSpPr/>
-        <p:nvPr/>
-      </p:nvGrpSpPr>
-      <p:grpSpPr>
-        <a:xfrm>
-          <a:off x="0" y="0"/>
-          <a:ext cx="0" cy="0"/>
-          <a:chOff x="0" y="0"/>
-          <a:chExt cx="0" cy="0"/>
-        </a:xfrm>
-      </p:grpSpPr>
-      <p:sp>
-        <p:nvSpPr>
-          <p:cNvPr id="2" name="Образ слайда 1"/>
-          <p:cNvSpPr>
-            <a:spLocks noGrp="1" noRot="1" noChangeAspect="1"/>
-          </p:cNvSpPr>
-          <p:nvPr>
-            <p:ph type="sldImg"/>
-          </p:nvPr>
-        </p:nvSpPr>
-        <p:spPr/>
-      </p:sp>
-      <p:sp>
-        <p:nvSpPr>
-          <p:cNvPr id="3" name="Заметки 2"/>
-          <p:cNvSpPr>
-            <a:spLocks noGrp="1"/>
-          </p:cNvSpPr>
-          <p:nvPr>
-            <p:ph type="body" idx="1"/>
-          </p:nvPr>
-        </p:nvSpPr>
-        <p:spPr/>
-        <p:txBody>
-          <a:bodyPr/>
-          <a:lstStyle/>
-          <a:p>
-            <a:r>
-              <a:rPr lang="en-US" sz="1200" b="0" kern="1200" dirty="0">
-                <a:solidFill>
-                  <a:schemeClr val="tx1"/>
-                </a:solidFill>
-                <a:effectLst/>
-                <a:latin typeface="+mn-lt"/>
-                <a:ea typeface="+mn-ea"/>
-                <a:cs typeface="+mn-cs"/>
-              </a:rPr>
-              <a:t>using System;</a:t>
-            </a:r>
-          </a:p>
-          <a:p>
-            <a:r>
-              <a:rPr lang="en-US" sz="1200" b="0" kern="1200" dirty="0">
-                <a:solidFill>
-                  <a:schemeClr val="tx1"/>
-                </a:solidFill>
-                <a:effectLst/>
-                <a:latin typeface="+mn-lt"/>
-                <a:ea typeface="+mn-ea"/>
-                <a:cs typeface="+mn-cs"/>
-              </a:rPr>
-              <a:t>					</a:t>
-            </a:r>
-          </a:p>
-          <a:p>
-            <a:r>
-              <a:rPr lang="en-US" sz="1200" b="0" kern="1200" dirty="0">
-                <a:solidFill>
-                  <a:schemeClr val="tx1"/>
-                </a:solidFill>
-                <a:effectLst/>
-                <a:latin typeface="+mn-lt"/>
-                <a:ea typeface="+mn-ea"/>
-                <a:cs typeface="+mn-cs"/>
-              </a:rPr>
-              <a:t>public class Program</a:t>
-            </a:r>
-          </a:p>
-          <a:p>
-            <a:r>
-              <a:rPr lang="en-US" sz="1200" b="0" kern="1200" dirty="0">
-                <a:solidFill>
-                  <a:schemeClr val="tx1"/>
-                </a:solidFill>
-                <a:effectLst/>
-                <a:latin typeface="+mn-lt"/>
-                <a:ea typeface="+mn-ea"/>
-                <a:cs typeface="+mn-cs"/>
-              </a:rPr>
-              <a:t>{</a:t>
-            </a:r>
-          </a:p>
-          <a:p>
-            <a:r>
-              <a:rPr lang="en-US" sz="1200" b="0" kern="1200" dirty="0">
-                <a:solidFill>
-                  <a:schemeClr val="tx1"/>
-                </a:solidFill>
-                <a:effectLst/>
-                <a:latin typeface="+mn-lt"/>
-                <a:ea typeface="+mn-ea"/>
-                <a:cs typeface="+mn-cs"/>
-              </a:rPr>
-              <a:t>	public static void Main()</a:t>
-            </a:r>
-          </a:p>
-          <a:p>
-            <a:r>
-              <a:rPr lang="en-US" sz="1200" b="0" kern="1200" dirty="0">
-                <a:solidFill>
-                  <a:schemeClr val="tx1"/>
-                </a:solidFill>
-                <a:effectLst/>
-                <a:latin typeface="+mn-lt"/>
-                <a:ea typeface="+mn-ea"/>
-                <a:cs typeface="+mn-cs"/>
-              </a:rPr>
-              <a:t>	{</a:t>
-            </a:r>
-          </a:p>
-          <a:p>
-            <a:r>
-              <a:rPr lang="en-US" sz="1200" b="0" kern="1200" dirty="0">
-                <a:solidFill>
-                  <a:schemeClr val="tx1"/>
-                </a:solidFill>
-                <a:effectLst/>
-                <a:latin typeface="+mn-lt"/>
-                <a:ea typeface="+mn-ea"/>
-                <a:cs typeface="+mn-cs"/>
-              </a:rPr>
-              <a:t>		int temperature = Convert.ToInt32(</a:t>
-            </a:r>
-            <a:r>
-              <a:rPr lang="en-US" sz="1200" b="0" kern="1200" dirty="0" err="1">
-                <a:solidFill>
-                  <a:schemeClr val="tx1"/>
-                </a:solidFill>
-                <a:effectLst/>
-                <a:latin typeface="+mn-lt"/>
-                <a:ea typeface="+mn-ea"/>
-                <a:cs typeface="+mn-cs"/>
-              </a:rPr>
-              <a:t>Console.ReadLine</a:t>
-            </a:r>
-            <a:r>
-              <a:rPr lang="en-US" sz="1200" b="0" kern="1200" dirty="0">
-                <a:solidFill>
-                  <a:schemeClr val="tx1"/>
-                </a:solidFill>
-                <a:effectLst/>
-                <a:latin typeface="+mn-lt"/>
-                <a:ea typeface="+mn-ea"/>
-                <a:cs typeface="+mn-cs"/>
-              </a:rPr>
-              <a:t>());</a:t>
-            </a:r>
-          </a:p>
-          <a:p>
-            <a:r>
-              <a:rPr lang="en-US" sz="1200" b="0" kern="1200" dirty="0">
-                <a:solidFill>
-                  <a:schemeClr val="tx1"/>
-                </a:solidFill>
-                <a:effectLst/>
-                <a:latin typeface="+mn-lt"/>
-                <a:ea typeface="+mn-ea"/>
-                <a:cs typeface="+mn-cs"/>
-              </a:rPr>
-              <a:t>		bool </a:t>
-            </a:r>
-            <a:r>
-              <a:rPr lang="en-US" sz="1200" b="0" kern="1200" dirty="0" err="1">
-                <a:solidFill>
-                  <a:schemeClr val="tx1"/>
-                </a:solidFill>
-                <a:effectLst/>
-                <a:latin typeface="+mn-lt"/>
-                <a:ea typeface="+mn-ea"/>
-                <a:cs typeface="+mn-cs"/>
-              </a:rPr>
-              <a:t>isColdTemperature</a:t>
-            </a:r>
-            <a:r>
-              <a:rPr lang="en-US" sz="1200" b="0" kern="1200" dirty="0">
-                <a:solidFill>
-                  <a:schemeClr val="tx1"/>
-                </a:solidFill>
-                <a:effectLst/>
-                <a:latin typeface="+mn-lt"/>
-                <a:ea typeface="+mn-ea"/>
-                <a:cs typeface="+mn-cs"/>
-              </a:rPr>
-              <a:t> = temperature &lt; 0;</a:t>
-            </a:r>
-          </a:p>
-          <a:p>
-            <a:r>
-              <a:rPr lang="en-US" sz="1200" b="0" kern="1200" dirty="0">
-                <a:solidFill>
-                  <a:schemeClr val="tx1"/>
-                </a:solidFill>
-                <a:effectLst/>
-                <a:latin typeface="+mn-lt"/>
-                <a:ea typeface="+mn-ea"/>
-                <a:cs typeface="+mn-cs"/>
-              </a:rPr>
-              <a:t>		</a:t>
-            </a:r>
-          </a:p>
-          <a:p>
-            <a:r>
-              <a:rPr lang="en-US" sz="1200" b="0" kern="1200" dirty="0">
-                <a:solidFill>
-                  <a:schemeClr val="tx1"/>
-                </a:solidFill>
-                <a:effectLst/>
-                <a:latin typeface="+mn-lt"/>
-                <a:ea typeface="+mn-ea"/>
-                <a:cs typeface="+mn-cs"/>
-              </a:rPr>
-              <a:t>		if (</a:t>
-            </a:r>
-            <a:r>
-              <a:rPr lang="en-US" sz="1200" b="0" kern="1200" dirty="0" err="1">
-                <a:solidFill>
-                  <a:schemeClr val="tx1"/>
-                </a:solidFill>
-                <a:effectLst/>
-                <a:latin typeface="+mn-lt"/>
-                <a:ea typeface="+mn-ea"/>
-                <a:cs typeface="+mn-cs"/>
-              </a:rPr>
-              <a:t>isColdTemperature</a:t>
-            </a:r>
-            <a:r>
-              <a:rPr lang="en-US" sz="1200" b="0" kern="1200" dirty="0">
-                <a:solidFill>
-                  <a:schemeClr val="tx1"/>
-                </a:solidFill>
-                <a:effectLst/>
-                <a:latin typeface="+mn-lt"/>
-                <a:ea typeface="+mn-ea"/>
-                <a:cs typeface="+mn-cs"/>
-              </a:rPr>
-              <a:t> == true)</a:t>
-            </a:r>
-          </a:p>
-          <a:p>
-            <a:r>
-              <a:rPr lang="en-US" sz="1200" b="0" kern="1200" dirty="0">
-                <a:solidFill>
-                  <a:schemeClr val="tx1"/>
-                </a:solidFill>
-                <a:effectLst/>
-                <a:latin typeface="+mn-lt"/>
-                <a:ea typeface="+mn-ea"/>
-                <a:cs typeface="+mn-cs"/>
-              </a:rPr>
-              <a:t>		{</a:t>
-            </a:r>
-          </a:p>
-          <a:p>
-            <a:r>
-              <a:rPr lang="en-US" sz="1200" b="0" kern="1200" dirty="0">
-                <a:solidFill>
-                  <a:schemeClr val="tx1"/>
-                </a:solidFill>
-                <a:effectLst/>
-                <a:latin typeface="+mn-lt"/>
-                <a:ea typeface="+mn-ea"/>
-                <a:cs typeface="+mn-cs"/>
-              </a:rPr>
-              <a:t>			</a:t>
-            </a:r>
-            <a:r>
-              <a:rPr lang="en-US" sz="1200" b="0" kern="1200" dirty="0" err="1">
-                <a:solidFill>
-                  <a:schemeClr val="tx1"/>
-                </a:solidFill>
-                <a:effectLst/>
-                <a:latin typeface="+mn-lt"/>
-                <a:ea typeface="+mn-ea"/>
-                <a:cs typeface="+mn-cs"/>
-              </a:rPr>
-              <a:t>Console.WriteLine</a:t>
-            </a:r>
-            <a:r>
-              <a:rPr lang="en-US" sz="1200" b="0" kern="1200" dirty="0">
-                <a:solidFill>
-                  <a:schemeClr val="tx1"/>
-                </a:solidFill>
-                <a:effectLst/>
-                <a:latin typeface="+mn-lt"/>
-                <a:ea typeface="+mn-ea"/>
-                <a:cs typeface="+mn-cs"/>
-              </a:rPr>
-              <a:t>("</a:t>
-            </a:r>
-            <a:r>
-              <a:rPr lang="ru-RU" sz="1200" b="0" kern="1200" dirty="0">
-                <a:solidFill>
-                  <a:schemeClr val="tx1"/>
-                </a:solidFill>
-                <a:effectLst/>
-                <a:latin typeface="+mn-lt"/>
-                <a:ea typeface="+mn-ea"/>
-                <a:cs typeface="+mn-cs"/>
-              </a:rPr>
-              <a:t>На улице тепло");</a:t>
-            </a:r>
-          </a:p>
-          <a:p>
-            <a:r>
-              <a:rPr lang="ru-RU" sz="1200" b="0" kern="1200" dirty="0">
-                <a:solidFill>
-                  <a:schemeClr val="tx1"/>
-                </a:solidFill>
-                <a:effectLst/>
-                <a:latin typeface="+mn-lt"/>
-                <a:ea typeface="+mn-ea"/>
-                <a:cs typeface="+mn-cs"/>
-              </a:rPr>
-              <a:t>		}</a:t>
-            </a:r>
-          </a:p>
-          <a:p>
-            <a:r>
-              <a:rPr lang="ru-RU" sz="1200" b="0" kern="1200" dirty="0">
-                <a:solidFill>
-                  <a:schemeClr val="tx1"/>
-                </a:solidFill>
-                <a:effectLst/>
-                <a:latin typeface="+mn-lt"/>
-                <a:ea typeface="+mn-ea"/>
-                <a:cs typeface="+mn-cs"/>
-              </a:rPr>
-              <a:t>		</a:t>
-            </a:r>
-            <a:r>
-              <a:rPr lang="en-US" sz="1200" b="0" kern="1200" dirty="0">
-                <a:solidFill>
-                  <a:schemeClr val="tx1"/>
-                </a:solidFill>
-                <a:effectLst/>
-                <a:latin typeface="+mn-lt"/>
-                <a:ea typeface="+mn-ea"/>
-                <a:cs typeface="+mn-cs"/>
-              </a:rPr>
-              <a:t>else</a:t>
-            </a:r>
-          </a:p>
-          <a:p>
-            <a:r>
-              <a:rPr lang="en-US" sz="1200" b="0" kern="1200" dirty="0">
-                <a:solidFill>
-                  <a:schemeClr val="tx1"/>
-                </a:solidFill>
-                <a:effectLst/>
-                <a:latin typeface="+mn-lt"/>
-                <a:ea typeface="+mn-ea"/>
-                <a:cs typeface="+mn-cs"/>
-              </a:rPr>
-              <a:t>		{</a:t>
-            </a:r>
-          </a:p>
-          <a:p>
-            <a:r>
-              <a:rPr lang="en-US" sz="1200" b="0" kern="1200" dirty="0">
-                <a:solidFill>
-                  <a:schemeClr val="tx1"/>
-                </a:solidFill>
-                <a:effectLst/>
-                <a:latin typeface="+mn-lt"/>
-                <a:ea typeface="+mn-ea"/>
-                <a:cs typeface="+mn-cs"/>
-              </a:rPr>
-              <a:t>			</a:t>
-            </a:r>
-            <a:r>
-              <a:rPr lang="en-US" sz="1200" b="0" kern="1200" dirty="0" err="1">
-                <a:solidFill>
-                  <a:schemeClr val="tx1"/>
-                </a:solidFill>
-                <a:effectLst/>
-                <a:latin typeface="+mn-lt"/>
-                <a:ea typeface="+mn-ea"/>
-                <a:cs typeface="+mn-cs"/>
-              </a:rPr>
-              <a:t>Console.WriteLine</a:t>
-            </a:r>
-            <a:r>
-              <a:rPr lang="en-US" sz="1200" b="0" kern="1200" dirty="0">
-                <a:solidFill>
-                  <a:schemeClr val="tx1"/>
-                </a:solidFill>
-                <a:effectLst/>
-                <a:latin typeface="+mn-lt"/>
-                <a:ea typeface="+mn-ea"/>
-                <a:cs typeface="+mn-cs"/>
-              </a:rPr>
-              <a:t>("</a:t>
-            </a:r>
-            <a:r>
-              <a:rPr lang="ru-RU" sz="1200" b="0" kern="1200" dirty="0">
-                <a:solidFill>
-                  <a:schemeClr val="tx1"/>
-                </a:solidFill>
-                <a:effectLst/>
-                <a:latin typeface="+mn-lt"/>
-                <a:ea typeface="+mn-ea"/>
-                <a:cs typeface="+mn-cs"/>
-              </a:rPr>
-              <a:t>На улице холодно");</a:t>
-            </a:r>
-          </a:p>
-          <a:p>
-            <a:r>
-              <a:rPr lang="ru-RU" sz="1200" b="0" kern="1200" dirty="0">
-                <a:solidFill>
-                  <a:schemeClr val="tx1"/>
-                </a:solidFill>
-                <a:effectLst/>
-                <a:latin typeface="+mn-lt"/>
-                <a:ea typeface="+mn-ea"/>
-                <a:cs typeface="+mn-cs"/>
-              </a:rPr>
-              <a:t>		}</a:t>
-            </a:r>
-          </a:p>
-          <a:p>
-            <a:r>
-              <a:rPr lang="ru-RU" sz="1200" b="0" kern="1200" dirty="0">
-                <a:solidFill>
-                  <a:schemeClr val="tx1"/>
-                </a:solidFill>
-                <a:effectLst/>
-                <a:latin typeface="+mn-lt"/>
-                <a:ea typeface="+mn-ea"/>
-                <a:cs typeface="+mn-cs"/>
-              </a:rPr>
-              <a:t>	}</a:t>
-            </a:r>
-          </a:p>
-          <a:p>
-            <a:r>
-              <a:rPr lang="ru-RU" sz="1200" b="0" kern="1200" dirty="0">
-                <a:solidFill>
-                  <a:schemeClr val="tx1"/>
-                </a:solidFill>
-                <a:effectLst/>
-                <a:latin typeface="+mn-lt"/>
-                <a:ea typeface="+mn-ea"/>
-                <a:cs typeface="+mn-cs"/>
-              </a:rPr>
-              <a:t>}</a:t>
-            </a:r>
-            <a:endParaRPr lang="ru-RU" dirty="0"/>
-          </a:p>
-        </p:txBody>
-      </p:sp>
-      <p:sp>
-        <p:nvSpPr>
-          <p:cNvPr id="4" name="Номер слайда 3"/>
-          <p:cNvSpPr>
-            <a:spLocks noGrp="1"/>
-          </p:cNvSpPr>
-          <p:nvPr>
-            <p:ph type="sldNum" sz="quarter" idx="5"/>
-          </p:nvPr>
-        </p:nvSpPr>
-        <p:spPr/>
-        <p:txBody>
-          <a:bodyPr/>
-          <a:lstStyle/>
-          <a:p>
-            <a:fld id="{027685D7-C350-491D-A933-7035F35F7262}" type="slidenum">
-              <a:rPr lang="ru-RU" smtClean="0"/>
-              <a:t>5</a:t>
-            </a:fld>
-            <a:endParaRPr lang="ru-RU"/>
-          </a:p>
-        </p:txBody>
-      </p:sp>
-    </p:spTree>
-    <p:extLst>
-      <p:ext uri="{BB962C8B-B14F-4D97-AF65-F5344CB8AC3E}">
-        <p14:creationId xmlns:p14="http://schemas.microsoft.com/office/powerpoint/2010/main" val="4028291419"/>
       </p:ext>
     </p:extLst>
   </p:cSld>
@@ -1395,12 +1027,10 @@
                 <a:ea typeface="+mn-ea"/>
                 <a:cs typeface="+mn-cs"/>
               </a:rPr>
-              <a:t>		</a:t>
-            </a:r>
-          </a:p>
-          <a:p>
-            <a:r>
-              <a:rPr lang="en-US" sz="1200" b="0" kern="1200" dirty="0">
+              <a:t>		bool </a:t>
+            </a:r>
+            <a:r>
+              <a:rPr lang="en-US" sz="1200" b="0" kern="1200" dirty="0" err="1">
                 <a:solidFill>
                   <a:schemeClr val="tx1"/>
                 </a:solidFill>
@@ -1409,10 +1039,8 @@
                 <a:ea typeface="+mn-ea"/>
                 <a:cs typeface="+mn-cs"/>
               </a:rPr>
-              <a:t>		if (temperature &gt; 50)</a:t>
-            </a:r>
-          </a:p>
-          <a:p>
+              <a:t>isColdTemperature</a:t>
+            </a:r>
             <a:r>
               <a:rPr lang="en-US" sz="1200" b="0" kern="1200" dirty="0">
                 <a:solidFill>
@@ -1423,7 +1051,7 @@
                 <a:ea typeface="+mn-ea"/>
                 <a:cs typeface="+mn-cs"/>
               </a:rPr>
-              <a:t>		{</a:t>
+              <a:t> = temperature &lt; 0;</a:t>
             </a:r>
           </a:p>
           <a:p>
@@ -1437,10 +1065,12 @@
                 <a:ea typeface="+mn-ea"/>
                 <a:cs typeface="+mn-cs"/>
               </a:rPr>
-              <a:t>			</a:t>
-            </a:r>
-            <a:r>
-              <a:rPr lang="en-US" sz="1200" b="0" kern="1200" dirty="0" err="1">
+              <a:t>		</a:t>
+            </a:r>
+          </a:p>
+          <a:p>
+            <a:r>
+              <a:rPr lang="en-US" sz="1200" b="0" kern="1200" dirty="0">
                 <a:solidFill>
                   <a:schemeClr val="tx1"/>
                 </a:solidFill>
@@ -1449,10 +1079,10 @@
                 <a:ea typeface="+mn-ea"/>
                 <a:cs typeface="+mn-cs"/>
               </a:rPr>
-              <a:t>Console.WriteLine</a:t>
-            </a:r>
-            <a:r>
-              <a:rPr lang="en-US" sz="1200" b="0" kern="1200" dirty="0">
+              <a:t>		if (</a:t>
+            </a:r>
+            <a:r>
+              <a:rPr lang="en-US" sz="1200" b="0" kern="1200" dirty="0" err="1">
                 <a:solidFill>
                   <a:schemeClr val="tx1"/>
                 </a:solidFill>
@@ -1461,10 +1091,10 @@
                 <a:ea typeface="+mn-ea"/>
                 <a:cs typeface="+mn-cs"/>
               </a:rPr>
-              <a:t>("</a:t>
-            </a:r>
-            <a:r>
-              <a:rPr lang="ru-RU" sz="1200" b="0" kern="1200" dirty="0">
+              <a:t>isColdTemperature</a:t>
+            </a:r>
+            <a:r>
+              <a:rPr lang="en-US" sz="1200" b="0" kern="1200" dirty="0">
                 <a:solidFill>
                   <a:schemeClr val="tx1"/>
                 </a:solidFill>
@@ -1473,12 +1103,12 @@
                 <a:ea typeface="+mn-ea"/>
                 <a:cs typeface="+mn-cs"/>
               </a:rPr>
-              <a:t>На улице ужасная жара");</a:t>
-            </a:r>
-          </a:p>
-          <a:p>
-            <a:r>
-              <a:rPr lang="ru-RU" sz="1200" b="0" kern="1200" dirty="0">
+              <a:t> == true)</a:t>
+            </a:r>
+          </a:p>
+          <a:p>
+            <a:r>
+              <a:rPr lang="en-US" sz="1200" b="0" kern="1200" dirty="0">
                 <a:solidFill>
                   <a:schemeClr val="tx1"/>
                 </a:solidFill>
@@ -1487,12 +1117,12 @@
                 <a:ea typeface="+mn-ea"/>
                 <a:cs typeface="+mn-cs"/>
               </a:rPr>
-              <a:t>		}</a:t>
-            </a:r>
-          </a:p>
-          <a:p>
-            <a:r>
-              <a:rPr lang="ru-RU" sz="1200" b="0" kern="1200" dirty="0">
+              <a:t>		{</a:t>
+            </a:r>
+          </a:p>
+          <a:p>
+            <a:r>
+              <a:rPr lang="en-US" sz="1200" b="0" kern="1200" dirty="0">
                 <a:solidFill>
                   <a:schemeClr val="tx1"/>
                 </a:solidFill>
@@ -1501,10 +1131,10 @@
                 <a:ea typeface="+mn-ea"/>
                 <a:cs typeface="+mn-cs"/>
               </a:rPr>
-              <a:t>		</a:t>
-            </a:r>
-            <a:r>
-              <a:rPr lang="en-US" sz="1200" b="0" kern="1200" dirty="0">
+              <a:t>			</a:t>
+            </a:r>
+            <a:r>
+              <a:rPr lang="en-US" sz="1200" b="0" kern="1200" dirty="0" err="1">
                 <a:solidFill>
                   <a:schemeClr val="tx1"/>
                 </a:solidFill>
@@ -1513,10 +1143,8 @@
                 <a:ea typeface="+mn-ea"/>
                 <a:cs typeface="+mn-cs"/>
               </a:rPr>
-              <a:t>else if (temperature &gt; 0)</a:t>
-            </a:r>
-          </a:p>
-          <a:p>
+              <a:t>Console.WriteLine</a:t>
+            </a:r>
             <a:r>
               <a:rPr lang="en-US" sz="1200" b="0" kern="1200" dirty="0">
                 <a:solidFill>
@@ -1527,12 +1155,10 @@
                 <a:ea typeface="+mn-ea"/>
                 <a:cs typeface="+mn-cs"/>
               </a:rPr>
-              <a:t>		{</a:t>
-            </a:r>
-          </a:p>
-          <a:p>
-            <a:r>
-              <a:rPr lang="en-US" sz="1200" b="0" kern="1200" dirty="0">
+              <a:t>("</a:t>
+            </a:r>
+            <a:r>
+              <a:rPr lang="ru-RU" sz="1200" b="0" kern="1200" dirty="0">
                 <a:solidFill>
                   <a:schemeClr val="tx1"/>
                 </a:solidFill>
@@ -1541,147 +1167,7 @@
                 <a:ea typeface="+mn-ea"/>
                 <a:cs typeface="+mn-cs"/>
               </a:rPr>
-              <a:t>			</a:t>
-            </a:r>
-            <a:r>
-              <a:rPr lang="en-US" sz="1200" b="0" kern="1200" dirty="0" err="1">
-                <a:solidFill>
-                  <a:schemeClr val="tx1"/>
-                </a:solidFill>
-                <a:effectLst/>
-                <a:latin typeface="+mn-lt"/>
-                <a:ea typeface="+mn-ea"/>
-                <a:cs typeface="+mn-cs"/>
-              </a:rPr>
-              <a:t>Console.WriteLine</a:t>
-            </a:r>
-            <a:r>
-              <a:rPr lang="en-US" sz="1200" b="0" kern="1200" dirty="0">
-                <a:solidFill>
-                  <a:schemeClr val="tx1"/>
-                </a:solidFill>
-                <a:effectLst/>
-                <a:latin typeface="+mn-lt"/>
-                <a:ea typeface="+mn-ea"/>
-                <a:cs typeface="+mn-cs"/>
-              </a:rPr>
-              <a:t>("</a:t>
-            </a:r>
-            <a:r>
-              <a:rPr lang="ru-RU" sz="1200" b="0" kern="1200" dirty="0">
-                <a:solidFill>
-                  <a:schemeClr val="tx1"/>
-                </a:solidFill>
-                <a:effectLst/>
-                <a:latin typeface="+mn-lt"/>
-                <a:ea typeface="+mn-ea"/>
-                <a:cs typeface="+mn-cs"/>
-              </a:rPr>
-              <a:t>На улице 0");</a:t>
-            </a:r>
-          </a:p>
-          <a:p>
-            <a:r>
-              <a:rPr lang="ru-RU" sz="1200" b="0" kern="1200" dirty="0">
-                <a:solidFill>
-                  <a:schemeClr val="tx1"/>
-                </a:solidFill>
-                <a:effectLst/>
-                <a:latin typeface="+mn-lt"/>
-                <a:ea typeface="+mn-ea"/>
-                <a:cs typeface="+mn-cs"/>
-              </a:rPr>
-              <a:t>		}</a:t>
-            </a:r>
-          </a:p>
-          <a:p>
-            <a:r>
-              <a:rPr lang="ru-RU" sz="1200" b="0" kern="1200" dirty="0">
-                <a:solidFill>
-                  <a:schemeClr val="tx1"/>
-                </a:solidFill>
-                <a:effectLst/>
-                <a:latin typeface="+mn-lt"/>
-                <a:ea typeface="+mn-ea"/>
-                <a:cs typeface="+mn-cs"/>
-              </a:rPr>
-              <a:t>		</a:t>
-            </a:r>
-            <a:r>
-              <a:rPr lang="en-US" sz="1200" b="0" kern="1200" dirty="0">
-                <a:solidFill>
-                  <a:schemeClr val="tx1"/>
-                </a:solidFill>
-                <a:effectLst/>
-                <a:latin typeface="+mn-lt"/>
-                <a:ea typeface="+mn-ea"/>
-                <a:cs typeface="+mn-cs"/>
-              </a:rPr>
-              <a:t>else if (temperature == 0)</a:t>
-            </a:r>
-          </a:p>
-          <a:p>
-            <a:r>
-              <a:rPr lang="en-US" sz="1200" b="0" kern="1200" dirty="0">
-                <a:solidFill>
-                  <a:schemeClr val="tx1"/>
-                </a:solidFill>
-                <a:effectLst/>
-                <a:latin typeface="+mn-lt"/>
-                <a:ea typeface="+mn-ea"/>
-                <a:cs typeface="+mn-cs"/>
-              </a:rPr>
-              <a:t>		{</a:t>
-            </a:r>
-          </a:p>
-          <a:p>
-            <a:r>
-              <a:rPr lang="en-US" sz="1200" b="0" kern="1200" dirty="0">
-                <a:solidFill>
-                  <a:schemeClr val="tx1"/>
-                </a:solidFill>
-                <a:effectLst/>
-                <a:latin typeface="+mn-lt"/>
-                <a:ea typeface="+mn-ea"/>
-                <a:cs typeface="+mn-cs"/>
-              </a:rPr>
-              <a:t>			</a:t>
-            </a:r>
-            <a:r>
-              <a:rPr lang="en-US" sz="1200" b="0" kern="1200" dirty="0" err="1">
-                <a:solidFill>
-                  <a:schemeClr val="tx1"/>
-                </a:solidFill>
-                <a:effectLst/>
-                <a:latin typeface="+mn-lt"/>
-                <a:ea typeface="+mn-ea"/>
-                <a:cs typeface="+mn-cs"/>
-              </a:rPr>
-              <a:t>Console.WriteLine</a:t>
-            </a:r>
-            <a:r>
-              <a:rPr lang="en-US" sz="1200" b="0" kern="1200" dirty="0">
-                <a:solidFill>
-                  <a:schemeClr val="tx1"/>
-                </a:solidFill>
-                <a:effectLst/>
-                <a:latin typeface="+mn-lt"/>
-                <a:ea typeface="+mn-ea"/>
-                <a:cs typeface="+mn-cs"/>
-              </a:rPr>
-              <a:t>("</a:t>
-            </a:r>
-            <a:r>
-              <a:rPr lang="ru-RU" sz="1200" b="0" kern="1200" dirty="0">
-                <a:solidFill>
-                  <a:schemeClr val="tx1"/>
-                </a:solidFill>
-                <a:effectLst/>
-                <a:latin typeface="+mn-lt"/>
-                <a:ea typeface="+mn-ea"/>
-                <a:cs typeface="+mn-cs"/>
-              </a:rPr>
-              <a:t>На улице 0");</a:t>
+              <a:t>На улице тепло");</a:t>
             </a:r>
           </a:p>
           <a:p>
@@ -1850,7 +1336,657 @@
           <a:p>
             <a:fld id="{027685D7-C350-491D-A933-7035F35F7262}" type="slidenum">
               <a:rPr lang="ru-RU" smtClean="0"/>
-              <a:t>6</a:t>
+              <a:t>8</a:t>
+            </a:fld>
+            <a:endParaRPr lang="ru-RU"/>
+          </a:p>
+        </p:txBody>
+      </p:sp>
+    </p:spTree>
+    <p:extLst>
+      <p:ext uri="{BB962C8B-B14F-4D97-AF65-F5344CB8AC3E}">
+        <p14:creationId xmlns:p14="http://schemas.microsoft.com/office/powerpoint/2010/main" val="4028291419"/>
+      </p:ext>
+    </p:extLst>
+  </p:cSld>
+  <p:clrMapOvr>
+    <a:masterClrMapping/>
+  </p:clrMapOvr>
+</p:notes>
+</file>
+
+<file path=ppt/notesSlides/notesSlide5.xml><?xml version="1.0" encoding="utf-8"?>
+<p:notes xmlns:a="http://schemas.openxmlformats.org/drawingml/2006/main" xmlns:r="http://schemas.openxmlformats.org/officeDocument/2006/relationships" xmlns:p="http://schemas.openxmlformats.org/presentationml/2006/main">
+  <p:cSld>
+    <p:spTree>
+      <p:nvGrpSpPr>
+        <p:cNvPr id="1" name=""/>
+        <p:cNvGrpSpPr/>
+        <p:nvPr/>
+      </p:nvGrpSpPr>
+      <p:grpSpPr>
+        <a:xfrm>
+          <a:off x="0" y="0"/>
+          <a:ext cx="0" cy="0"/>
+          <a:chOff x="0" y="0"/>
+          <a:chExt cx="0" cy="0"/>
+        </a:xfrm>
+      </p:grpSpPr>
+      <p:sp>
+        <p:nvSpPr>
+          <p:cNvPr id="2" name="Образ слайда 1"/>
+          <p:cNvSpPr>
+            <a:spLocks noGrp="1" noRot="1" noChangeAspect="1"/>
+          </p:cNvSpPr>
+          <p:nvPr>
+            <p:ph type="sldImg"/>
+          </p:nvPr>
+        </p:nvSpPr>
+        <p:spPr/>
+      </p:sp>
+      <p:sp>
+        <p:nvSpPr>
+          <p:cNvPr id="3" name="Заметки 2"/>
+          <p:cNvSpPr>
+            <a:spLocks noGrp="1"/>
+          </p:cNvSpPr>
+          <p:nvPr>
+            <p:ph type="body" idx="1"/>
+          </p:nvPr>
+        </p:nvSpPr>
+        <p:spPr/>
+        <p:txBody>
+          <a:bodyPr/>
+          <a:lstStyle/>
+          <a:p>
+            <a:r>
+              <a:rPr lang="en-US" sz="1200" b="0" kern="1200" dirty="0">
+                <a:solidFill>
+                  <a:schemeClr val="tx1"/>
+                </a:solidFill>
+                <a:effectLst/>
+                <a:latin typeface="+mn-lt"/>
+                <a:ea typeface="+mn-ea"/>
+                <a:cs typeface="+mn-cs"/>
+              </a:rPr>
+              <a:t>using System;</a:t>
+            </a:r>
+          </a:p>
+          <a:p>
+            <a:r>
+              <a:rPr lang="en-US" sz="1200" b="0" kern="1200" dirty="0">
+                <a:solidFill>
+                  <a:schemeClr val="tx1"/>
+                </a:solidFill>
+                <a:effectLst/>
+                <a:latin typeface="+mn-lt"/>
+                <a:ea typeface="+mn-ea"/>
+                <a:cs typeface="+mn-cs"/>
+              </a:rPr>
+              <a:t>					</a:t>
+            </a:r>
+          </a:p>
+          <a:p>
+            <a:r>
+              <a:rPr lang="en-US" sz="1200" b="0" kern="1200" dirty="0">
+                <a:solidFill>
+                  <a:schemeClr val="tx1"/>
+                </a:solidFill>
+                <a:effectLst/>
+                <a:latin typeface="+mn-lt"/>
+                <a:ea typeface="+mn-ea"/>
+                <a:cs typeface="+mn-cs"/>
+              </a:rPr>
+              <a:t>public class Program</a:t>
+            </a:r>
+          </a:p>
+          <a:p>
+            <a:r>
+              <a:rPr lang="en-US" sz="1200" b="0" kern="1200" dirty="0">
+                <a:solidFill>
+                  <a:schemeClr val="tx1"/>
+                </a:solidFill>
+                <a:effectLst/>
+                <a:latin typeface="+mn-lt"/>
+                <a:ea typeface="+mn-ea"/>
+                <a:cs typeface="+mn-cs"/>
+              </a:rPr>
+              <a:t>{</a:t>
+            </a:r>
+          </a:p>
+          <a:p>
+            <a:r>
+              <a:rPr lang="en-US" sz="1200" b="0" kern="1200" dirty="0">
+                <a:solidFill>
+                  <a:schemeClr val="tx1"/>
+                </a:solidFill>
+                <a:effectLst/>
+                <a:latin typeface="+mn-lt"/>
+                <a:ea typeface="+mn-ea"/>
+                <a:cs typeface="+mn-cs"/>
+              </a:rPr>
+              <a:t>	public static void Main()</a:t>
+            </a:r>
+          </a:p>
+          <a:p>
+            <a:r>
+              <a:rPr lang="en-US" sz="1200" b="0" kern="1200" dirty="0">
+                <a:solidFill>
+                  <a:schemeClr val="tx1"/>
+                </a:solidFill>
+                <a:effectLst/>
+                <a:latin typeface="+mn-lt"/>
+                <a:ea typeface="+mn-ea"/>
+                <a:cs typeface="+mn-cs"/>
+              </a:rPr>
+              <a:t>	{</a:t>
+            </a:r>
+          </a:p>
+          <a:p>
+            <a:r>
+              <a:rPr lang="en-US" sz="1200" b="0" kern="1200" dirty="0">
+                <a:solidFill>
+                  <a:schemeClr val="tx1"/>
+                </a:solidFill>
+                <a:effectLst/>
+                <a:latin typeface="+mn-lt"/>
+                <a:ea typeface="+mn-ea"/>
+                <a:cs typeface="+mn-cs"/>
+              </a:rPr>
+              <a:t>		int temperature = Convert.ToInt32(</a:t>
+            </a:r>
+            <a:r>
+              <a:rPr lang="en-US" sz="1200" b="0" kern="1200" dirty="0" err="1">
+                <a:solidFill>
+                  <a:schemeClr val="tx1"/>
+                </a:solidFill>
+                <a:effectLst/>
+                <a:latin typeface="+mn-lt"/>
+                <a:ea typeface="+mn-ea"/>
+                <a:cs typeface="+mn-cs"/>
+              </a:rPr>
+              <a:t>Console.ReadLine</a:t>
+            </a:r>
+            <a:r>
+              <a:rPr lang="en-US" sz="1200" b="0" kern="1200" dirty="0">
+                <a:solidFill>
+                  <a:schemeClr val="tx1"/>
+                </a:solidFill>
+                <a:effectLst/>
+                <a:latin typeface="+mn-lt"/>
+                <a:ea typeface="+mn-ea"/>
+                <a:cs typeface="+mn-cs"/>
+              </a:rPr>
+              <a:t>());</a:t>
+            </a:r>
+          </a:p>
+          <a:p>
+            <a:r>
+              <a:rPr lang="en-US" sz="1200" b="0" kern="1200" dirty="0">
+                <a:solidFill>
+                  <a:schemeClr val="tx1"/>
+                </a:solidFill>
+                <a:effectLst/>
+                <a:latin typeface="+mn-lt"/>
+                <a:ea typeface="+mn-ea"/>
+                <a:cs typeface="+mn-cs"/>
+              </a:rPr>
+              <a:t>		</a:t>
+            </a:r>
+          </a:p>
+          <a:p>
+            <a:r>
+              <a:rPr lang="en-US" sz="1200" b="0" kern="1200" dirty="0">
+                <a:solidFill>
+                  <a:schemeClr val="tx1"/>
+                </a:solidFill>
+                <a:effectLst/>
+                <a:latin typeface="+mn-lt"/>
+                <a:ea typeface="+mn-ea"/>
+                <a:cs typeface="+mn-cs"/>
+              </a:rPr>
+              <a:t>		if (temperature &gt; 50)</a:t>
+            </a:r>
+          </a:p>
+          <a:p>
+            <a:r>
+              <a:rPr lang="en-US" sz="1200" b="0" kern="1200" dirty="0">
+                <a:solidFill>
+                  <a:schemeClr val="tx1"/>
+                </a:solidFill>
+                <a:effectLst/>
+                <a:latin typeface="+mn-lt"/>
+                <a:ea typeface="+mn-ea"/>
+                <a:cs typeface="+mn-cs"/>
+              </a:rPr>
+              <a:t>		{</a:t>
+            </a:r>
+          </a:p>
+          <a:p>
+            <a:r>
+              <a:rPr lang="en-US" sz="1200" b="0" kern="1200" dirty="0">
+                <a:solidFill>
+                  <a:schemeClr val="tx1"/>
+                </a:solidFill>
+                <a:effectLst/>
+                <a:latin typeface="+mn-lt"/>
+                <a:ea typeface="+mn-ea"/>
+                <a:cs typeface="+mn-cs"/>
+              </a:rPr>
+              <a:t>			</a:t>
+            </a:r>
+            <a:r>
+              <a:rPr lang="en-US" sz="1200" b="0" kern="1200" dirty="0" err="1">
+                <a:solidFill>
+                  <a:schemeClr val="tx1"/>
+                </a:solidFill>
+                <a:effectLst/>
+                <a:latin typeface="+mn-lt"/>
+                <a:ea typeface="+mn-ea"/>
+                <a:cs typeface="+mn-cs"/>
+              </a:rPr>
+              <a:t>Console.WriteLine</a:t>
+            </a:r>
+            <a:r>
+              <a:rPr lang="en-US" sz="1200" b="0" kern="1200" dirty="0">
+                <a:solidFill>
+                  <a:schemeClr val="tx1"/>
+                </a:solidFill>
+                <a:effectLst/>
+                <a:latin typeface="+mn-lt"/>
+                <a:ea typeface="+mn-ea"/>
+                <a:cs typeface="+mn-cs"/>
+              </a:rPr>
+              <a:t>("</a:t>
+            </a:r>
+            <a:r>
+              <a:rPr lang="ru-RU" sz="1200" b="0" kern="1200" dirty="0">
+                <a:solidFill>
+                  <a:schemeClr val="tx1"/>
+                </a:solidFill>
+                <a:effectLst/>
+                <a:latin typeface="+mn-lt"/>
+                <a:ea typeface="+mn-ea"/>
+                <a:cs typeface="+mn-cs"/>
+              </a:rPr>
+              <a:t>На улице ужасная жара");</a:t>
+            </a:r>
+          </a:p>
+          <a:p>
+            <a:r>
+              <a:rPr lang="ru-RU" sz="1200" b="0" kern="1200" dirty="0">
+                <a:solidFill>
+                  <a:schemeClr val="tx1"/>
+                </a:solidFill>
+                <a:effectLst/>
+                <a:latin typeface="+mn-lt"/>
+                <a:ea typeface="+mn-ea"/>
+                <a:cs typeface="+mn-cs"/>
+              </a:rPr>
+              <a:t>		}</a:t>
+            </a:r>
+          </a:p>
+          <a:p>
+            <a:r>
+              <a:rPr lang="ru-RU" sz="1200" b="0" kern="1200" dirty="0">
+                <a:solidFill>
+                  <a:schemeClr val="tx1"/>
+                </a:solidFill>
+                <a:effectLst/>
+                <a:latin typeface="+mn-lt"/>
+                <a:ea typeface="+mn-ea"/>
+                <a:cs typeface="+mn-cs"/>
+              </a:rPr>
+              <a:t>		</a:t>
+            </a:r>
+            <a:r>
+              <a:rPr lang="en-US" sz="1200" b="0" kern="1200" dirty="0">
+                <a:solidFill>
+                  <a:schemeClr val="tx1"/>
+                </a:solidFill>
+                <a:effectLst/>
+                <a:latin typeface="+mn-lt"/>
+                <a:ea typeface="+mn-ea"/>
+                <a:cs typeface="+mn-cs"/>
+              </a:rPr>
+              <a:t>else if (temperature &gt; 0)</a:t>
+            </a:r>
+          </a:p>
+          <a:p>
+            <a:r>
+              <a:rPr lang="en-US" sz="1200" b="0" kern="1200" dirty="0">
+                <a:solidFill>
+                  <a:schemeClr val="tx1"/>
+                </a:solidFill>
+                <a:effectLst/>
+                <a:latin typeface="+mn-lt"/>
+                <a:ea typeface="+mn-ea"/>
+                <a:cs typeface="+mn-cs"/>
+              </a:rPr>
+              <a:t>		{</a:t>
+            </a:r>
+          </a:p>
+          <a:p>
+            <a:r>
+              <a:rPr lang="en-US" sz="1200" b="0" kern="1200" dirty="0">
+                <a:solidFill>
+                  <a:schemeClr val="tx1"/>
+                </a:solidFill>
+                <a:effectLst/>
+                <a:latin typeface="+mn-lt"/>
+                <a:ea typeface="+mn-ea"/>
+                <a:cs typeface="+mn-cs"/>
+              </a:rPr>
+              <a:t>			</a:t>
+            </a:r>
+            <a:r>
+              <a:rPr lang="en-US" sz="1200" b="0" kern="1200" dirty="0" err="1">
+                <a:solidFill>
+                  <a:schemeClr val="tx1"/>
+                </a:solidFill>
+                <a:effectLst/>
+                <a:latin typeface="+mn-lt"/>
+                <a:ea typeface="+mn-ea"/>
+                <a:cs typeface="+mn-cs"/>
+              </a:rPr>
+              <a:t>Console.WriteLine</a:t>
+            </a:r>
+            <a:r>
+              <a:rPr lang="en-US" sz="1200" b="0" kern="1200" dirty="0">
+                <a:solidFill>
+                  <a:schemeClr val="tx1"/>
+                </a:solidFill>
+                <a:effectLst/>
+                <a:latin typeface="+mn-lt"/>
+                <a:ea typeface="+mn-ea"/>
+                <a:cs typeface="+mn-cs"/>
+              </a:rPr>
+              <a:t>("</a:t>
+            </a:r>
+            <a:r>
+              <a:rPr lang="ru-RU" sz="1200" b="0" kern="1200" dirty="0">
+                <a:solidFill>
+                  <a:schemeClr val="tx1"/>
+                </a:solidFill>
+                <a:effectLst/>
+                <a:latin typeface="+mn-lt"/>
+                <a:ea typeface="+mn-ea"/>
+                <a:cs typeface="+mn-cs"/>
+              </a:rPr>
+              <a:t>На улице 0");</a:t>
+            </a:r>
+          </a:p>
+          <a:p>
+            <a:r>
+              <a:rPr lang="ru-RU" sz="1200" b="0" kern="1200" dirty="0">
+                <a:solidFill>
+                  <a:schemeClr val="tx1"/>
+                </a:solidFill>
+                <a:effectLst/>
+                <a:latin typeface="+mn-lt"/>
+                <a:ea typeface="+mn-ea"/>
+                <a:cs typeface="+mn-cs"/>
+              </a:rPr>
+              <a:t>		}</a:t>
+            </a:r>
+          </a:p>
+          <a:p>
+            <a:r>
+              <a:rPr lang="ru-RU" sz="1200" b="0" kern="1200" dirty="0">
+                <a:solidFill>
+                  <a:schemeClr val="tx1"/>
+                </a:solidFill>
+                <a:effectLst/>
+                <a:latin typeface="+mn-lt"/>
+                <a:ea typeface="+mn-ea"/>
+                <a:cs typeface="+mn-cs"/>
+              </a:rPr>
+              <a:t>		</a:t>
+            </a:r>
+            <a:r>
+              <a:rPr lang="en-US" sz="1200" b="0" kern="1200" dirty="0">
+                <a:solidFill>
+                  <a:schemeClr val="tx1"/>
+                </a:solidFill>
+                <a:effectLst/>
+                <a:latin typeface="+mn-lt"/>
+                <a:ea typeface="+mn-ea"/>
+                <a:cs typeface="+mn-cs"/>
+              </a:rPr>
+              <a:t>else if (temperature == 0)</a:t>
+            </a:r>
+          </a:p>
+          <a:p>
+            <a:r>
+              <a:rPr lang="en-US" sz="1200" b="0" kern="1200" dirty="0">
+                <a:solidFill>
+                  <a:schemeClr val="tx1"/>
+                </a:solidFill>
+                <a:effectLst/>
+                <a:latin typeface="+mn-lt"/>
+                <a:ea typeface="+mn-ea"/>
+                <a:cs typeface="+mn-cs"/>
+              </a:rPr>
+              <a:t>		{</a:t>
+            </a:r>
+          </a:p>
+          <a:p>
+            <a:r>
+              <a:rPr lang="en-US" sz="1200" b="0" kern="1200" dirty="0">
+                <a:solidFill>
+                  <a:schemeClr val="tx1"/>
+                </a:solidFill>
+                <a:effectLst/>
+                <a:latin typeface="+mn-lt"/>
+                <a:ea typeface="+mn-ea"/>
+                <a:cs typeface="+mn-cs"/>
+              </a:rPr>
+              <a:t>			</a:t>
+            </a:r>
+            <a:r>
+              <a:rPr lang="en-US" sz="1200" b="0" kern="1200" dirty="0" err="1">
+                <a:solidFill>
+                  <a:schemeClr val="tx1"/>
+                </a:solidFill>
+                <a:effectLst/>
+                <a:latin typeface="+mn-lt"/>
+                <a:ea typeface="+mn-ea"/>
+                <a:cs typeface="+mn-cs"/>
+              </a:rPr>
+              <a:t>Console.WriteLine</a:t>
+            </a:r>
+            <a:r>
+              <a:rPr lang="en-US" sz="1200" b="0" kern="1200" dirty="0">
+                <a:solidFill>
+                  <a:schemeClr val="tx1"/>
+                </a:solidFill>
+                <a:effectLst/>
+                <a:latin typeface="+mn-lt"/>
+                <a:ea typeface="+mn-ea"/>
+                <a:cs typeface="+mn-cs"/>
+              </a:rPr>
+              <a:t>("</a:t>
+            </a:r>
+            <a:r>
+              <a:rPr lang="ru-RU" sz="1200" b="0" kern="1200" dirty="0">
+                <a:solidFill>
+                  <a:schemeClr val="tx1"/>
+                </a:solidFill>
+                <a:effectLst/>
+                <a:latin typeface="+mn-lt"/>
+                <a:ea typeface="+mn-ea"/>
+                <a:cs typeface="+mn-cs"/>
+              </a:rPr>
+              <a:t>На улице 0");</a:t>
+            </a:r>
+          </a:p>
+          <a:p>
+            <a:r>
+              <a:rPr lang="ru-RU" sz="1200" b="0" kern="1200" dirty="0">
+                <a:solidFill>
+                  <a:schemeClr val="tx1"/>
+                </a:solidFill>
+                <a:effectLst/>
+                <a:latin typeface="+mn-lt"/>
+                <a:ea typeface="+mn-ea"/>
+                <a:cs typeface="+mn-cs"/>
+              </a:rPr>
+              <a:t>		}</a:t>
+            </a:r>
+          </a:p>
+          <a:p>
+            <a:r>
+              <a:rPr lang="ru-RU" sz="1200" b="0" kern="1200" dirty="0">
+                <a:solidFill>
+                  <a:schemeClr val="tx1"/>
+                </a:solidFill>
+                <a:effectLst/>
+                <a:latin typeface="+mn-lt"/>
+                <a:ea typeface="+mn-ea"/>
+                <a:cs typeface="+mn-cs"/>
+              </a:rPr>
+              <a:t>		</a:t>
+            </a:r>
+            <a:r>
+              <a:rPr lang="en-US" sz="1200" b="0" kern="1200" dirty="0">
+                <a:solidFill>
+                  <a:schemeClr val="tx1"/>
+                </a:solidFill>
+                <a:effectLst/>
+                <a:latin typeface="+mn-lt"/>
+                <a:ea typeface="+mn-ea"/>
+                <a:cs typeface="+mn-cs"/>
+              </a:rPr>
+              <a:t>else</a:t>
+            </a:r>
+          </a:p>
+          <a:p>
+            <a:r>
+              <a:rPr lang="en-US" sz="1200" b="0" kern="1200" dirty="0">
+                <a:solidFill>
+                  <a:schemeClr val="tx1"/>
+                </a:solidFill>
+                <a:effectLst/>
+                <a:latin typeface="+mn-lt"/>
+                <a:ea typeface="+mn-ea"/>
+                <a:cs typeface="+mn-cs"/>
+              </a:rPr>
+              <a:t>		{</a:t>
+            </a:r>
+          </a:p>
+          <a:p>
+            <a:r>
+              <a:rPr lang="en-US" sz="1200" b="0" kern="1200" dirty="0">
+                <a:solidFill>
+                  <a:schemeClr val="tx1"/>
+                </a:solidFill>
+                <a:effectLst/>
+                <a:latin typeface="+mn-lt"/>
+                <a:ea typeface="+mn-ea"/>
+                <a:cs typeface="+mn-cs"/>
+              </a:rPr>
+              <a:t>			</a:t>
+            </a:r>
+            <a:r>
+              <a:rPr lang="en-US" sz="1200" b="0" kern="1200" dirty="0" err="1">
+                <a:solidFill>
+                  <a:schemeClr val="tx1"/>
+                </a:solidFill>
+                <a:effectLst/>
+                <a:latin typeface="+mn-lt"/>
+                <a:ea typeface="+mn-ea"/>
+                <a:cs typeface="+mn-cs"/>
+              </a:rPr>
+              <a:t>Console.WriteLine</a:t>
+            </a:r>
+            <a:r>
+              <a:rPr lang="en-US" sz="1200" b="0" kern="1200" dirty="0">
+                <a:solidFill>
+                  <a:schemeClr val="tx1"/>
+                </a:solidFill>
+                <a:effectLst/>
+                <a:latin typeface="+mn-lt"/>
+                <a:ea typeface="+mn-ea"/>
+                <a:cs typeface="+mn-cs"/>
+              </a:rPr>
+              <a:t>("</a:t>
+            </a:r>
+            <a:r>
+              <a:rPr lang="ru-RU" sz="1200" b="0" kern="1200" dirty="0">
+                <a:solidFill>
+                  <a:schemeClr val="tx1"/>
+                </a:solidFill>
+                <a:effectLst/>
+                <a:latin typeface="+mn-lt"/>
+                <a:ea typeface="+mn-ea"/>
+                <a:cs typeface="+mn-cs"/>
+              </a:rPr>
+              <a:t>На улице холодно");</a:t>
+            </a:r>
+          </a:p>
+          <a:p>
+            <a:r>
+              <a:rPr lang="ru-RU" sz="1200" b="0" kern="1200" dirty="0">
+                <a:solidFill>
+                  <a:schemeClr val="tx1"/>
+                </a:solidFill>
+                <a:effectLst/>
+                <a:latin typeface="+mn-lt"/>
+                <a:ea typeface="+mn-ea"/>
+                <a:cs typeface="+mn-cs"/>
+              </a:rPr>
+              <a:t>		}</a:t>
+            </a:r>
+          </a:p>
+          <a:p>
+            <a:r>
+              <a:rPr lang="ru-RU" sz="1200" b="0" kern="1200" dirty="0">
+                <a:solidFill>
+                  <a:schemeClr val="tx1"/>
+                </a:solidFill>
+                <a:effectLst/>
+                <a:latin typeface="+mn-lt"/>
+                <a:ea typeface="+mn-ea"/>
+                <a:cs typeface="+mn-cs"/>
+              </a:rPr>
+              <a:t>	}</a:t>
+            </a:r>
+          </a:p>
+          <a:p>
+            <a:r>
+              <a:rPr lang="ru-RU" sz="1200" b="0" kern="1200" dirty="0">
+                <a:solidFill>
+                  <a:schemeClr val="tx1"/>
+                </a:solidFill>
+                <a:effectLst/>
+                <a:latin typeface="+mn-lt"/>
+                <a:ea typeface="+mn-ea"/>
+                <a:cs typeface="+mn-cs"/>
+              </a:rPr>
+              <a:t>}</a:t>
+            </a:r>
+            <a:endParaRPr lang="ru-RU" dirty="0"/>
+          </a:p>
+        </p:txBody>
+      </p:sp>
+      <p:sp>
+        <p:nvSpPr>
+          <p:cNvPr id="4" name="Номер слайда 3"/>
+          <p:cNvSpPr>
+            <a:spLocks noGrp="1"/>
+          </p:cNvSpPr>
+          <p:nvPr>
+            <p:ph type="sldNum" sz="quarter" idx="5"/>
+          </p:nvPr>
+        </p:nvSpPr>
+        <p:spPr/>
+        <p:txBody>
+          <a:bodyPr/>
+          <a:lstStyle/>
+          <a:p>
+            <a:fld id="{027685D7-C350-491D-A933-7035F35F7262}" type="slidenum">
+              <a:rPr lang="ru-RU" smtClean="0"/>
+              <a:t>9</a:t>
             </a:fld>
             <a:endParaRPr lang="ru-RU"/>
           </a:p>
@@ -1869,7 +2005,7 @@
 </p:notes>
 </file>
 
-<file path=ppt/notesSlides/notesSlide5.xml><?xml version="1.0" encoding="utf-8"?>
+<file path=ppt/notesSlides/notesSlide6.xml><?xml version="1.0" encoding="utf-8"?>
 <p:notes xmlns:a="http://schemas.openxmlformats.org/drawingml/2006/main" xmlns:r="http://schemas.openxmlformats.org/officeDocument/2006/relationships" xmlns:p="http://schemas.openxmlformats.org/presentationml/2006/main">
   <p:cSld>
     <p:spTree>
@@ -1983,7 +2119,7 @@
           <a:p>
             <a:fld id="{027685D7-C350-491D-A933-7035F35F7262}" type="slidenum">
               <a:rPr lang="ru-RU" smtClean="0"/>
-              <a:t>7</a:t>
+              <a:t>10</a:t>
             </a:fld>
             <a:endParaRPr lang="ru-RU"/>
           </a:p>
@@ -2002,7 +2138,7 @@
 </p:notes>
 </file>
 
-<file path=ppt/notesSlides/notesSlide6.xml><?xml version="1.0" encoding="utf-8"?>
+<file path=ppt/notesSlides/notesSlide7.xml><?xml version="1.0" encoding="utf-8"?>
 <p:notes xmlns:a="http://schemas.openxmlformats.org/drawingml/2006/main" xmlns:r="http://schemas.openxmlformats.org/officeDocument/2006/relationships" xmlns:p="http://schemas.openxmlformats.org/presentationml/2006/main">
   <p:cSld>
     <p:spTree>
@@ -2116,7 +2252,7 @@
           <a:p>
             <a:fld id="{027685D7-C350-491D-A933-7035F35F7262}" type="slidenum">
               <a:rPr lang="ru-RU" smtClean="0"/>
-              <a:t>8</a:t>
+              <a:t>11</a:t>
             </a:fld>
             <a:endParaRPr lang="ru-RU"/>
           </a:p>
@@ -2135,7 +2271,7 @@
 </p:notes>
 </file>
 
-<file path=ppt/notesSlides/notesSlide7.xml><?xml version="1.0" encoding="utf-8"?>
+<file path=ppt/notesSlides/notesSlide8.xml><?xml version="1.0" encoding="utf-8"?>
 <p:notes xmlns:a="http://schemas.openxmlformats.org/drawingml/2006/main" xmlns:r="http://schemas.openxmlformats.org/officeDocument/2006/relationships" xmlns:p="http://schemas.openxmlformats.org/presentationml/2006/main">
   <p:cSld>
     <p:spTree>
@@ -3080,7 +3216,7 @@
           <a:p>
             <a:fld id="{027685D7-C350-491D-A933-7035F35F7262}" type="slidenum">
               <a:rPr lang="ru-RU" smtClean="0"/>
-              <a:t>9</a:t>
+              <a:t>12</a:t>
             </a:fld>
             <a:endParaRPr lang="ru-RU"/>
           </a:p>
@@ -3228,7 +3364,7 @@
           <a:p>
             <a:fld id="{787ECD41-0511-49CF-9DE9-CF7B1A97A83F}" type="datetimeFigureOut">
               <a:rPr lang="ru-RU" smtClean="0"/>
-              <a:t>24.10.2026</a:t>
+              <a:t>31.10.2026</a:t>
             </a:fld>
             <a:endParaRPr lang="ru-RU"/>
           </a:p>
@@ -3396,7 +3532,7 @@
           <a:p>
             <a:fld id="{787ECD41-0511-49CF-9DE9-CF7B1A97A83F}" type="datetimeFigureOut">
               <a:rPr lang="ru-RU" smtClean="0"/>
-              <a:t>24.10.2026</a:t>
+              <a:t>31.10.2026</a:t>
             </a:fld>
             <a:endParaRPr lang="ru-RU"/>
           </a:p>
@@ -3574,7 +3710,7 @@
           <a:p>
             <a:fld id="{787ECD41-0511-49CF-9DE9-CF7B1A97A83F}" type="datetimeFigureOut">
               <a:rPr lang="ru-RU" smtClean="0"/>
-              <a:t>24.10.2026</a:t>
+              <a:t>31.10.2026</a:t>
             </a:fld>
             <a:endParaRPr lang="ru-RU"/>
           </a:p>
@@ -3742,7 +3878,7 @@
           <a:p>
             <a:fld id="{787ECD41-0511-49CF-9DE9-CF7B1A97A83F}" type="datetimeFigureOut">
               <a:rPr lang="ru-RU" smtClean="0"/>
-              <a:t>24.10.2026</a:t>
+              <a:t>31.10.2026</a:t>
             </a:fld>
             <a:endParaRPr lang="ru-RU"/>
           </a:p>
@@ -3987,7 +4123,7 @@
           <a:p>
             <a:fld id="{787ECD41-0511-49CF-9DE9-CF7B1A97A83F}" type="datetimeFigureOut">
               <a:rPr lang="ru-RU" smtClean="0"/>
-              <a:t>24.10.2026</a:t>
+              <a:t>31.10.2026</a:t>
             </a:fld>
             <a:endParaRPr lang="ru-RU"/>
           </a:p>
@@ -4216,7 +4352,7 @@
           <a:p>
             <a:fld id="{787ECD41-0511-49CF-9DE9-CF7B1A97A83F}" type="datetimeFigureOut">
               <a:rPr lang="ru-RU" smtClean="0"/>
-              <a:t>24.10.2026</a:t>
+              <a:t>31.10.2026</a:t>
             </a:fld>
             <a:endParaRPr lang="ru-RU"/>
           </a:p>
@@ -4580,7 +4716,7 @@
           <a:p>
             <a:fld id="{787ECD41-0511-49CF-9DE9-CF7B1A97A83F}" type="datetimeFigureOut">
               <a:rPr lang="ru-RU" smtClean="0"/>
-              <a:t>24.10.2026</a:t>
+              <a:t>31.10.2026</a:t>
             </a:fld>
             <a:endParaRPr lang="ru-RU"/>
           </a:p>
@@ -4697,7 +4833,7 @@
           <a:p>
             <a:fld id="{787ECD41-0511-49CF-9DE9-CF7B1A97A83F}" type="datetimeFigureOut">
               <a:rPr lang="ru-RU" smtClean="0"/>
-              <a:t>24.10.2026</a:t>
+              <a:t>31.10.2026</a:t>
             </a:fld>
             <a:endParaRPr lang="ru-RU"/>
           </a:p>
@@ -4792,7 +4928,7 @@
           <a:p>
             <a:fld id="{787ECD41-0511-49CF-9DE9-CF7B1A97A83F}" type="datetimeFigureOut">
               <a:rPr lang="ru-RU" smtClean="0"/>
-              <a:t>24.10.2026</a:t>
+              <a:t>31.10.2026</a:t>
             </a:fld>
             <a:endParaRPr lang="ru-RU"/>
           </a:p>
@@ -5067,7 +5203,7 @@
           <a:p>
             <a:fld id="{787ECD41-0511-49CF-9DE9-CF7B1A97A83F}" type="datetimeFigureOut">
               <a:rPr lang="ru-RU" smtClean="0"/>
-              <a:t>24.10.2026</a:t>
+              <a:t>31.10.2026</a:t>
             </a:fld>
             <a:endParaRPr lang="ru-RU"/>
           </a:p>
@@ -5319,7 +5455,7 @@
           <a:p>
             <a:fld id="{787ECD41-0511-49CF-9DE9-CF7B1A97A83F}" type="datetimeFigureOut">
               <a:rPr lang="ru-RU" smtClean="0"/>
-              <a:t>24.10.2026</a:t>
+              <a:t>31.10.2026</a:t>
             </a:fld>
             <a:endParaRPr lang="ru-RU"/>
           </a:p>
@@ -5530,7 +5666,7 @@
           <a:p>
             <a:fld id="{787ECD41-0511-49CF-9DE9-CF7B1A97A83F}" type="datetimeFigureOut">
               <a:rPr lang="ru-RU" smtClean="0"/>
-              <a:t>24.10.2026</a:t>
+              <a:t>31.10.2026</a:t>
             </a:fld>
             <a:endParaRPr lang="ru-RU"/>
           </a:p>
@@ -6414,6 +6550,1144 @@
         <p:cNvPr id="1" name="">
           <a:extLst>
             <a:ext uri="{FF2B5EF4-FFF2-40B4-BE49-F238E27FC236}">
+              <a16:creationId xmlns:a16="http://schemas.microsoft.com/office/drawing/2014/main" id="{F87DB84A-7AA5-CF18-F56F-DCE77A929DBC}"/>
+            </a:ext>
+          </a:extLst>
+        </p:cNvPr>
+        <p:cNvGrpSpPr/>
+        <p:nvPr/>
+      </p:nvGrpSpPr>
+      <p:grpSpPr>
+        <a:xfrm>
+          <a:off x="0" y="0"/>
+          <a:ext cx="0" cy="0"/>
+          <a:chOff x="0" y="0"/>
+          <a:chExt cx="0" cy="0"/>
+        </a:xfrm>
+      </p:grpSpPr>
+      <p:pic>
+        <p:nvPicPr>
+          <p:cNvPr id="2075" name="Рисунок 2074">
+            <a:extLst>
+              <a:ext uri="{FF2B5EF4-FFF2-40B4-BE49-F238E27FC236}">
+                <a16:creationId xmlns:a16="http://schemas.microsoft.com/office/drawing/2014/main" id="{C4AA57FA-E6BD-EF7C-45D1-C9B48B6E388E}"/>
+              </a:ext>
+            </a:extLst>
+          </p:cNvPr>
+          <p:cNvPicPr>
+            <a:picLocks noChangeAspect="1"/>
+          </p:cNvPicPr>
+          <p:nvPr/>
+        </p:nvPicPr>
+        <p:blipFill>
+          <a:blip r:embed="rId3">
+            <a:extLst>
+              <a:ext uri="{28A0092B-C50C-407E-A947-70E740481C1C}">
+                <a14:useLocalDpi xmlns:a14="http://schemas.microsoft.com/office/drawing/2010/main" val="0"/>
+              </a:ext>
+            </a:extLst>
+          </a:blip>
+          <a:stretch>
+            <a:fillRect/>
+          </a:stretch>
+        </p:blipFill>
+        <p:spPr>
+          <a:xfrm>
+            <a:off x="0" y="0"/>
+            <a:ext cx="12191999" cy="6858000"/>
+          </a:xfrm>
+          <a:prstGeom prst="rect">
+            <a:avLst/>
+          </a:prstGeom>
+        </p:spPr>
+      </p:pic>
+      <p:sp>
+        <p:nvSpPr>
+          <p:cNvPr id="5" name="Rectangle 6">
+            <a:extLst>
+              <a:ext uri="{FF2B5EF4-FFF2-40B4-BE49-F238E27FC236}">
+                <a16:creationId xmlns:a16="http://schemas.microsoft.com/office/drawing/2014/main" id="{5308429C-5F4A-CC6B-6208-E7E24632024A}"/>
+              </a:ext>
+            </a:extLst>
+          </p:cNvPr>
+          <p:cNvSpPr>
+            <a:spLocks noChangeArrowheads="1"/>
+          </p:cNvSpPr>
+          <p:nvPr/>
+        </p:nvSpPr>
+        <p:spPr bwMode="auto">
+          <a:xfrm>
+            <a:off x="485775" y="412750"/>
+            <a:ext cx="7160293" cy="846386"/>
+          </a:xfrm>
+          <a:prstGeom prst="rect">
+            <a:avLst/>
+          </a:prstGeom>
+          <a:noFill/>
+          <a:ln>
+            <a:noFill/>
+          </a:ln>
+          <a:extLst>
+            <a:ext uri="{909E8E84-426E-40DD-AFC4-6F175D3DCCD1}">
+              <a14:hiddenFill xmlns:a14="http://schemas.microsoft.com/office/drawing/2010/main">
+                <a:solidFill>
+                  <a:srgbClr val="FFFFFF"/>
+                </a:solidFill>
+              </a14:hiddenFill>
+            </a:ext>
+            <a:ext uri="{91240B29-F687-4F45-9708-019B960494DF}">
+              <a14:hiddenLine xmlns:a14="http://schemas.microsoft.com/office/drawing/2010/main" w="9525">
+                <a:solidFill>
+                  <a:srgbClr val="000000"/>
+                </a:solidFill>
+                <a:miter lim="800000"/>
+                <a:headEnd/>
+                <a:tailEnd/>
+              </a14:hiddenLine>
+            </a:ext>
+          </a:extLst>
+        </p:spPr>
+        <p:txBody>
+          <a:bodyPr vert="horz" wrap="none" lIns="0" tIns="0" rIns="0" bIns="0" numCol="1" anchor="t" anchorCtr="0" compatLnSpc="1">
+            <a:prstTxWarp prst="textNoShape">
+              <a:avLst/>
+            </a:prstTxWarp>
+            <a:spAutoFit/>
+          </a:bodyPr>
+          <a:lstStyle>
+            <a:lvl1pPr eaLnBrk="0" fontAlgn="base" hangingPunct="0">
+              <a:spcBef>
+                <a:spcPct val="0"/>
+              </a:spcBef>
+              <a:spcAft>
+                <a:spcPct val="0"/>
+              </a:spcAft>
+              <a:defRPr>
+                <a:solidFill>
+                  <a:schemeClr val="tx1"/>
+                </a:solidFill>
+                <a:latin typeface="Arial" panose="020B0604020202020204" pitchFamily="34" charset="0"/>
+              </a:defRPr>
+            </a:lvl1pPr>
+            <a:lvl2pPr eaLnBrk="0" fontAlgn="base" hangingPunct="0">
+              <a:spcBef>
+                <a:spcPct val="0"/>
+              </a:spcBef>
+              <a:spcAft>
+                <a:spcPct val="0"/>
+              </a:spcAft>
+              <a:defRPr>
+                <a:solidFill>
+                  <a:schemeClr val="tx1"/>
+                </a:solidFill>
+                <a:latin typeface="Arial" panose="020B0604020202020204" pitchFamily="34" charset="0"/>
+              </a:defRPr>
+            </a:lvl2pPr>
+            <a:lvl3pPr eaLnBrk="0" fontAlgn="base" hangingPunct="0">
+              <a:spcBef>
+                <a:spcPct val="0"/>
+              </a:spcBef>
+              <a:spcAft>
+                <a:spcPct val="0"/>
+              </a:spcAft>
+              <a:defRPr>
+                <a:solidFill>
+                  <a:schemeClr val="tx1"/>
+                </a:solidFill>
+                <a:latin typeface="Arial" panose="020B0604020202020204" pitchFamily="34" charset="0"/>
+              </a:defRPr>
+            </a:lvl3pPr>
+            <a:lvl4pPr eaLnBrk="0" fontAlgn="base" hangingPunct="0">
+              <a:spcBef>
+                <a:spcPct val="0"/>
+              </a:spcBef>
+              <a:spcAft>
+                <a:spcPct val="0"/>
+              </a:spcAft>
+              <a:defRPr>
+                <a:solidFill>
+                  <a:schemeClr val="tx1"/>
+                </a:solidFill>
+                <a:latin typeface="Arial" panose="020B0604020202020204" pitchFamily="34" charset="0"/>
+              </a:defRPr>
+            </a:lvl4pPr>
+            <a:lvl5pPr eaLnBrk="0" fontAlgn="base" hangingPunct="0">
+              <a:spcBef>
+                <a:spcPct val="0"/>
+              </a:spcBef>
+              <a:spcAft>
+                <a:spcPct val="0"/>
+              </a:spcAft>
+              <a:defRPr>
+                <a:solidFill>
+                  <a:schemeClr val="tx1"/>
+                </a:solidFill>
+                <a:latin typeface="Arial" panose="020B0604020202020204" pitchFamily="34" charset="0"/>
+              </a:defRPr>
+            </a:lvl5pPr>
+            <a:lvl6pPr eaLnBrk="0" fontAlgn="base" hangingPunct="0">
+              <a:spcBef>
+                <a:spcPct val="0"/>
+              </a:spcBef>
+              <a:spcAft>
+                <a:spcPct val="0"/>
+              </a:spcAft>
+              <a:defRPr>
+                <a:solidFill>
+                  <a:schemeClr val="tx1"/>
+                </a:solidFill>
+                <a:latin typeface="Arial" panose="020B0604020202020204" pitchFamily="34" charset="0"/>
+              </a:defRPr>
+            </a:lvl6pPr>
+            <a:lvl7pPr eaLnBrk="0" fontAlgn="base" hangingPunct="0">
+              <a:spcBef>
+                <a:spcPct val="0"/>
+              </a:spcBef>
+              <a:spcAft>
+                <a:spcPct val="0"/>
+              </a:spcAft>
+              <a:defRPr>
+                <a:solidFill>
+                  <a:schemeClr val="tx1"/>
+                </a:solidFill>
+                <a:latin typeface="Arial" panose="020B0604020202020204" pitchFamily="34" charset="0"/>
+              </a:defRPr>
+            </a:lvl7pPr>
+            <a:lvl8pPr eaLnBrk="0" fontAlgn="base" hangingPunct="0">
+              <a:spcBef>
+                <a:spcPct val="0"/>
+              </a:spcBef>
+              <a:spcAft>
+                <a:spcPct val="0"/>
+              </a:spcAft>
+              <a:defRPr>
+                <a:solidFill>
+                  <a:schemeClr val="tx1"/>
+                </a:solidFill>
+                <a:latin typeface="Arial" panose="020B0604020202020204" pitchFamily="34" charset="0"/>
+              </a:defRPr>
+            </a:lvl8pPr>
+            <a:lvl9pPr eaLnBrk="0" fontAlgn="base" hangingPunct="0">
+              <a:spcBef>
+                <a:spcPct val="0"/>
+              </a:spcBef>
+              <a:spcAft>
+                <a:spcPct val="0"/>
+              </a:spcAft>
+              <a:defRPr>
+                <a:solidFill>
+                  <a:schemeClr val="tx1"/>
+                </a:solidFill>
+                <a:latin typeface="Arial" panose="020B0604020202020204" pitchFamily="34" charset="0"/>
+              </a:defRPr>
+            </a:lvl9pPr>
+          </a:lstStyle>
+          <a:p>
+            <a:pPr lvl="0"/>
+            <a:r>
+              <a:rPr lang="ru-RU" altLang="ru-RU" sz="5500" b="1" dirty="0">
+                <a:solidFill>
+                  <a:srgbClr val="000000"/>
+                </a:solidFill>
+                <a:latin typeface="Times New Roman" panose="02020603050405020304" pitchFamily="18" charset="0"/>
+                <a:cs typeface="Times New Roman" panose="02020603050405020304" pitchFamily="18" charset="0"/>
+              </a:rPr>
+              <a:t>Операторы сравнения</a:t>
+            </a:r>
+            <a:endParaRPr kumimoji="0" lang="ru-RU" altLang="ru-RU" sz="1800" b="0" i="0" u="none" strike="noStrike" cap="none" normalizeH="0" baseline="0" dirty="0">
+              <a:ln>
+                <a:noFill/>
+              </a:ln>
+              <a:solidFill>
+                <a:schemeClr val="tx1"/>
+              </a:solidFill>
+              <a:effectLst/>
+              <a:latin typeface="Times New Roman" panose="02020603050405020304" pitchFamily="18" charset="0"/>
+              <a:cs typeface="Times New Roman" panose="02020603050405020304" pitchFamily="18" charset="0"/>
+            </a:endParaRPr>
+          </a:p>
+        </p:txBody>
+      </p:sp>
+      <p:pic>
+        <p:nvPicPr>
+          <p:cNvPr id="3" name="Рисунок 2">
+            <a:extLst>
+              <a:ext uri="{FF2B5EF4-FFF2-40B4-BE49-F238E27FC236}">
+                <a16:creationId xmlns:a16="http://schemas.microsoft.com/office/drawing/2014/main" id="{05FBBF50-82A5-7955-B6EA-74409D50B8AA}"/>
+              </a:ext>
+            </a:extLst>
+          </p:cNvPr>
+          <p:cNvPicPr>
+            <a:picLocks noChangeAspect="1"/>
+          </p:cNvPicPr>
+          <p:nvPr/>
+        </p:nvPicPr>
+        <p:blipFill>
+          <a:blip r:embed="rId4"/>
+          <a:stretch>
+            <a:fillRect/>
+          </a:stretch>
+        </p:blipFill>
+        <p:spPr>
+          <a:xfrm>
+            <a:off x="1975637" y="1671886"/>
+            <a:ext cx="8240725" cy="4817655"/>
+          </a:xfrm>
+          <a:prstGeom prst="rect">
+            <a:avLst/>
+          </a:prstGeom>
+          <a:solidFill>
+            <a:srgbClr val="FFFFFF">
+              <a:shade val="85000"/>
+            </a:srgbClr>
+          </a:solidFill>
+          <a:ln w="88900" cap="sq">
+            <a:solidFill>
+              <a:srgbClr val="FFFFFF"/>
+            </a:solidFill>
+            <a:miter lim="800000"/>
+          </a:ln>
+          <a:effectLst>
+            <a:outerShdw blurRad="55000" dist="18000" dir="5400000" algn="tl" rotWithShape="0">
+              <a:srgbClr val="000000">
+                <a:alpha val="40000"/>
+              </a:srgbClr>
+            </a:outerShdw>
+          </a:effectLst>
+          <a:scene3d>
+            <a:camera prst="orthographicFront"/>
+            <a:lightRig rig="twoPt" dir="t">
+              <a:rot lat="0" lon="0" rev="7200000"/>
+            </a:lightRig>
+          </a:scene3d>
+          <a:sp3d>
+            <a:bevelT w="25400" h="19050"/>
+            <a:contourClr>
+              <a:srgbClr val="FFFFFF"/>
+            </a:contourClr>
+          </a:sp3d>
+        </p:spPr>
+      </p:pic>
+    </p:spTree>
+    <p:extLst>
+      <p:ext uri="{BB962C8B-B14F-4D97-AF65-F5344CB8AC3E}">
+        <p14:creationId xmlns:p14="http://schemas.microsoft.com/office/powerpoint/2010/main" val="3783972418"/>
+      </p:ext>
+    </p:extLst>
+  </p:cSld>
+  <p:clrMapOvr>
+    <a:masterClrMapping/>
+  </p:clrMapOvr>
+</p:sld>
+</file>
+
+<file path=ppt/slides/slide11.xml><?xml version="1.0" encoding="utf-8"?>
+<p:sld xmlns:a="http://schemas.openxmlformats.org/drawingml/2006/main" xmlns:r="http://schemas.openxmlformats.org/officeDocument/2006/relationships" xmlns:p="http://schemas.openxmlformats.org/presentationml/2006/main">
+  <p:cSld>
+    <p:spTree>
+      <p:nvGrpSpPr>
+        <p:cNvPr id="1" name="">
+          <a:extLst>
+            <a:ext uri="{FF2B5EF4-FFF2-40B4-BE49-F238E27FC236}">
+              <a16:creationId xmlns:a16="http://schemas.microsoft.com/office/drawing/2014/main" id="{5B1CB0E8-A473-6AA2-1C46-F78204130D1F}"/>
+            </a:ext>
+          </a:extLst>
+        </p:cNvPr>
+        <p:cNvGrpSpPr/>
+        <p:nvPr/>
+      </p:nvGrpSpPr>
+      <p:grpSpPr>
+        <a:xfrm>
+          <a:off x="0" y="0"/>
+          <a:ext cx="0" cy="0"/>
+          <a:chOff x="0" y="0"/>
+          <a:chExt cx="0" cy="0"/>
+        </a:xfrm>
+      </p:grpSpPr>
+      <p:pic>
+        <p:nvPicPr>
+          <p:cNvPr id="2075" name="Рисунок 2074">
+            <a:extLst>
+              <a:ext uri="{FF2B5EF4-FFF2-40B4-BE49-F238E27FC236}">
+                <a16:creationId xmlns:a16="http://schemas.microsoft.com/office/drawing/2014/main" id="{837DA8E5-EB8A-ADA7-C815-283B4E2D9D6E}"/>
+              </a:ext>
+            </a:extLst>
+          </p:cNvPr>
+          <p:cNvPicPr>
+            <a:picLocks noChangeAspect="1"/>
+          </p:cNvPicPr>
+          <p:nvPr/>
+        </p:nvPicPr>
+        <p:blipFill>
+          <a:blip r:embed="rId3">
+            <a:extLst>
+              <a:ext uri="{28A0092B-C50C-407E-A947-70E740481C1C}">
+                <a14:useLocalDpi xmlns:a14="http://schemas.microsoft.com/office/drawing/2010/main" val="0"/>
+              </a:ext>
+            </a:extLst>
+          </a:blip>
+          <a:stretch>
+            <a:fillRect/>
+          </a:stretch>
+        </p:blipFill>
+        <p:spPr>
+          <a:xfrm>
+            <a:off x="0" y="0"/>
+            <a:ext cx="12191999" cy="6858000"/>
+          </a:xfrm>
+          <a:prstGeom prst="rect">
+            <a:avLst/>
+          </a:prstGeom>
+        </p:spPr>
+      </p:pic>
+      <p:sp>
+        <p:nvSpPr>
+          <p:cNvPr id="5" name="Rectangle 6">
+            <a:extLst>
+              <a:ext uri="{FF2B5EF4-FFF2-40B4-BE49-F238E27FC236}">
+                <a16:creationId xmlns:a16="http://schemas.microsoft.com/office/drawing/2014/main" id="{1D0A65D1-E5B6-3C5D-A4E3-326FD1A12F97}"/>
+              </a:ext>
+            </a:extLst>
+          </p:cNvPr>
+          <p:cNvSpPr>
+            <a:spLocks noChangeArrowheads="1"/>
+          </p:cNvSpPr>
+          <p:nvPr/>
+        </p:nvSpPr>
+        <p:spPr bwMode="auto">
+          <a:xfrm>
+            <a:off x="485775" y="412750"/>
+            <a:ext cx="8818696" cy="923330"/>
+          </a:xfrm>
+          <a:prstGeom prst="rect">
+            <a:avLst/>
+          </a:prstGeom>
+          <a:noFill/>
+          <a:ln>
+            <a:noFill/>
+          </a:ln>
+          <a:extLst>
+            <a:ext uri="{909E8E84-426E-40DD-AFC4-6F175D3DCCD1}">
+              <a14:hiddenFill xmlns:a14="http://schemas.microsoft.com/office/drawing/2010/main">
+                <a:solidFill>
+                  <a:srgbClr val="FFFFFF"/>
+                </a:solidFill>
+              </a14:hiddenFill>
+            </a:ext>
+            <a:ext uri="{91240B29-F687-4F45-9708-019B960494DF}">
+              <a14:hiddenLine xmlns:a14="http://schemas.microsoft.com/office/drawing/2010/main" w="9525">
+                <a:solidFill>
+                  <a:srgbClr val="000000"/>
+                </a:solidFill>
+                <a:miter lim="800000"/>
+                <a:headEnd/>
+                <a:tailEnd/>
+              </a14:hiddenLine>
+            </a:ext>
+          </a:extLst>
+        </p:spPr>
+        <p:txBody>
+          <a:bodyPr vert="horz" wrap="none" lIns="0" tIns="0" rIns="0" bIns="0" numCol="1" anchor="t" anchorCtr="0" compatLnSpc="1">
+            <a:prstTxWarp prst="textNoShape">
+              <a:avLst/>
+            </a:prstTxWarp>
+            <a:spAutoFit/>
+          </a:bodyPr>
+          <a:lstStyle>
+            <a:lvl1pPr eaLnBrk="0" fontAlgn="base" hangingPunct="0">
+              <a:spcBef>
+                <a:spcPct val="0"/>
+              </a:spcBef>
+              <a:spcAft>
+                <a:spcPct val="0"/>
+              </a:spcAft>
+              <a:defRPr>
+                <a:solidFill>
+                  <a:schemeClr val="tx1"/>
+                </a:solidFill>
+                <a:latin typeface="Arial" panose="020B0604020202020204" pitchFamily="34" charset="0"/>
+              </a:defRPr>
+            </a:lvl1pPr>
+            <a:lvl2pPr eaLnBrk="0" fontAlgn="base" hangingPunct="0">
+              <a:spcBef>
+                <a:spcPct val="0"/>
+              </a:spcBef>
+              <a:spcAft>
+                <a:spcPct val="0"/>
+              </a:spcAft>
+              <a:defRPr>
+                <a:solidFill>
+                  <a:schemeClr val="tx1"/>
+                </a:solidFill>
+                <a:latin typeface="Arial" panose="020B0604020202020204" pitchFamily="34" charset="0"/>
+              </a:defRPr>
+            </a:lvl2pPr>
+            <a:lvl3pPr eaLnBrk="0" fontAlgn="base" hangingPunct="0">
+              <a:spcBef>
+                <a:spcPct val="0"/>
+              </a:spcBef>
+              <a:spcAft>
+                <a:spcPct val="0"/>
+              </a:spcAft>
+              <a:defRPr>
+                <a:solidFill>
+                  <a:schemeClr val="tx1"/>
+                </a:solidFill>
+                <a:latin typeface="Arial" panose="020B0604020202020204" pitchFamily="34" charset="0"/>
+              </a:defRPr>
+            </a:lvl3pPr>
+            <a:lvl4pPr eaLnBrk="0" fontAlgn="base" hangingPunct="0">
+              <a:spcBef>
+                <a:spcPct val="0"/>
+              </a:spcBef>
+              <a:spcAft>
+                <a:spcPct val="0"/>
+              </a:spcAft>
+              <a:defRPr>
+                <a:solidFill>
+                  <a:schemeClr val="tx1"/>
+                </a:solidFill>
+                <a:latin typeface="Arial" panose="020B0604020202020204" pitchFamily="34" charset="0"/>
+              </a:defRPr>
+            </a:lvl4pPr>
+            <a:lvl5pPr eaLnBrk="0" fontAlgn="base" hangingPunct="0">
+              <a:spcBef>
+                <a:spcPct val="0"/>
+              </a:spcBef>
+              <a:spcAft>
+                <a:spcPct val="0"/>
+              </a:spcAft>
+              <a:defRPr>
+                <a:solidFill>
+                  <a:schemeClr val="tx1"/>
+                </a:solidFill>
+                <a:latin typeface="Arial" panose="020B0604020202020204" pitchFamily="34" charset="0"/>
+              </a:defRPr>
+            </a:lvl5pPr>
+            <a:lvl6pPr eaLnBrk="0" fontAlgn="base" hangingPunct="0">
+              <a:spcBef>
+                <a:spcPct val="0"/>
+              </a:spcBef>
+              <a:spcAft>
+                <a:spcPct val="0"/>
+              </a:spcAft>
+              <a:defRPr>
+                <a:solidFill>
+                  <a:schemeClr val="tx1"/>
+                </a:solidFill>
+                <a:latin typeface="Arial" panose="020B0604020202020204" pitchFamily="34" charset="0"/>
+              </a:defRPr>
+            </a:lvl6pPr>
+            <a:lvl7pPr eaLnBrk="0" fontAlgn="base" hangingPunct="0">
+              <a:spcBef>
+                <a:spcPct val="0"/>
+              </a:spcBef>
+              <a:spcAft>
+                <a:spcPct val="0"/>
+              </a:spcAft>
+              <a:defRPr>
+                <a:solidFill>
+                  <a:schemeClr val="tx1"/>
+                </a:solidFill>
+                <a:latin typeface="Arial" panose="020B0604020202020204" pitchFamily="34" charset="0"/>
+              </a:defRPr>
+            </a:lvl7pPr>
+            <a:lvl8pPr eaLnBrk="0" fontAlgn="base" hangingPunct="0">
+              <a:spcBef>
+                <a:spcPct val="0"/>
+              </a:spcBef>
+              <a:spcAft>
+                <a:spcPct val="0"/>
+              </a:spcAft>
+              <a:defRPr>
+                <a:solidFill>
+                  <a:schemeClr val="tx1"/>
+                </a:solidFill>
+                <a:latin typeface="Arial" panose="020B0604020202020204" pitchFamily="34" charset="0"/>
+              </a:defRPr>
+            </a:lvl8pPr>
+            <a:lvl9pPr eaLnBrk="0" fontAlgn="base" hangingPunct="0">
+              <a:spcBef>
+                <a:spcPct val="0"/>
+              </a:spcBef>
+              <a:spcAft>
+                <a:spcPct val="0"/>
+              </a:spcAft>
+              <a:defRPr>
+                <a:solidFill>
+                  <a:schemeClr val="tx1"/>
+                </a:solidFill>
+                <a:latin typeface="Arial" panose="020B0604020202020204" pitchFamily="34" charset="0"/>
+              </a:defRPr>
+            </a:lvl9pPr>
+          </a:lstStyle>
+          <a:p>
+            <a:r>
+              <a:rPr lang="ru-RU" sz="6000" b="1" dirty="0"/>
+              <a:t>Логические операторы</a:t>
+            </a:r>
+          </a:p>
+        </p:txBody>
+      </p:sp>
+      <p:pic>
+        <p:nvPicPr>
+          <p:cNvPr id="3" name="Рисунок 2">
+            <a:extLst>
+              <a:ext uri="{FF2B5EF4-FFF2-40B4-BE49-F238E27FC236}">
+                <a16:creationId xmlns:a16="http://schemas.microsoft.com/office/drawing/2014/main" id="{B67F111E-26CD-0612-130E-D95701D1661B}"/>
+              </a:ext>
+            </a:extLst>
+          </p:cNvPr>
+          <p:cNvPicPr>
+            <a:picLocks noChangeAspect="1"/>
+          </p:cNvPicPr>
+          <p:nvPr/>
+        </p:nvPicPr>
+        <p:blipFill>
+          <a:blip r:embed="rId4"/>
+          <a:stretch>
+            <a:fillRect/>
+          </a:stretch>
+        </p:blipFill>
+        <p:spPr>
+          <a:xfrm>
+            <a:off x="3242847" y="1646826"/>
+            <a:ext cx="5706303" cy="1782174"/>
+          </a:xfrm>
+          <a:prstGeom prst="rect">
+            <a:avLst/>
+          </a:prstGeom>
+          <a:solidFill>
+            <a:srgbClr val="FFFFFF">
+              <a:shade val="85000"/>
+            </a:srgbClr>
+          </a:solidFill>
+          <a:ln w="88900" cap="sq">
+            <a:solidFill>
+              <a:srgbClr val="FFFFFF"/>
+            </a:solidFill>
+            <a:miter lim="800000"/>
+          </a:ln>
+          <a:effectLst>
+            <a:outerShdw blurRad="55000" dist="18000" dir="5400000" algn="tl" rotWithShape="0">
+              <a:srgbClr val="000000">
+                <a:alpha val="40000"/>
+              </a:srgbClr>
+            </a:outerShdw>
+          </a:effectLst>
+          <a:scene3d>
+            <a:camera prst="orthographicFront"/>
+            <a:lightRig rig="twoPt" dir="t">
+              <a:rot lat="0" lon="0" rev="7200000"/>
+            </a:lightRig>
+          </a:scene3d>
+          <a:sp3d>
+            <a:bevelT w="25400" h="19050"/>
+            <a:contourClr>
+              <a:srgbClr val="FFFFFF"/>
+            </a:contourClr>
+          </a:sp3d>
+        </p:spPr>
+      </p:pic>
+      <p:pic>
+        <p:nvPicPr>
+          <p:cNvPr id="6" name="Рисунок 5">
+            <a:extLst>
+              <a:ext uri="{FF2B5EF4-FFF2-40B4-BE49-F238E27FC236}">
+                <a16:creationId xmlns:a16="http://schemas.microsoft.com/office/drawing/2014/main" id="{BDECA11B-9497-AEE5-04F7-461AAD08BDF2}"/>
+              </a:ext>
+            </a:extLst>
+          </p:cNvPr>
+          <p:cNvPicPr>
+            <a:picLocks noChangeAspect="1"/>
+          </p:cNvPicPr>
+          <p:nvPr/>
+        </p:nvPicPr>
+        <p:blipFill>
+          <a:blip r:embed="rId5"/>
+          <a:stretch>
+            <a:fillRect/>
+          </a:stretch>
+        </p:blipFill>
+        <p:spPr>
+          <a:xfrm>
+            <a:off x="7342047" y="3928742"/>
+            <a:ext cx="3924848" cy="2400635"/>
+          </a:xfrm>
+          <a:prstGeom prst="rect">
+            <a:avLst/>
+          </a:prstGeom>
+          <a:solidFill>
+            <a:srgbClr val="FFFFFF">
+              <a:shade val="85000"/>
+            </a:srgbClr>
+          </a:solidFill>
+          <a:ln w="88900" cap="sq">
+            <a:solidFill>
+              <a:srgbClr val="FFFFFF"/>
+            </a:solidFill>
+            <a:miter lim="800000"/>
+          </a:ln>
+          <a:effectLst>
+            <a:outerShdw blurRad="55000" dist="18000" dir="5400000" algn="tl" rotWithShape="0">
+              <a:srgbClr val="000000">
+                <a:alpha val="40000"/>
+              </a:srgbClr>
+            </a:outerShdw>
+          </a:effectLst>
+          <a:scene3d>
+            <a:camera prst="orthographicFront"/>
+            <a:lightRig rig="twoPt" dir="t">
+              <a:rot lat="0" lon="0" rev="7200000"/>
+            </a:lightRig>
+          </a:scene3d>
+          <a:sp3d>
+            <a:bevelT w="25400" h="19050"/>
+            <a:contourClr>
+              <a:srgbClr val="FFFFFF"/>
+            </a:contourClr>
+          </a:sp3d>
+        </p:spPr>
+      </p:pic>
+      <p:pic>
+        <p:nvPicPr>
+          <p:cNvPr id="8" name="Рисунок 7">
+            <a:extLst>
+              <a:ext uri="{FF2B5EF4-FFF2-40B4-BE49-F238E27FC236}">
+                <a16:creationId xmlns:a16="http://schemas.microsoft.com/office/drawing/2014/main" id="{BE2AFAAC-ECCD-9396-C354-AFAFD9434DD8}"/>
+              </a:ext>
+            </a:extLst>
+          </p:cNvPr>
+          <p:cNvPicPr>
+            <a:picLocks noChangeAspect="1"/>
+          </p:cNvPicPr>
+          <p:nvPr/>
+        </p:nvPicPr>
+        <p:blipFill>
+          <a:blip r:embed="rId6"/>
+          <a:stretch>
+            <a:fillRect/>
+          </a:stretch>
+        </p:blipFill>
+        <p:spPr>
+          <a:xfrm>
+            <a:off x="485775" y="3928742"/>
+            <a:ext cx="3886742" cy="2438740"/>
+          </a:xfrm>
+          <a:prstGeom prst="rect">
+            <a:avLst/>
+          </a:prstGeom>
+          <a:solidFill>
+            <a:srgbClr val="FFFFFF">
+              <a:shade val="85000"/>
+            </a:srgbClr>
+          </a:solidFill>
+          <a:ln w="88900" cap="sq">
+            <a:solidFill>
+              <a:srgbClr val="FFFFFF"/>
+            </a:solidFill>
+            <a:miter lim="800000"/>
+          </a:ln>
+          <a:effectLst>
+            <a:outerShdw blurRad="55000" dist="18000" dir="5400000" algn="tl" rotWithShape="0">
+              <a:srgbClr val="000000">
+                <a:alpha val="40000"/>
+              </a:srgbClr>
+            </a:outerShdw>
+          </a:effectLst>
+          <a:scene3d>
+            <a:camera prst="orthographicFront"/>
+            <a:lightRig rig="twoPt" dir="t">
+              <a:rot lat="0" lon="0" rev="7200000"/>
+            </a:lightRig>
+          </a:scene3d>
+          <a:sp3d>
+            <a:bevelT w="25400" h="19050"/>
+            <a:contourClr>
+              <a:srgbClr val="FFFFFF"/>
+            </a:contourClr>
+          </a:sp3d>
+        </p:spPr>
+      </p:pic>
+    </p:spTree>
+    <p:extLst>
+      <p:ext uri="{BB962C8B-B14F-4D97-AF65-F5344CB8AC3E}">
+        <p14:creationId xmlns:p14="http://schemas.microsoft.com/office/powerpoint/2010/main" val="1037235786"/>
+      </p:ext>
+    </p:extLst>
+  </p:cSld>
+  <p:clrMapOvr>
+    <a:masterClrMapping/>
+  </p:clrMapOvr>
+</p:sld>
+</file>
+
+<file path=ppt/slides/slide12.xml><?xml version="1.0" encoding="utf-8"?>
+<p:sld xmlns:a="http://schemas.openxmlformats.org/drawingml/2006/main" xmlns:r="http://schemas.openxmlformats.org/officeDocument/2006/relationships" xmlns:p="http://schemas.openxmlformats.org/presentationml/2006/main">
+  <p:cSld>
+    <p:spTree>
+      <p:nvGrpSpPr>
+        <p:cNvPr id="1" name="">
+          <a:extLst>
+            <a:ext uri="{FF2B5EF4-FFF2-40B4-BE49-F238E27FC236}">
+              <a16:creationId xmlns:a16="http://schemas.microsoft.com/office/drawing/2014/main" id="{4D451EF6-1669-D0BE-5C75-31ABD253BE6F}"/>
+            </a:ext>
+          </a:extLst>
+        </p:cNvPr>
+        <p:cNvGrpSpPr/>
+        <p:nvPr/>
+      </p:nvGrpSpPr>
+      <p:grpSpPr>
+        <a:xfrm>
+          <a:off x="0" y="0"/>
+          <a:ext cx="0" cy="0"/>
+          <a:chOff x="0" y="0"/>
+          <a:chExt cx="0" cy="0"/>
+        </a:xfrm>
+      </p:grpSpPr>
+      <p:pic>
+        <p:nvPicPr>
+          <p:cNvPr id="2075" name="Рисунок 2074">
+            <a:extLst>
+              <a:ext uri="{FF2B5EF4-FFF2-40B4-BE49-F238E27FC236}">
+                <a16:creationId xmlns:a16="http://schemas.microsoft.com/office/drawing/2014/main" id="{D0E60EA0-320B-FD47-E26E-C825633A1799}"/>
+              </a:ext>
+            </a:extLst>
+          </p:cNvPr>
+          <p:cNvPicPr>
+            <a:picLocks noChangeAspect="1"/>
+          </p:cNvPicPr>
+          <p:nvPr/>
+        </p:nvPicPr>
+        <p:blipFill>
+          <a:blip r:embed="rId3">
+            <a:extLst>
+              <a:ext uri="{28A0092B-C50C-407E-A947-70E740481C1C}">
+                <a14:useLocalDpi xmlns:a14="http://schemas.microsoft.com/office/drawing/2010/main" val="0"/>
+              </a:ext>
+            </a:extLst>
+          </a:blip>
+          <a:stretch>
+            <a:fillRect/>
+          </a:stretch>
+        </p:blipFill>
+        <p:spPr>
+          <a:xfrm>
+            <a:off x="0" y="0"/>
+            <a:ext cx="12191999" cy="6858000"/>
+          </a:xfrm>
+          <a:prstGeom prst="rect">
+            <a:avLst/>
+          </a:prstGeom>
+        </p:spPr>
+      </p:pic>
+      <p:sp>
+        <p:nvSpPr>
+          <p:cNvPr id="5" name="Rectangle 6">
+            <a:extLst>
+              <a:ext uri="{FF2B5EF4-FFF2-40B4-BE49-F238E27FC236}">
+                <a16:creationId xmlns:a16="http://schemas.microsoft.com/office/drawing/2014/main" id="{EDD72790-FCAA-E507-08DD-8388B7B874F1}"/>
+              </a:ext>
+            </a:extLst>
+          </p:cNvPr>
+          <p:cNvSpPr>
+            <a:spLocks noChangeArrowheads="1"/>
+          </p:cNvSpPr>
+          <p:nvPr/>
+        </p:nvSpPr>
+        <p:spPr bwMode="auto">
+          <a:xfrm>
+            <a:off x="485775" y="412750"/>
+            <a:ext cx="1920398" cy="846386"/>
+          </a:xfrm>
+          <a:prstGeom prst="rect">
+            <a:avLst/>
+          </a:prstGeom>
+          <a:noFill/>
+          <a:ln>
+            <a:noFill/>
+          </a:ln>
+          <a:extLst>
+            <a:ext uri="{909E8E84-426E-40DD-AFC4-6F175D3DCCD1}">
+              <a14:hiddenFill xmlns:a14="http://schemas.microsoft.com/office/drawing/2010/main">
+                <a:solidFill>
+                  <a:srgbClr val="FFFFFF"/>
+                </a:solidFill>
+              </a14:hiddenFill>
+            </a:ext>
+            <a:ext uri="{91240B29-F687-4F45-9708-019B960494DF}">
+              <a14:hiddenLine xmlns:a14="http://schemas.microsoft.com/office/drawing/2010/main" w="9525">
+                <a:solidFill>
+                  <a:srgbClr val="000000"/>
+                </a:solidFill>
+                <a:miter lim="800000"/>
+                <a:headEnd/>
+                <a:tailEnd/>
+              </a14:hiddenLine>
+            </a:ext>
+          </a:extLst>
+        </p:spPr>
+        <p:txBody>
+          <a:bodyPr vert="horz" wrap="none" lIns="0" tIns="0" rIns="0" bIns="0" numCol="1" anchor="t" anchorCtr="0" compatLnSpc="1">
+            <a:prstTxWarp prst="textNoShape">
+              <a:avLst/>
+            </a:prstTxWarp>
+            <a:spAutoFit/>
+          </a:bodyPr>
+          <a:lstStyle>
+            <a:lvl1pPr eaLnBrk="0" fontAlgn="base" hangingPunct="0">
+              <a:spcBef>
+                <a:spcPct val="0"/>
+              </a:spcBef>
+              <a:spcAft>
+                <a:spcPct val="0"/>
+              </a:spcAft>
+              <a:defRPr>
+                <a:solidFill>
+                  <a:schemeClr val="tx1"/>
+                </a:solidFill>
+                <a:latin typeface="Arial" panose="020B0604020202020204" pitchFamily="34" charset="0"/>
+              </a:defRPr>
+            </a:lvl1pPr>
+            <a:lvl2pPr eaLnBrk="0" fontAlgn="base" hangingPunct="0">
+              <a:spcBef>
+                <a:spcPct val="0"/>
+              </a:spcBef>
+              <a:spcAft>
+                <a:spcPct val="0"/>
+              </a:spcAft>
+              <a:defRPr>
+                <a:solidFill>
+                  <a:schemeClr val="tx1"/>
+                </a:solidFill>
+                <a:latin typeface="Arial" panose="020B0604020202020204" pitchFamily="34" charset="0"/>
+              </a:defRPr>
+            </a:lvl2pPr>
+            <a:lvl3pPr eaLnBrk="0" fontAlgn="base" hangingPunct="0">
+              <a:spcBef>
+                <a:spcPct val="0"/>
+              </a:spcBef>
+              <a:spcAft>
+                <a:spcPct val="0"/>
+              </a:spcAft>
+              <a:defRPr>
+                <a:solidFill>
+                  <a:schemeClr val="tx1"/>
+                </a:solidFill>
+                <a:latin typeface="Arial" panose="020B0604020202020204" pitchFamily="34" charset="0"/>
+              </a:defRPr>
+            </a:lvl3pPr>
+            <a:lvl4pPr eaLnBrk="0" fontAlgn="base" hangingPunct="0">
+              <a:spcBef>
+                <a:spcPct val="0"/>
+              </a:spcBef>
+              <a:spcAft>
+                <a:spcPct val="0"/>
+              </a:spcAft>
+              <a:defRPr>
+                <a:solidFill>
+                  <a:schemeClr val="tx1"/>
+                </a:solidFill>
+                <a:latin typeface="Arial" panose="020B0604020202020204" pitchFamily="34" charset="0"/>
+              </a:defRPr>
+            </a:lvl4pPr>
+            <a:lvl5pPr eaLnBrk="0" fontAlgn="base" hangingPunct="0">
+              <a:spcBef>
+                <a:spcPct val="0"/>
+              </a:spcBef>
+              <a:spcAft>
+                <a:spcPct val="0"/>
+              </a:spcAft>
+              <a:defRPr>
+                <a:solidFill>
+                  <a:schemeClr val="tx1"/>
+                </a:solidFill>
+                <a:latin typeface="Arial" panose="020B0604020202020204" pitchFamily="34" charset="0"/>
+              </a:defRPr>
+            </a:lvl5pPr>
+            <a:lvl6pPr eaLnBrk="0" fontAlgn="base" hangingPunct="0">
+              <a:spcBef>
+                <a:spcPct val="0"/>
+              </a:spcBef>
+              <a:spcAft>
+                <a:spcPct val="0"/>
+              </a:spcAft>
+              <a:defRPr>
+                <a:solidFill>
+                  <a:schemeClr val="tx1"/>
+                </a:solidFill>
+                <a:latin typeface="Arial" panose="020B0604020202020204" pitchFamily="34" charset="0"/>
+              </a:defRPr>
+            </a:lvl6pPr>
+            <a:lvl7pPr eaLnBrk="0" fontAlgn="base" hangingPunct="0">
+              <a:spcBef>
+                <a:spcPct val="0"/>
+              </a:spcBef>
+              <a:spcAft>
+                <a:spcPct val="0"/>
+              </a:spcAft>
+              <a:defRPr>
+                <a:solidFill>
+                  <a:schemeClr val="tx1"/>
+                </a:solidFill>
+                <a:latin typeface="Arial" panose="020B0604020202020204" pitchFamily="34" charset="0"/>
+              </a:defRPr>
+            </a:lvl7pPr>
+            <a:lvl8pPr eaLnBrk="0" fontAlgn="base" hangingPunct="0">
+              <a:spcBef>
+                <a:spcPct val="0"/>
+              </a:spcBef>
+              <a:spcAft>
+                <a:spcPct val="0"/>
+              </a:spcAft>
+              <a:defRPr>
+                <a:solidFill>
+                  <a:schemeClr val="tx1"/>
+                </a:solidFill>
+                <a:latin typeface="Arial" panose="020B0604020202020204" pitchFamily="34" charset="0"/>
+              </a:defRPr>
+            </a:lvl8pPr>
+            <a:lvl9pPr eaLnBrk="0" fontAlgn="base" hangingPunct="0">
+              <a:spcBef>
+                <a:spcPct val="0"/>
+              </a:spcBef>
+              <a:spcAft>
+                <a:spcPct val="0"/>
+              </a:spcAft>
+              <a:defRPr>
+                <a:solidFill>
+                  <a:schemeClr val="tx1"/>
+                </a:solidFill>
+                <a:latin typeface="Arial" panose="020B0604020202020204" pitchFamily="34" charset="0"/>
+              </a:defRPr>
+            </a:lvl9pPr>
+          </a:lstStyle>
+          <a:p>
+            <a:pPr marL="0" marR="0" lvl="0" indent="0" algn="l" defTabSz="914400" rtl="0" eaLnBrk="0" fontAlgn="base" latinLnBrk="0" hangingPunct="0">
+              <a:lnSpc>
+                <a:spcPct val="100000"/>
+              </a:lnSpc>
+              <a:spcBef>
+                <a:spcPct val="0"/>
+              </a:spcBef>
+              <a:spcAft>
+                <a:spcPct val="0"/>
+              </a:spcAft>
+              <a:buClrTx/>
+              <a:buSzTx/>
+              <a:buFontTx/>
+              <a:buNone/>
+              <a:tabLst/>
+            </a:pPr>
+            <a:r>
+              <a:rPr kumimoji="0" lang="en-US" altLang="ru-RU" sz="5500" b="1" i="0" u="none" strike="noStrike" cap="none" normalizeH="0" baseline="0" dirty="0">
+                <a:ln>
+                  <a:noFill/>
+                </a:ln>
+                <a:solidFill>
+                  <a:srgbClr val="000000"/>
+                </a:solidFill>
+                <a:effectLst/>
+                <a:latin typeface="Times New Roman" panose="02020603050405020304" pitchFamily="18" charset="0"/>
+                <a:cs typeface="Times New Roman" panose="02020603050405020304" pitchFamily="18" charset="0"/>
+              </a:rPr>
+              <a:t>switch</a:t>
+            </a:r>
+            <a:endParaRPr kumimoji="0" lang="ru-RU" altLang="ru-RU" sz="1800" b="0" i="0" u="none" strike="noStrike" cap="none" normalizeH="0" baseline="0" dirty="0">
+              <a:ln>
+                <a:noFill/>
+              </a:ln>
+              <a:solidFill>
+                <a:schemeClr val="tx1"/>
+              </a:solidFill>
+              <a:effectLst/>
+              <a:latin typeface="Times New Roman" panose="02020603050405020304" pitchFamily="18" charset="0"/>
+              <a:cs typeface="Times New Roman" panose="02020603050405020304" pitchFamily="18" charset="0"/>
+            </a:endParaRPr>
+          </a:p>
+        </p:txBody>
+      </p:sp>
+      <p:pic>
+        <p:nvPicPr>
+          <p:cNvPr id="3" name="Рисунок 2">
+            <a:extLst>
+              <a:ext uri="{FF2B5EF4-FFF2-40B4-BE49-F238E27FC236}">
+                <a16:creationId xmlns:a16="http://schemas.microsoft.com/office/drawing/2014/main" id="{A2197F4F-DF34-89EE-8FDE-01CBEDE9D8F7}"/>
+              </a:ext>
+            </a:extLst>
+          </p:cNvPr>
+          <p:cNvPicPr>
+            <a:picLocks noChangeAspect="1"/>
+          </p:cNvPicPr>
+          <p:nvPr/>
+        </p:nvPicPr>
+        <p:blipFill>
+          <a:blip r:embed="rId4"/>
+          <a:stretch>
+            <a:fillRect/>
+          </a:stretch>
+        </p:blipFill>
+        <p:spPr>
+          <a:xfrm>
+            <a:off x="3108669" y="1432414"/>
+            <a:ext cx="5974660" cy="5019603"/>
+          </a:xfrm>
+          <a:prstGeom prst="rect">
+            <a:avLst/>
+          </a:prstGeom>
+          <a:solidFill>
+            <a:srgbClr val="FFFFFF">
+              <a:shade val="85000"/>
+            </a:srgbClr>
+          </a:solidFill>
+          <a:ln w="88900" cap="sq">
+            <a:solidFill>
+              <a:srgbClr val="FFFFFF"/>
+            </a:solidFill>
+            <a:miter lim="800000"/>
+          </a:ln>
+          <a:effectLst>
+            <a:outerShdw blurRad="55000" dist="18000" dir="5400000" algn="tl" rotWithShape="0">
+              <a:srgbClr val="000000">
+                <a:alpha val="40000"/>
+              </a:srgbClr>
+            </a:outerShdw>
+          </a:effectLst>
+          <a:scene3d>
+            <a:camera prst="orthographicFront"/>
+            <a:lightRig rig="twoPt" dir="t">
+              <a:rot lat="0" lon="0" rev="7200000"/>
+            </a:lightRig>
+          </a:scene3d>
+          <a:sp3d>
+            <a:bevelT w="25400" h="19050"/>
+            <a:contourClr>
+              <a:srgbClr val="FFFFFF"/>
+            </a:contourClr>
+          </a:sp3d>
+        </p:spPr>
+      </p:pic>
+    </p:spTree>
+    <p:extLst>
+      <p:ext uri="{BB962C8B-B14F-4D97-AF65-F5344CB8AC3E}">
+        <p14:creationId xmlns:p14="http://schemas.microsoft.com/office/powerpoint/2010/main" val="1462149807"/>
+      </p:ext>
+    </p:extLst>
+  </p:cSld>
+  <p:clrMapOvr>
+    <a:masterClrMapping/>
+  </p:clrMapOvr>
+</p:sld>
+</file>
+
+<file path=ppt/slides/slide13.xml><?xml version="1.0" encoding="utf-8"?>
+<p:sld xmlns:a="http://schemas.openxmlformats.org/drawingml/2006/main" xmlns:r="http://schemas.openxmlformats.org/officeDocument/2006/relationships" xmlns:p="http://schemas.openxmlformats.org/presentationml/2006/main">
+  <p:cSld>
+    <p:spTree>
+      <p:nvGrpSpPr>
+        <p:cNvPr id="1" name="">
+          <a:extLst>
+            <a:ext uri="{FF2B5EF4-FFF2-40B4-BE49-F238E27FC236}">
               <a16:creationId xmlns:a16="http://schemas.microsoft.com/office/drawing/2014/main" id="{8C5D4276-4AF3-5F49-4C87-1563081110F6}"/>
             </a:ext>
           </a:extLst>
@@ -6993,10 +8267,738 @@
       </p:sp>
       <p:pic>
         <p:nvPicPr>
+          <p:cNvPr id="7" name="Рисунок 6">
+            <a:extLst>
+              <a:ext uri="{FF2B5EF4-FFF2-40B4-BE49-F238E27FC236}">
+                <a16:creationId xmlns:a16="http://schemas.microsoft.com/office/drawing/2014/main" id="{1BADB965-9DB5-7884-51D5-A9CC80CE2DBE}"/>
+              </a:ext>
+            </a:extLst>
+          </p:cNvPr>
+          <p:cNvPicPr>
+            <a:picLocks noChangeAspect="1"/>
+          </p:cNvPicPr>
+          <p:nvPr/>
+        </p:nvPicPr>
+        <p:blipFill>
+          <a:blip r:embed="rId3"/>
+          <a:stretch>
+            <a:fillRect/>
+          </a:stretch>
+        </p:blipFill>
+        <p:spPr>
+          <a:xfrm>
+            <a:off x="2005879" y="1400422"/>
+            <a:ext cx="8911782" cy="5316291"/>
+          </a:xfrm>
+          <a:prstGeom prst="rect">
+            <a:avLst/>
+          </a:prstGeom>
+          <a:solidFill>
+            <a:srgbClr val="FFFFFF">
+              <a:shade val="85000"/>
+            </a:srgbClr>
+          </a:solidFill>
+          <a:ln w="88900" cap="sq">
+            <a:solidFill>
+              <a:srgbClr val="FFFFFF"/>
+            </a:solidFill>
+            <a:miter lim="800000"/>
+          </a:ln>
+          <a:effectLst>
+            <a:outerShdw blurRad="55000" dist="18000" dir="5400000" algn="tl" rotWithShape="0">
+              <a:srgbClr val="000000">
+                <a:alpha val="40000"/>
+              </a:srgbClr>
+            </a:outerShdw>
+          </a:effectLst>
+          <a:scene3d>
+            <a:camera prst="orthographicFront"/>
+            <a:lightRig rig="twoPt" dir="t">
+              <a:rot lat="0" lon="0" rev="7200000"/>
+            </a:lightRig>
+          </a:scene3d>
+          <a:sp3d>
+            <a:bevelT w="25400" h="19050"/>
+            <a:contourClr>
+              <a:srgbClr val="FFFFFF"/>
+            </a:contourClr>
+          </a:sp3d>
+        </p:spPr>
+      </p:pic>
+    </p:spTree>
+    <p:extLst>
+      <p:ext uri="{BB962C8B-B14F-4D97-AF65-F5344CB8AC3E}">
+        <p14:creationId xmlns:p14="http://schemas.microsoft.com/office/powerpoint/2010/main" val="1852719548"/>
+      </p:ext>
+    </p:extLst>
+  </p:cSld>
+  <p:clrMapOvr>
+    <a:masterClrMapping/>
+  </p:clrMapOvr>
+</p:sld>
+</file>
+
+<file path=ppt/slides/slide3.xml><?xml version="1.0" encoding="utf-8"?>
+<p:sld xmlns:a="http://schemas.openxmlformats.org/drawingml/2006/main" xmlns:r="http://schemas.openxmlformats.org/officeDocument/2006/relationships" xmlns:p="http://schemas.openxmlformats.org/presentationml/2006/main">
+  <p:cSld>
+    <p:spTree>
+      <p:nvGrpSpPr>
+        <p:cNvPr id="1" name="">
+          <a:extLst>
+            <a:ext uri="{FF2B5EF4-FFF2-40B4-BE49-F238E27FC236}">
+              <a16:creationId xmlns:a16="http://schemas.microsoft.com/office/drawing/2014/main" id="{8388277D-BD6F-2ADF-D264-EFDF7EF49658}"/>
+            </a:ext>
+          </a:extLst>
+        </p:cNvPr>
+        <p:cNvGrpSpPr/>
+        <p:nvPr/>
+      </p:nvGrpSpPr>
+      <p:grpSpPr>
+        <a:xfrm>
+          <a:off x="0" y="0"/>
+          <a:ext cx="0" cy="0"/>
+          <a:chOff x="0" y="0"/>
+          <a:chExt cx="0" cy="0"/>
+        </a:xfrm>
+      </p:grpSpPr>
+      <p:pic>
+        <p:nvPicPr>
+          <p:cNvPr id="2075" name="Рисунок 2074">
+            <a:extLst>
+              <a:ext uri="{FF2B5EF4-FFF2-40B4-BE49-F238E27FC236}">
+                <a16:creationId xmlns:a16="http://schemas.microsoft.com/office/drawing/2014/main" id="{DC4AFE69-AA96-A464-09E6-66F869184B57}"/>
+              </a:ext>
+            </a:extLst>
+          </p:cNvPr>
+          <p:cNvPicPr>
+            <a:picLocks noChangeAspect="1"/>
+          </p:cNvPicPr>
+          <p:nvPr/>
+        </p:nvPicPr>
+        <p:blipFill>
+          <a:blip r:embed="rId2">
+            <a:extLst>
+              <a:ext uri="{28A0092B-C50C-407E-A947-70E740481C1C}">
+                <a14:useLocalDpi xmlns:a14="http://schemas.microsoft.com/office/drawing/2010/main" val="0"/>
+              </a:ext>
+            </a:extLst>
+          </a:blip>
+          <a:stretch>
+            <a:fillRect/>
+          </a:stretch>
+        </p:blipFill>
+        <p:spPr>
+          <a:xfrm>
+            <a:off x="0" y="0"/>
+            <a:ext cx="12191999" cy="6858000"/>
+          </a:xfrm>
+          <a:prstGeom prst="rect">
+            <a:avLst/>
+          </a:prstGeom>
+        </p:spPr>
+      </p:pic>
+      <p:sp>
+        <p:nvSpPr>
+          <p:cNvPr id="5" name="Rectangle 6">
+            <a:extLst>
+              <a:ext uri="{FF2B5EF4-FFF2-40B4-BE49-F238E27FC236}">
+                <a16:creationId xmlns:a16="http://schemas.microsoft.com/office/drawing/2014/main" id="{643028D2-3B1A-8914-D717-A3574B29E0DD}"/>
+              </a:ext>
+            </a:extLst>
+          </p:cNvPr>
+          <p:cNvSpPr>
+            <a:spLocks noChangeArrowheads="1"/>
+          </p:cNvSpPr>
+          <p:nvPr/>
+        </p:nvSpPr>
+        <p:spPr bwMode="auto">
+          <a:xfrm>
+            <a:off x="485775" y="412750"/>
+            <a:ext cx="5975995" cy="846386"/>
+          </a:xfrm>
+          <a:prstGeom prst="rect">
+            <a:avLst/>
+          </a:prstGeom>
+          <a:noFill/>
+          <a:ln>
+            <a:noFill/>
+          </a:ln>
+          <a:extLst>
+            <a:ext uri="{909E8E84-426E-40DD-AFC4-6F175D3DCCD1}">
+              <a14:hiddenFill xmlns:a14="http://schemas.microsoft.com/office/drawing/2010/main">
+                <a:solidFill>
+                  <a:srgbClr val="FFFFFF"/>
+                </a:solidFill>
+              </a14:hiddenFill>
+            </a:ext>
+            <a:ext uri="{91240B29-F687-4F45-9708-019B960494DF}">
+              <a14:hiddenLine xmlns:a14="http://schemas.microsoft.com/office/drawing/2010/main" w="9525">
+                <a:solidFill>
+                  <a:srgbClr val="000000"/>
+                </a:solidFill>
+                <a:miter lim="800000"/>
+                <a:headEnd/>
+                <a:tailEnd/>
+              </a14:hiddenLine>
+            </a:ext>
+          </a:extLst>
+        </p:spPr>
+        <p:txBody>
+          <a:bodyPr vert="horz" wrap="none" lIns="0" tIns="0" rIns="0" bIns="0" numCol="1" anchor="t" anchorCtr="0" compatLnSpc="1">
+            <a:prstTxWarp prst="textNoShape">
+              <a:avLst/>
+            </a:prstTxWarp>
+            <a:spAutoFit/>
+          </a:bodyPr>
+          <a:lstStyle>
+            <a:lvl1pPr eaLnBrk="0" fontAlgn="base" hangingPunct="0">
+              <a:spcBef>
+                <a:spcPct val="0"/>
+              </a:spcBef>
+              <a:spcAft>
+                <a:spcPct val="0"/>
+              </a:spcAft>
+              <a:defRPr>
+                <a:solidFill>
+                  <a:schemeClr val="tx1"/>
+                </a:solidFill>
+                <a:latin typeface="Arial" panose="020B0604020202020204" pitchFamily="34" charset="0"/>
+              </a:defRPr>
+            </a:lvl1pPr>
+            <a:lvl2pPr eaLnBrk="0" fontAlgn="base" hangingPunct="0">
+              <a:spcBef>
+                <a:spcPct val="0"/>
+              </a:spcBef>
+              <a:spcAft>
+                <a:spcPct val="0"/>
+              </a:spcAft>
+              <a:defRPr>
+                <a:solidFill>
+                  <a:schemeClr val="tx1"/>
+                </a:solidFill>
+                <a:latin typeface="Arial" panose="020B0604020202020204" pitchFamily="34" charset="0"/>
+              </a:defRPr>
+            </a:lvl2pPr>
+            <a:lvl3pPr eaLnBrk="0" fontAlgn="base" hangingPunct="0">
+              <a:spcBef>
+                <a:spcPct val="0"/>
+              </a:spcBef>
+              <a:spcAft>
+                <a:spcPct val="0"/>
+              </a:spcAft>
+              <a:defRPr>
+                <a:solidFill>
+                  <a:schemeClr val="tx1"/>
+                </a:solidFill>
+                <a:latin typeface="Arial" panose="020B0604020202020204" pitchFamily="34" charset="0"/>
+              </a:defRPr>
+            </a:lvl3pPr>
+            <a:lvl4pPr eaLnBrk="0" fontAlgn="base" hangingPunct="0">
+              <a:spcBef>
+                <a:spcPct val="0"/>
+              </a:spcBef>
+              <a:spcAft>
+                <a:spcPct val="0"/>
+              </a:spcAft>
+              <a:defRPr>
+                <a:solidFill>
+                  <a:schemeClr val="tx1"/>
+                </a:solidFill>
+                <a:latin typeface="Arial" panose="020B0604020202020204" pitchFamily="34" charset="0"/>
+              </a:defRPr>
+            </a:lvl4pPr>
+            <a:lvl5pPr eaLnBrk="0" fontAlgn="base" hangingPunct="0">
+              <a:spcBef>
+                <a:spcPct val="0"/>
+              </a:spcBef>
+              <a:spcAft>
+                <a:spcPct val="0"/>
+              </a:spcAft>
+              <a:defRPr>
+                <a:solidFill>
+                  <a:schemeClr val="tx1"/>
+                </a:solidFill>
+                <a:latin typeface="Arial" panose="020B0604020202020204" pitchFamily="34" charset="0"/>
+              </a:defRPr>
+            </a:lvl5pPr>
+            <a:lvl6pPr eaLnBrk="0" fontAlgn="base" hangingPunct="0">
+              <a:spcBef>
+                <a:spcPct val="0"/>
+              </a:spcBef>
+              <a:spcAft>
+                <a:spcPct val="0"/>
+              </a:spcAft>
+              <a:defRPr>
+                <a:solidFill>
+                  <a:schemeClr val="tx1"/>
+                </a:solidFill>
+                <a:latin typeface="Arial" panose="020B0604020202020204" pitchFamily="34" charset="0"/>
+              </a:defRPr>
+            </a:lvl6pPr>
+            <a:lvl7pPr eaLnBrk="0" fontAlgn="base" hangingPunct="0">
+              <a:spcBef>
+                <a:spcPct val="0"/>
+              </a:spcBef>
+              <a:spcAft>
+                <a:spcPct val="0"/>
+              </a:spcAft>
+              <a:defRPr>
+                <a:solidFill>
+                  <a:schemeClr val="tx1"/>
+                </a:solidFill>
+                <a:latin typeface="Arial" panose="020B0604020202020204" pitchFamily="34" charset="0"/>
+              </a:defRPr>
+            </a:lvl7pPr>
+            <a:lvl8pPr eaLnBrk="0" fontAlgn="base" hangingPunct="0">
+              <a:spcBef>
+                <a:spcPct val="0"/>
+              </a:spcBef>
+              <a:spcAft>
+                <a:spcPct val="0"/>
+              </a:spcAft>
+              <a:defRPr>
+                <a:solidFill>
+                  <a:schemeClr val="tx1"/>
+                </a:solidFill>
+                <a:latin typeface="Arial" panose="020B0604020202020204" pitchFamily="34" charset="0"/>
+              </a:defRPr>
+            </a:lvl8pPr>
+            <a:lvl9pPr eaLnBrk="0" fontAlgn="base" hangingPunct="0">
+              <a:spcBef>
+                <a:spcPct val="0"/>
+              </a:spcBef>
+              <a:spcAft>
+                <a:spcPct val="0"/>
+              </a:spcAft>
+              <a:defRPr>
+                <a:solidFill>
+                  <a:schemeClr val="tx1"/>
+                </a:solidFill>
+                <a:latin typeface="Arial" panose="020B0604020202020204" pitchFamily="34" charset="0"/>
+              </a:defRPr>
+            </a:lvl9pPr>
+          </a:lstStyle>
+          <a:p>
+            <a:pPr marL="0" marR="0" lvl="0" indent="0" algn="l" defTabSz="914400" rtl="0" eaLnBrk="0" fontAlgn="base" latinLnBrk="0" hangingPunct="0">
+              <a:lnSpc>
+                <a:spcPct val="100000"/>
+              </a:lnSpc>
+              <a:spcBef>
+                <a:spcPct val="0"/>
+              </a:spcBef>
+              <a:spcAft>
+                <a:spcPct val="0"/>
+              </a:spcAft>
+              <a:buClrTx/>
+              <a:buSzTx/>
+              <a:buFontTx/>
+              <a:buNone/>
+              <a:tabLst/>
+            </a:pPr>
+            <a:r>
+              <a:rPr lang="en-US" altLang="ru-RU" sz="5500" b="1" dirty="0" err="1">
+                <a:solidFill>
+                  <a:srgbClr val="000000"/>
+                </a:solidFill>
+                <a:latin typeface="Times New Roman" panose="02020603050405020304" pitchFamily="18" charset="0"/>
+                <a:cs typeface="Times New Roman" panose="02020603050405020304" pitchFamily="18" charset="0"/>
+              </a:rPr>
+              <a:t>Console.ReadLine</a:t>
+            </a:r>
+            <a:r>
+              <a:rPr lang="en-US" altLang="ru-RU" sz="5500" b="1" dirty="0">
+                <a:solidFill>
+                  <a:srgbClr val="000000"/>
+                </a:solidFill>
+                <a:latin typeface="Times New Roman" panose="02020603050405020304" pitchFamily="18" charset="0"/>
+                <a:cs typeface="Times New Roman" panose="02020603050405020304" pitchFamily="18" charset="0"/>
+              </a:rPr>
+              <a:t>()</a:t>
+            </a:r>
+            <a:endParaRPr kumimoji="0" lang="ru-RU" altLang="ru-RU" sz="1800" b="0" i="0" u="none" strike="noStrike" cap="none" normalizeH="0" baseline="0" dirty="0">
+              <a:ln>
+                <a:noFill/>
+              </a:ln>
+              <a:solidFill>
+                <a:schemeClr val="tx1"/>
+              </a:solidFill>
+              <a:effectLst/>
+              <a:latin typeface="Times New Roman" panose="02020603050405020304" pitchFamily="18" charset="0"/>
+              <a:cs typeface="Times New Roman" panose="02020603050405020304" pitchFamily="18" charset="0"/>
+            </a:endParaRPr>
+          </a:p>
+        </p:txBody>
+      </p:sp>
+      <p:pic>
+        <p:nvPicPr>
           <p:cNvPr id="3" name="Рисунок 2">
             <a:extLst>
               <a:ext uri="{FF2B5EF4-FFF2-40B4-BE49-F238E27FC236}">
-                <a16:creationId xmlns:a16="http://schemas.microsoft.com/office/drawing/2014/main" id="{B6F09CDD-E654-FC5C-0680-37C0AC57D3DB}"/>
+                <a16:creationId xmlns:a16="http://schemas.microsoft.com/office/drawing/2014/main" id="{42D6F77B-33C2-8F88-5555-3F0130562455}"/>
+              </a:ext>
+            </a:extLst>
+          </p:cNvPr>
+          <p:cNvPicPr>
+            <a:picLocks noChangeAspect="1"/>
+          </p:cNvPicPr>
+          <p:nvPr/>
+        </p:nvPicPr>
+        <p:blipFill>
+          <a:blip r:embed="rId3"/>
+          <a:stretch>
+            <a:fillRect/>
+          </a:stretch>
+        </p:blipFill>
+        <p:spPr>
+          <a:xfrm>
+            <a:off x="2338892" y="1457271"/>
+            <a:ext cx="8245755" cy="5133902"/>
+          </a:xfrm>
+          <a:prstGeom prst="rect">
+            <a:avLst/>
+          </a:prstGeom>
+          <a:solidFill>
+            <a:srgbClr val="FFFFFF">
+              <a:shade val="85000"/>
+            </a:srgbClr>
+          </a:solidFill>
+          <a:ln w="88900" cap="sq">
+            <a:solidFill>
+              <a:srgbClr val="FFFFFF"/>
+            </a:solidFill>
+            <a:miter lim="800000"/>
+          </a:ln>
+          <a:effectLst>
+            <a:outerShdw blurRad="55000" dist="18000" dir="5400000" algn="tl" rotWithShape="0">
+              <a:srgbClr val="000000">
+                <a:alpha val="40000"/>
+              </a:srgbClr>
+            </a:outerShdw>
+          </a:effectLst>
+          <a:scene3d>
+            <a:camera prst="orthographicFront"/>
+            <a:lightRig rig="twoPt" dir="t">
+              <a:rot lat="0" lon="0" rev="7200000"/>
+            </a:lightRig>
+          </a:scene3d>
+          <a:sp3d>
+            <a:bevelT w="25400" h="19050"/>
+            <a:contourClr>
+              <a:srgbClr val="FFFFFF"/>
+            </a:contourClr>
+          </a:sp3d>
+        </p:spPr>
+      </p:pic>
+    </p:spTree>
+    <p:extLst>
+      <p:ext uri="{BB962C8B-B14F-4D97-AF65-F5344CB8AC3E}">
+        <p14:creationId xmlns:p14="http://schemas.microsoft.com/office/powerpoint/2010/main" val="1593743572"/>
+      </p:ext>
+    </p:extLst>
+  </p:cSld>
+  <p:clrMapOvr>
+    <a:masterClrMapping/>
+  </p:clrMapOvr>
+</p:sld>
+</file>
+
+<file path=ppt/slides/slide4.xml><?xml version="1.0" encoding="utf-8"?>
+<p:sld xmlns:a="http://schemas.openxmlformats.org/drawingml/2006/main" xmlns:r="http://schemas.openxmlformats.org/officeDocument/2006/relationships" xmlns:p="http://schemas.openxmlformats.org/presentationml/2006/main">
+  <p:cSld>
+    <p:spTree>
+      <p:nvGrpSpPr>
+        <p:cNvPr id="1" name="">
+          <a:extLst>
+            <a:ext uri="{FF2B5EF4-FFF2-40B4-BE49-F238E27FC236}">
+              <a16:creationId xmlns:a16="http://schemas.microsoft.com/office/drawing/2014/main" id="{9D8D98B7-05FD-DB26-5C2D-58F5EDB37CE5}"/>
+            </a:ext>
+          </a:extLst>
+        </p:cNvPr>
+        <p:cNvGrpSpPr/>
+        <p:nvPr/>
+      </p:nvGrpSpPr>
+      <p:grpSpPr>
+        <a:xfrm>
+          <a:off x="0" y="0"/>
+          <a:ext cx="0" cy="0"/>
+          <a:chOff x="0" y="0"/>
+          <a:chExt cx="0" cy="0"/>
+        </a:xfrm>
+      </p:grpSpPr>
+      <p:pic>
+        <p:nvPicPr>
+          <p:cNvPr id="2075" name="Рисунок 2074">
+            <a:extLst>
+              <a:ext uri="{FF2B5EF4-FFF2-40B4-BE49-F238E27FC236}">
+                <a16:creationId xmlns:a16="http://schemas.microsoft.com/office/drawing/2014/main" id="{2D529881-DDB3-6852-DE24-A219D53D0AB6}"/>
+              </a:ext>
+            </a:extLst>
+          </p:cNvPr>
+          <p:cNvPicPr>
+            <a:picLocks noChangeAspect="1"/>
+          </p:cNvPicPr>
+          <p:nvPr/>
+        </p:nvPicPr>
+        <p:blipFill>
+          <a:blip r:embed="rId2">
+            <a:extLst>
+              <a:ext uri="{28A0092B-C50C-407E-A947-70E740481C1C}">
+                <a14:useLocalDpi xmlns:a14="http://schemas.microsoft.com/office/drawing/2010/main" val="0"/>
+              </a:ext>
+            </a:extLst>
+          </a:blip>
+          <a:stretch>
+            <a:fillRect/>
+          </a:stretch>
+        </p:blipFill>
+        <p:spPr>
+          <a:xfrm>
+            <a:off x="0" y="0"/>
+            <a:ext cx="12191999" cy="6858000"/>
+          </a:xfrm>
+          <a:prstGeom prst="rect">
+            <a:avLst/>
+          </a:prstGeom>
+        </p:spPr>
+      </p:pic>
+      <p:sp>
+        <p:nvSpPr>
+          <p:cNvPr id="5" name="Rectangle 6">
+            <a:extLst>
+              <a:ext uri="{FF2B5EF4-FFF2-40B4-BE49-F238E27FC236}">
+                <a16:creationId xmlns:a16="http://schemas.microsoft.com/office/drawing/2014/main" id="{880F4029-E4A7-0067-C457-3D1A4F0D6369}"/>
+              </a:ext>
+            </a:extLst>
+          </p:cNvPr>
+          <p:cNvSpPr>
+            <a:spLocks noChangeArrowheads="1"/>
+          </p:cNvSpPr>
+          <p:nvPr/>
+        </p:nvSpPr>
+        <p:spPr bwMode="auto">
+          <a:xfrm>
+            <a:off x="485775" y="412750"/>
+            <a:ext cx="5975995" cy="846386"/>
+          </a:xfrm>
+          <a:prstGeom prst="rect">
+            <a:avLst/>
+          </a:prstGeom>
+          <a:noFill/>
+          <a:ln>
+            <a:noFill/>
+          </a:ln>
+          <a:extLst>
+            <a:ext uri="{909E8E84-426E-40DD-AFC4-6F175D3DCCD1}">
+              <a14:hiddenFill xmlns:a14="http://schemas.microsoft.com/office/drawing/2010/main">
+                <a:solidFill>
+                  <a:srgbClr val="FFFFFF"/>
+                </a:solidFill>
+              </a14:hiddenFill>
+            </a:ext>
+            <a:ext uri="{91240B29-F687-4F45-9708-019B960494DF}">
+              <a14:hiddenLine xmlns:a14="http://schemas.microsoft.com/office/drawing/2010/main" w="9525">
+                <a:solidFill>
+                  <a:srgbClr val="000000"/>
+                </a:solidFill>
+                <a:miter lim="800000"/>
+                <a:headEnd/>
+                <a:tailEnd/>
+              </a14:hiddenLine>
+            </a:ext>
+          </a:extLst>
+        </p:spPr>
+        <p:txBody>
+          <a:bodyPr vert="horz" wrap="none" lIns="0" tIns="0" rIns="0" bIns="0" numCol="1" anchor="t" anchorCtr="0" compatLnSpc="1">
+            <a:prstTxWarp prst="textNoShape">
+              <a:avLst/>
+            </a:prstTxWarp>
+            <a:spAutoFit/>
+          </a:bodyPr>
+          <a:lstStyle>
+            <a:lvl1pPr eaLnBrk="0" fontAlgn="base" hangingPunct="0">
+              <a:spcBef>
+                <a:spcPct val="0"/>
+              </a:spcBef>
+              <a:spcAft>
+                <a:spcPct val="0"/>
+              </a:spcAft>
+              <a:defRPr>
+                <a:solidFill>
+                  <a:schemeClr val="tx1"/>
+                </a:solidFill>
+                <a:latin typeface="Arial" panose="020B0604020202020204" pitchFamily="34" charset="0"/>
+              </a:defRPr>
+            </a:lvl1pPr>
+            <a:lvl2pPr eaLnBrk="0" fontAlgn="base" hangingPunct="0">
+              <a:spcBef>
+                <a:spcPct val="0"/>
+              </a:spcBef>
+              <a:spcAft>
+                <a:spcPct val="0"/>
+              </a:spcAft>
+              <a:defRPr>
+                <a:solidFill>
+                  <a:schemeClr val="tx1"/>
+                </a:solidFill>
+                <a:latin typeface="Arial" panose="020B0604020202020204" pitchFamily="34" charset="0"/>
+              </a:defRPr>
+            </a:lvl2pPr>
+            <a:lvl3pPr eaLnBrk="0" fontAlgn="base" hangingPunct="0">
+              <a:spcBef>
+                <a:spcPct val="0"/>
+              </a:spcBef>
+              <a:spcAft>
+                <a:spcPct val="0"/>
+              </a:spcAft>
+              <a:defRPr>
+                <a:solidFill>
+                  <a:schemeClr val="tx1"/>
+                </a:solidFill>
+                <a:latin typeface="Arial" panose="020B0604020202020204" pitchFamily="34" charset="0"/>
+              </a:defRPr>
+            </a:lvl3pPr>
+            <a:lvl4pPr eaLnBrk="0" fontAlgn="base" hangingPunct="0">
+              <a:spcBef>
+                <a:spcPct val="0"/>
+              </a:spcBef>
+              <a:spcAft>
+                <a:spcPct val="0"/>
+              </a:spcAft>
+              <a:defRPr>
+                <a:solidFill>
+                  <a:schemeClr val="tx1"/>
+                </a:solidFill>
+                <a:latin typeface="Arial" panose="020B0604020202020204" pitchFamily="34" charset="0"/>
+              </a:defRPr>
+            </a:lvl4pPr>
+            <a:lvl5pPr eaLnBrk="0" fontAlgn="base" hangingPunct="0">
+              <a:spcBef>
+                <a:spcPct val="0"/>
+              </a:spcBef>
+              <a:spcAft>
+                <a:spcPct val="0"/>
+              </a:spcAft>
+              <a:defRPr>
+                <a:solidFill>
+                  <a:schemeClr val="tx1"/>
+                </a:solidFill>
+                <a:latin typeface="Arial" panose="020B0604020202020204" pitchFamily="34" charset="0"/>
+              </a:defRPr>
+            </a:lvl5pPr>
+            <a:lvl6pPr eaLnBrk="0" fontAlgn="base" hangingPunct="0">
+              <a:spcBef>
+                <a:spcPct val="0"/>
+              </a:spcBef>
+              <a:spcAft>
+                <a:spcPct val="0"/>
+              </a:spcAft>
+              <a:defRPr>
+                <a:solidFill>
+                  <a:schemeClr val="tx1"/>
+                </a:solidFill>
+                <a:latin typeface="Arial" panose="020B0604020202020204" pitchFamily="34" charset="0"/>
+              </a:defRPr>
+            </a:lvl6pPr>
+            <a:lvl7pPr eaLnBrk="0" fontAlgn="base" hangingPunct="0">
+              <a:spcBef>
+                <a:spcPct val="0"/>
+              </a:spcBef>
+              <a:spcAft>
+                <a:spcPct val="0"/>
+              </a:spcAft>
+              <a:defRPr>
+                <a:solidFill>
+                  <a:schemeClr val="tx1"/>
+                </a:solidFill>
+                <a:latin typeface="Arial" panose="020B0604020202020204" pitchFamily="34" charset="0"/>
+              </a:defRPr>
+            </a:lvl7pPr>
+            <a:lvl8pPr eaLnBrk="0" fontAlgn="base" hangingPunct="0">
+              <a:spcBef>
+                <a:spcPct val="0"/>
+              </a:spcBef>
+              <a:spcAft>
+                <a:spcPct val="0"/>
+              </a:spcAft>
+              <a:defRPr>
+                <a:solidFill>
+                  <a:schemeClr val="tx1"/>
+                </a:solidFill>
+                <a:latin typeface="Arial" panose="020B0604020202020204" pitchFamily="34" charset="0"/>
+              </a:defRPr>
+            </a:lvl8pPr>
+            <a:lvl9pPr eaLnBrk="0" fontAlgn="base" hangingPunct="0">
+              <a:spcBef>
+                <a:spcPct val="0"/>
+              </a:spcBef>
+              <a:spcAft>
+                <a:spcPct val="0"/>
+              </a:spcAft>
+              <a:defRPr>
+                <a:solidFill>
+                  <a:schemeClr val="tx1"/>
+                </a:solidFill>
+                <a:latin typeface="Arial" panose="020B0604020202020204" pitchFamily="34" charset="0"/>
+              </a:defRPr>
+            </a:lvl9pPr>
+          </a:lstStyle>
+          <a:p>
+            <a:pPr marL="0" marR="0" lvl="0" indent="0" algn="l" defTabSz="914400" rtl="0" eaLnBrk="0" fontAlgn="base" latinLnBrk="0" hangingPunct="0">
+              <a:lnSpc>
+                <a:spcPct val="100000"/>
+              </a:lnSpc>
+              <a:spcBef>
+                <a:spcPct val="0"/>
+              </a:spcBef>
+              <a:spcAft>
+                <a:spcPct val="0"/>
+              </a:spcAft>
+              <a:buClrTx/>
+              <a:buSzTx/>
+              <a:buFontTx/>
+              <a:buNone/>
+              <a:tabLst/>
+            </a:pPr>
+            <a:r>
+              <a:rPr lang="en-US" altLang="ru-RU" sz="5500" b="1" dirty="0" err="1">
+                <a:solidFill>
+                  <a:srgbClr val="000000"/>
+                </a:solidFill>
+                <a:latin typeface="Times New Roman" panose="02020603050405020304" pitchFamily="18" charset="0"/>
+                <a:cs typeface="Times New Roman" panose="02020603050405020304" pitchFamily="18" charset="0"/>
+              </a:rPr>
+              <a:t>Console.ReadLine</a:t>
+            </a:r>
+            <a:r>
+              <a:rPr lang="en-US" altLang="ru-RU" sz="5500" b="1" dirty="0">
+                <a:solidFill>
+                  <a:srgbClr val="000000"/>
+                </a:solidFill>
+                <a:latin typeface="Times New Roman" panose="02020603050405020304" pitchFamily="18" charset="0"/>
+                <a:cs typeface="Times New Roman" panose="02020603050405020304" pitchFamily="18" charset="0"/>
+              </a:rPr>
+              <a:t>()</a:t>
+            </a:r>
+            <a:endParaRPr kumimoji="0" lang="ru-RU" altLang="ru-RU" sz="1800" b="0" i="0" u="none" strike="noStrike" cap="none" normalizeH="0" baseline="0" dirty="0">
+              <a:ln>
+                <a:noFill/>
+              </a:ln>
+              <a:solidFill>
+                <a:schemeClr val="tx1"/>
+              </a:solidFill>
+              <a:effectLst/>
+              <a:latin typeface="Times New Roman" panose="02020603050405020304" pitchFamily="18" charset="0"/>
+              <a:cs typeface="Times New Roman" panose="02020603050405020304" pitchFamily="18" charset="0"/>
+            </a:endParaRPr>
+          </a:p>
+        </p:txBody>
+      </p:sp>
+      <p:pic>
+        <p:nvPicPr>
+          <p:cNvPr id="3" name="Рисунок 2">
+            <a:extLst>
+              <a:ext uri="{FF2B5EF4-FFF2-40B4-BE49-F238E27FC236}">
+                <a16:creationId xmlns:a16="http://schemas.microsoft.com/office/drawing/2014/main" id="{A6F4164A-3E75-F656-5E85-7EE63DC6C600}"/>
               </a:ext>
             </a:extLst>
           </p:cNvPr>
@@ -7054,7 +9056,7 @@
     </p:spTree>
     <p:extLst>
       <p:ext uri="{BB962C8B-B14F-4D97-AF65-F5344CB8AC3E}">
-        <p14:creationId xmlns:p14="http://schemas.microsoft.com/office/powerpoint/2010/main" val="1852719548"/>
+        <p14:creationId xmlns:p14="http://schemas.microsoft.com/office/powerpoint/2010/main" val="932416698"/>
       </p:ext>
     </p:extLst>
   </p:cSld>
@@ -7064,7 +9066,7 @@
 </p:sld>
 </file>
 
-<file path=ppt/slides/slide3.xml><?xml version="1.0" encoding="utf-8"?>
+<file path=ppt/slides/slide5.xml><?xml version="1.0" encoding="utf-8"?>
 <p:sld xmlns:a="http://schemas.openxmlformats.org/drawingml/2006/main" xmlns:r="http://schemas.openxmlformats.org/officeDocument/2006/relationships" xmlns:p="http://schemas.openxmlformats.org/presentationml/2006/main">
   <p:cSld>
     <p:spTree>
@@ -7111,9 +9113,147 @@
           </a:prstGeom>
         </p:spPr>
       </p:pic>
+      <p:pic>
+        <p:nvPicPr>
+          <p:cNvPr id="7" name="Рисунок 6">
+            <a:extLst>
+              <a:ext uri="{FF2B5EF4-FFF2-40B4-BE49-F238E27FC236}">
+                <a16:creationId xmlns:a16="http://schemas.microsoft.com/office/drawing/2014/main" id="{9B747909-38B0-0F76-1A42-968FDE8CDFA9}"/>
+              </a:ext>
+            </a:extLst>
+          </p:cNvPr>
+          <p:cNvPicPr>
+            <a:picLocks noChangeAspect="1"/>
+          </p:cNvPicPr>
+          <p:nvPr/>
+        </p:nvPicPr>
+        <p:blipFill>
+          <a:blip r:embed="rId4"/>
+          <a:stretch>
+            <a:fillRect/>
+          </a:stretch>
+        </p:blipFill>
+        <p:spPr>
+          <a:xfrm>
+            <a:off x="2426590" y="0"/>
+            <a:ext cx="7338819" cy="6858000"/>
+          </a:xfrm>
+          <a:prstGeom prst="rect">
+            <a:avLst/>
+          </a:prstGeom>
+          <a:solidFill>
+            <a:srgbClr val="FFFFFF">
+              <a:shade val="85000"/>
+            </a:srgbClr>
+          </a:solidFill>
+          <a:ln w="88900" cap="sq">
+            <a:solidFill>
+              <a:srgbClr val="FFFFFF"/>
+            </a:solidFill>
+            <a:miter lim="800000"/>
+          </a:ln>
+          <a:effectLst>
+            <a:outerShdw blurRad="55000" dist="18000" dir="5400000" algn="tl" rotWithShape="0">
+              <a:srgbClr val="000000">
+                <a:alpha val="40000"/>
+              </a:srgbClr>
+            </a:outerShdw>
+          </a:effectLst>
+          <a:scene3d>
+            <a:camera prst="orthographicFront"/>
+            <a:lightRig rig="twoPt" dir="t">
+              <a:rot lat="0" lon="0" rev="7200000"/>
+            </a:lightRig>
+          </a:scene3d>
+          <a:sp3d>
+            <a:bevelT w="25400" h="19050"/>
+            <a:contourClr>
+              <a:srgbClr val="FFFFFF"/>
+            </a:contourClr>
+          </a:sp3d>
+        </p:spPr>
+      </p:pic>
+    </p:spTree>
+    <p:extLst>
+      <p:ext uri="{BB962C8B-B14F-4D97-AF65-F5344CB8AC3E}">
+        <p14:creationId xmlns:p14="http://schemas.microsoft.com/office/powerpoint/2010/main" val="2481352545"/>
+      </p:ext>
+    </p:extLst>
+  </p:cSld>
+  <p:clrMapOvr>
+    <a:masterClrMapping/>
+  </p:clrMapOvr>
+</p:sld>
+</file>
+
+<file path=ppt/slides/slide6.xml><?xml version="1.0" encoding="utf-8"?>
+<p:sld xmlns:a="http://schemas.openxmlformats.org/drawingml/2006/main" xmlns:r="http://schemas.openxmlformats.org/officeDocument/2006/relationships" xmlns:p="http://schemas.openxmlformats.org/presentationml/2006/main">
+  <p:cSld>
+    <p:spTree>
+      <p:nvGrpSpPr>
+        <p:cNvPr id="1" name="">
+          <a:extLst>
+            <a:ext uri="{FF2B5EF4-FFF2-40B4-BE49-F238E27FC236}">
+              <a16:creationId xmlns:a16="http://schemas.microsoft.com/office/drawing/2014/main" id="{50D3E070-1D97-A7C7-2122-3D62365A3646}"/>
+            </a:ext>
+          </a:extLst>
+        </p:cNvPr>
+        <p:cNvGrpSpPr/>
+        <p:nvPr/>
+      </p:nvGrpSpPr>
+      <p:grpSpPr>
+        <a:xfrm>
+          <a:off x="0" y="0"/>
+          <a:ext cx="0" cy="0"/>
+          <a:chOff x="0" y="0"/>
+          <a:chExt cx="0" cy="0"/>
+        </a:xfrm>
+      </p:grpSpPr>
+      <p:pic>
+        <p:nvPicPr>
+          <p:cNvPr id="2075" name="Рисунок 2074">
+            <a:extLst>
+              <a:ext uri="{FF2B5EF4-FFF2-40B4-BE49-F238E27FC236}">
+                <a16:creationId xmlns:a16="http://schemas.microsoft.com/office/drawing/2014/main" id="{FE01619F-983F-373D-3EA1-3919FA067A25}"/>
+              </a:ext>
+            </a:extLst>
+          </p:cNvPr>
+          <p:cNvPicPr>
+            <a:picLocks noChangeAspect="1"/>
+          </p:cNvPicPr>
+          <p:nvPr/>
+        </p:nvPicPr>
+        <p:blipFill>
+          <a:blip r:embed="rId3">
+            <a:extLst>
+              <a:ext uri="{28A0092B-C50C-407E-A947-70E740481C1C}">
+                <a14:useLocalDpi xmlns:a14="http://schemas.microsoft.com/office/drawing/2010/main" val="0"/>
+              </a:ext>
+            </a:extLst>
+          </a:blip>
+          <a:stretch>
+            <a:fillRect/>
+          </a:stretch>
+        </p:blipFill>
+        <p:spPr>
+          <a:xfrm>
+            <a:off x="0" y="0"/>
+            <a:ext cx="12191999" cy="6858000"/>
+          </a:xfrm>
+          <a:prstGeom prst="rect">
+            <a:avLst/>
+          </a:prstGeom>
+        </p:spPr>
+      </p:pic>
       <p:sp>
         <p:nvSpPr>
-          <p:cNvPr id="5" name="Rectangle 6"/>
+          <p:cNvPr id="5" name="Rectangle 6">
+            <a:extLst>
+              <a:ext uri="{FF2B5EF4-FFF2-40B4-BE49-F238E27FC236}">
+                <a16:creationId xmlns:a16="http://schemas.microsoft.com/office/drawing/2014/main" id="{7D809105-3902-1DBB-5D12-B7BFCA937CD0}"/>
+              </a:ext>
+            </a:extLst>
+          </p:cNvPr>
           <p:cNvSpPr>
             <a:spLocks noChangeArrowheads="1"/>
           </p:cNvSpPr>
@@ -7336,7 +9476,7 @@
           <p:cNvPr id="3" name="Рисунок 2">
             <a:extLst>
               <a:ext uri="{FF2B5EF4-FFF2-40B4-BE49-F238E27FC236}">
-                <a16:creationId xmlns:a16="http://schemas.microsoft.com/office/drawing/2014/main" id="{71508886-0761-169A-5E4D-6A7BD2864E0F}"/>
+                <a16:creationId xmlns:a16="http://schemas.microsoft.com/office/drawing/2014/main" id="{B9149B2B-13A9-3EF2-6C6D-18CC6E32A6B6}"/>
               </a:ext>
             </a:extLst>
           </p:cNvPr>
@@ -7394,7 +9534,7 @@
     </p:spTree>
     <p:extLst>
       <p:ext uri="{BB962C8B-B14F-4D97-AF65-F5344CB8AC3E}">
-        <p14:creationId xmlns:p14="http://schemas.microsoft.com/office/powerpoint/2010/main" val="2481352545"/>
+        <p14:creationId xmlns:p14="http://schemas.microsoft.com/office/powerpoint/2010/main" val="2608076784"/>
       </p:ext>
     </p:extLst>
   </p:cSld>
@@ -7404,7 +9544,7 @@
 </p:sld>
 </file>
 
-<file path=ppt/slides/slide4.xml><?xml version="1.0" encoding="utf-8"?>
+<file path=ppt/slides/slide7.xml><?xml version="1.0" encoding="utf-8"?>
 <p:sld xmlns:a="http://schemas.openxmlformats.org/drawingml/2006/main" xmlns:r="http://schemas.openxmlformats.org/officeDocument/2006/relationships" xmlns:p="http://schemas.openxmlformats.org/presentationml/2006/main">
   <p:cSld>
     <p:spTree>
@@ -7762,7 +9902,7 @@
 </p:sld>
 </file>
 
-<file path=ppt/slides/slide5.xml><?xml version="1.0" encoding="utf-8"?>
+<file path=ppt/slides/slide8.xml><?xml version="1.0" encoding="utf-8"?>
 <p:sld xmlns:a="http://schemas.openxmlformats.org/drawingml/2006/main" xmlns:r="http://schemas.openxmlformats.org/officeDocument/2006/relationships" xmlns:p="http://schemas.openxmlformats.org/presentationml/2006/main">
   <p:cSld>
     <p:spTree>
@@ -8224,7 +10364,7 @@
 </p:sld>
 </file>
 
-<file path=ppt/slides/slide6.xml><?xml version="1.0" encoding="utf-8"?>
+<file path=ppt/slides/slide9.xml><?xml version="1.0" encoding="utf-8"?>
 <p:sld xmlns:a="http://schemas.openxmlformats.org/drawingml/2006/main" xmlns:r="http://schemas.openxmlformats.org/officeDocument/2006/relationships" xmlns:p="http://schemas.openxmlformats.org/presentationml/2006/main">
   <p:cSld>
     <p:spTree>
@@ -8680,1144 +10820,6 @@
       </p:par>
     </p:tnLst>
   </p:timing>
-</p:sld>
-</file>
-
-<file path=ppt/slides/slide7.xml><?xml version="1.0" encoding="utf-8"?>
-<p:sld xmlns:a="http://schemas.openxmlformats.org/drawingml/2006/main" xmlns:r="http://schemas.openxmlformats.org/officeDocument/2006/relationships" xmlns:p="http://schemas.openxmlformats.org/presentationml/2006/main">
-  <p:cSld>
-    <p:spTree>
-      <p:nvGrpSpPr>
-        <p:cNvPr id="1" name="">
-          <a:extLst>
-            <a:ext uri="{FF2B5EF4-FFF2-40B4-BE49-F238E27FC236}">
-              <a16:creationId xmlns:a16="http://schemas.microsoft.com/office/drawing/2014/main" id="{F87DB84A-7AA5-CF18-F56F-DCE77A929DBC}"/>
-            </a:ext>
-          </a:extLst>
-        </p:cNvPr>
-        <p:cNvGrpSpPr/>
-        <p:nvPr/>
-      </p:nvGrpSpPr>
-      <p:grpSpPr>
-        <a:xfrm>
-          <a:off x="0" y="0"/>
-          <a:ext cx="0" cy="0"/>
-          <a:chOff x="0" y="0"/>
-          <a:chExt cx="0" cy="0"/>
-        </a:xfrm>
-      </p:grpSpPr>
-      <p:pic>
-        <p:nvPicPr>
-          <p:cNvPr id="2075" name="Рисунок 2074">
-            <a:extLst>
-              <a:ext uri="{FF2B5EF4-FFF2-40B4-BE49-F238E27FC236}">
-                <a16:creationId xmlns:a16="http://schemas.microsoft.com/office/drawing/2014/main" id="{C4AA57FA-E6BD-EF7C-45D1-C9B48B6E388E}"/>
-              </a:ext>
-            </a:extLst>
-          </p:cNvPr>
-          <p:cNvPicPr>
-            <a:picLocks noChangeAspect="1"/>
-          </p:cNvPicPr>
-          <p:nvPr/>
-        </p:nvPicPr>
-        <p:blipFill>
-          <a:blip r:embed="rId3">
-            <a:extLst>
-              <a:ext uri="{28A0092B-C50C-407E-A947-70E740481C1C}">
-                <a14:useLocalDpi xmlns:a14="http://schemas.microsoft.com/office/drawing/2010/main" val="0"/>
-              </a:ext>
-            </a:extLst>
-          </a:blip>
-          <a:stretch>
-            <a:fillRect/>
-          </a:stretch>
-        </p:blipFill>
-        <p:spPr>
-          <a:xfrm>
-            <a:off x="0" y="0"/>
-            <a:ext cx="12191999" cy="6858000"/>
-          </a:xfrm>
-          <a:prstGeom prst="rect">
-            <a:avLst/>
-          </a:prstGeom>
-        </p:spPr>
-      </p:pic>
-      <p:sp>
-        <p:nvSpPr>
-          <p:cNvPr id="5" name="Rectangle 6">
-            <a:extLst>
-              <a:ext uri="{FF2B5EF4-FFF2-40B4-BE49-F238E27FC236}">
-                <a16:creationId xmlns:a16="http://schemas.microsoft.com/office/drawing/2014/main" id="{5308429C-5F4A-CC6B-6208-E7E24632024A}"/>
-              </a:ext>
-            </a:extLst>
-          </p:cNvPr>
-          <p:cNvSpPr>
-            <a:spLocks noChangeArrowheads="1"/>
-          </p:cNvSpPr>
-          <p:nvPr/>
-        </p:nvSpPr>
-        <p:spPr bwMode="auto">
-          <a:xfrm>
-            <a:off x="485775" y="412750"/>
-            <a:ext cx="7160293" cy="846386"/>
-          </a:xfrm>
-          <a:prstGeom prst="rect">
-            <a:avLst/>
-          </a:prstGeom>
-          <a:noFill/>
-          <a:ln>
-            <a:noFill/>
-          </a:ln>
-          <a:extLst>
-            <a:ext uri="{909E8E84-426E-40DD-AFC4-6F175D3DCCD1}">
-              <a14:hiddenFill xmlns:a14="http://schemas.microsoft.com/office/drawing/2010/main">
-                <a:solidFill>
-                  <a:srgbClr val="FFFFFF"/>
-                </a:solidFill>
-              </a14:hiddenFill>
-            </a:ext>
-            <a:ext uri="{91240B29-F687-4F45-9708-019B960494DF}">
-              <a14:hiddenLine xmlns:a14="http://schemas.microsoft.com/office/drawing/2010/main" w="9525">
-                <a:solidFill>
-                  <a:srgbClr val="000000"/>
-                </a:solidFill>
-                <a:miter lim="800000"/>
-                <a:headEnd/>
-                <a:tailEnd/>
-              </a14:hiddenLine>
-            </a:ext>
-          </a:extLst>
-        </p:spPr>
-        <p:txBody>
-          <a:bodyPr vert="horz" wrap="none" lIns="0" tIns="0" rIns="0" bIns="0" numCol="1" anchor="t" anchorCtr="0" compatLnSpc="1">
-            <a:prstTxWarp prst="textNoShape">
-              <a:avLst/>
-            </a:prstTxWarp>
-            <a:spAutoFit/>
-          </a:bodyPr>
-          <a:lstStyle>
-            <a:lvl1pPr eaLnBrk="0" fontAlgn="base" hangingPunct="0">
-              <a:spcBef>
-                <a:spcPct val="0"/>
-              </a:spcBef>
-              <a:spcAft>
-                <a:spcPct val="0"/>
-              </a:spcAft>
-              <a:defRPr>
-                <a:solidFill>
-                  <a:schemeClr val="tx1"/>
-                </a:solidFill>
-                <a:latin typeface="Arial" panose="020B0604020202020204" pitchFamily="34" charset="0"/>
-              </a:defRPr>
-            </a:lvl1pPr>
-            <a:lvl2pPr eaLnBrk="0" fontAlgn="base" hangingPunct="0">
-              <a:spcBef>
-                <a:spcPct val="0"/>
-              </a:spcBef>
-              <a:spcAft>
-                <a:spcPct val="0"/>
-              </a:spcAft>
-              <a:defRPr>
-                <a:solidFill>
-                  <a:schemeClr val="tx1"/>
-                </a:solidFill>
-                <a:latin typeface="Arial" panose="020B0604020202020204" pitchFamily="34" charset="0"/>
-              </a:defRPr>
-            </a:lvl2pPr>
-            <a:lvl3pPr eaLnBrk="0" fontAlgn="base" hangingPunct="0">
-              <a:spcBef>
-                <a:spcPct val="0"/>
-              </a:spcBef>
-              <a:spcAft>
-                <a:spcPct val="0"/>
-              </a:spcAft>
-              <a:defRPr>
-                <a:solidFill>
-                  <a:schemeClr val="tx1"/>
-                </a:solidFill>
-                <a:latin typeface="Arial" panose="020B0604020202020204" pitchFamily="34" charset="0"/>
-              </a:defRPr>
-            </a:lvl3pPr>
-            <a:lvl4pPr eaLnBrk="0" fontAlgn="base" hangingPunct="0">
-              <a:spcBef>
-                <a:spcPct val="0"/>
-              </a:spcBef>
-              <a:spcAft>
-                <a:spcPct val="0"/>
-              </a:spcAft>
-              <a:defRPr>
-                <a:solidFill>
-                  <a:schemeClr val="tx1"/>
-                </a:solidFill>
-                <a:latin typeface="Arial" panose="020B0604020202020204" pitchFamily="34" charset="0"/>
-              </a:defRPr>
-            </a:lvl4pPr>
-            <a:lvl5pPr eaLnBrk="0" fontAlgn="base" hangingPunct="0">
-              <a:spcBef>
-                <a:spcPct val="0"/>
-              </a:spcBef>
-              <a:spcAft>
-                <a:spcPct val="0"/>
-              </a:spcAft>
-              <a:defRPr>
-                <a:solidFill>
-                  <a:schemeClr val="tx1"/>
-                </a:solidFill>
-                <a:latin typeface="Arial" panose="020B0604020202020204" pitchFamily="34" charset="0"/>
-              </a:defRPr>
-            </a:lvl5pPr>
-            <a:lvl6pPr eaLnBrk="0" fontAlgn="base" hangingPunct="0">
-              <a:spcBef>
-                <a:spcPct val="0"/>
-              </a:spcBef>
-              <a:spcAft>
-                <a:spcPct val="0"/>
-              </a:spcAft>
-              <a:defRPr>
-                <a:solidFill>
-                  <a:schemeClr val="tx1"/>
-                </a:solidFill>
-                <a:latin typeface="Arial" panose="020B0604020202020204" pitchFamily="34" charset="0"/>
-              </a:defRPr>
-            </a:lvl6pPr>
-            <a:lvl7pPr eaLnBrk="0" fontAlgn="base" hangingPunct="0">
-              <a:spcBef>
-                <a:spcPct val="0"/>
-              </a:spcBef>
-              <a:spcAft>
-                <a:spcPct val="0"/>
-              </a:spcAft>
-              <a:defRPr>
-                <a:solidFill>
-                  <a:schemeClr val="tx1"/>
-                </a:solidFill>
-                <a:latin typeface="Arial" panose="020B0604020202020204" pitchFamily="34" charset="0"/>
-              </a:defRPr>
-            </a:lvl7pPr>
-            <a:lvl8pPr eaLnBrk="0" fontAlgn="base" hangingPunct="0">
-              <a:spcBef>
-                <a:spcPct val="0"/>
-              </a:spcBef>
-              <a:spcAft>
-                <a:spcPct val="0"/>
-              </a:spcAft>
-              <a:defRPr>
-                <a:solidFill>
-                  <a:schemeClr val="tx1"/>
-                </a:solidFill>
-                <a:latin typeface="Arial" panose="020B0604020202020204" pitchFamily="34" charset="0"/>
-              </a:defRPr>
-            </a:lvl8pPr>
-            <a:lvl9pPr eaLnBrk="0" fontAlgn="base" hangingPunct="0">
-              <a:spcBef>
-                <a:spcPct val="0"/>
-              </a:spcBef>
-              <a:spcAft>
-                <a:spcPct val="0"/>
-              </a:spcAft>
-              <a:defRPr>
-                <a:solidFill>
-                  <a:schemeClr val="tx1"/>
-                </a:solidFill>
-                <a:latin typeface="Arial" panose="020B0604020202020204" pitchFamily="34" charset="0"/>
-              </a:defRPr>
-            </a:lvl9pPr>
-          </a:lstStyle>
-          <a:p>
-            <a:pPr lvl="0"/>
-            <a:r>
-              <a:rPr lang="ru-RU" altLang="ru-RU" sz="5500" b="1" dirty="0">
-                <a:solidFill>
-                  <a:srgbClr val="000000"/>
-                </a:solidFill>
-                <a:latin typeface="Times New Roman" panose="02020603050405020304" pitchFamily="18" charset="0"/>
-                <a:cs typeface="Times New Roman" panose="02020603050405020304" pitchFamily="18" charset="0"/>
-              </a:rPr>
-              <a:t>Операторы сравнения</a:t>
-            </a:r>
-            <a:endParaRPr kumimoji="0" lang="ru-RU" altLang="ru-RU" sz="1800" b="0" i="0" u="none" strike="noStrike" cap="none" normalizeH="0" baseline="0" dirty="0">
-              <a:ln>
-                <a:noFill/>
-              </a:ln>
-              <a:solidFill>
-                <a:schemeClr val="tx1"/>
-              </a:solidFill>
-              <a:effectLst/>
-              <a:latin typeface="Times New Roman" panose="02020603050405020304" pitchFamily="18" charset="0"/>
-              <a:cs typeface="Times New Roman" panose="02020603050405020304" pitchFamily="18" charset="0"/>
-            </a:endParaRPr>
-          </a:p>
-        </p:txBody>
-      </p:sp>
-      <p:pic>
-        <p:nvPicPr>
-          <p:cNvPr id="3" name="Рисунок 2">
-            <a:extLst>
-              <a:ext uri="{FF2B5EF4-FFF2-40B4-BE49-F238E27FC236}">
-                <a16:creationId xmlns:a16="http://schemas.microsoft.com/office/drawing/2014/main" id="{05FBBF50-82A5-7955-B6EA-74409D50B8AA}"/>
-              </a:ext>
-            </a:extLst>
-          </p:cNvPr>
-          <p:cNvPicPr>
-            <a:picLocks noChangeAspect="1"/>
-          </p:cNvPicPr>
-          <p:nvPr/>
-        </p:nvPicPr>
-        <p:blipFill>
-          <a:blip r:embed="rId4"/>
-          <a:stretch>
-            <a:fillRect/>
-          </a:stretch>
-        </p:blipFill>
-        <p:spPr>
-          <a:xfrm>
-            <a:off x="1975637" y="1671886"/>
-            <a:ext cx="8240725" cy="4817655"/>
-          </a:xfrm>
-          <a:prstGeom prst="rect">
-            <a:avLst/>
-          </a:prstGeom>
-          <a:solidFill>
-            <a:srgbClr val="FFFFFF">
-              <a:shade val="85000"/>
-            </a:srgbClr>
-          </a:solidFill>
-          <a:ln w="88900" cap="sq">
-            <a:solidFill>
-              <a:srgbClr val="FFFFFF"/>
-            </a:solidFill>
-            <a:miter lim="800000"/>
-          </a:ln>
-          <a:effectLst>
-            <a:outerShdw blurRad="55000" dist="18000" dir="5400000" algn="tl" rotWithShape="0">
-              <a:srgbClr val="000000">
-                <a:alpha val="40000"/>
-              </a:srgbClr>
-            </a:outerShdw>
-          </a:effectLst>
-          <a:scene3d>
-            <a:camera prst="orthographicFront"/>
-            <a:lightRig rig="twoPt" dir="t">
-              <a:rot lat="0" lon="0" rev="7200000"/>
-            </a:lightRig>
-          </a:scene3d>
-          <a:sp3d>
-            <a:bevelT w="25400" h="19050"/>
-            <a:contourClr>
-              <a:srgbClr val="FFFFFF"/>
-            </a:contourClr>
-          </a:sp3d>
-        </p:spPr>
-      </p:pic>
-    </p:spTree>
-    <p:extLst>
-      <p:ext uri="{BB962C8B-B14F-4D97-AF65-F5344CB8AC3E}">
-        <p14:creationId xmlns:p14="http://schemas.microsoft.com/office/powerpoint/2010/main" val="3783972418"/>
-      </p:ext>
-    </p:extLst>
-  </p:cSld>
-  <p:clrMapOvr>
-    <a:masterClrMapping/>
-  </p:clrMapOvr>
-</p:sld>
-</file>
-
-<file path=ppt/slides/slide8.xml><?xml version="1.0" encoding="utf-8"?>
-<p:sld xmlns:a="http://schemas.openxmlformats.org/drawingml/2006/main" xmlns:r="http://schemas.openxmlformats.org/officeDocument/2006/relationships" xmlns:p="http://schemas.openxmlformats.org/presentationml/2006/main">
-  <p:cSld>
-    <p:spTree>
-      <p:nvGrpSpPr>
-        <p:cNvPr id="1" name="">
-          <a:extLst>
-            <a:ext uri="{FF2B5EF4-FFF2-40B4-BE49-F238E27FC236}">
-              <a16:creationId xmlns:a16="http://schemas.microsoft.com/office/drawing/2014/main" id="{5B1CB0E8-A473-6AA2-1C46-F78204130D1F}"/>
-            </a:ext>
-          </a:extLst>
-        </p:cNvPr>
-        <p:cNvGrpSpPr/>
-        <p:nvPr/>
-      </p:nvGrpSpPr>
-      <p:grpSpPr>
-        <a:xfrm>
-          <a:off x="0" y="0"/>
-          <a:ext cx="0" cy="0"/>
-          <a:chOff x="0" y="0"/>
-          <a:chExt cx="0" cy="0"/>
-        </a:xfrm>
-      </p:grpSpPr>
-      <p:pic>
-        <p:nvPicPr>
-          <p:cNvPr id="2075" name="Рисунок 2074">
-            <a:extLst>
-              <a:ext uri="{FF2B5EF4-FFF2-40B4-BE49-F238E27FC236}">
-                <a16:creationId xmlns:a16="http://schemas.microsoft.com/office/drawing/2014/main" id="{837DA8E5-EB8A-ADA7-C815-283B4E2D9D6E}"/>
-              </a:ext>
-            </a:extLst>
-          </p:cNvPr>
-          <p:cNvPicPr>
-            <a:picLocks noChangeAspect="1"/>
-          </p:cNvPicPr>
-          <p:nvPr/>
-        </p:nvPicPr>
-        <p:blipFill>
-          <a:blip r:embed="rId3">
-            <a:extLst>
-              <a:ext uri="{28A0092B-C50C-407E-A947-70E740481C1C}">
-                <a14:useLocalDpi xmlns:a14="http://schemas.microsoft.com/office/drawing/2010/main" val="0"/>
-              </a:ext>
-            </a:extLst>
-          </a:blip>
-          <a:stretch>
-            <a:fillRect/>
-          </a:stretch>
-        </p:blipFill>
-        <p:spPr>
-          <a:xfrm>
-            <a:off x="0" y="0"/>
-            <a:ext cx="12191999" cy="6858000"/>
-          </a:xfrm>
-          <a:prstGeom prst="rect">
-            <a:avLst/>
-          </a:prstGeom>
-        </p:spPr>
-      </p:pic>
-      <p:sp>
-        <p:nvSpPr>
-          <p:cNvPr id="5" name="Rectangle 6">
-            <a:extLst>
-              <a:ext uri="{FF2B5EF4-FFF2-40B4-BE49-F238E27FC236}">
-                <a16:creationId xmlns:a16="http://schemas.microsoft.com/office/drawing/2014/main" id="{1D0A65D1-E5B6-3C5D-A4E3-326FD1A12F97}"/>
-              </a:ext>
-            </a:extLst>
-          </p:cNvPr>
-          <p:cNvSpPr>
-            <a:spLocks noChangeArrowheads="1"/>
-          </p:cNvSpPr>
-          <p:nvPr/>
-        </p:nvSpPr>
-        <p:spPr bwMode="auto">
-          <a:xfrm>
-            <a:off x="485775" y="412750"/>
-            <a:ext cx="8818696" cy="923330"/>
-          </a:xfrm>
-          <a:prstGeom prst="rect">
-            <a:avLst/>
-          </a:prstGeom>
-          <a:noFill/>
-          <a:ln>
-            <a:noFill/>
-          </a:ln>
-          <a:extLst>
-            <a:ext uri="{909E8E84-426E-40DD-AFC4-6F175D3DCCD1}">
-              <a14:hiddenFill xmlns:a14="http://schemas.microsoft.com/office/drawing/2010/main">
-                <a:solidFill>
-                  <a:srgbClr val="FFFFFF"/>
-                </a:solidFill>
-              </a14:hiddenFill>
-            </a:ext>
-            <a:ext uri="{91240B29-F687-4F45-9708-019B960494DF}">
-              <a14:hiddenLine xmlns:a14="http://schemas.microsoft.com/office/drawing/2010/main" w="9525">
-                <a:solidFill>
-                  <a:srgbClr val="000000"/>
-                </a:solidFill>
-                <a:miter lim="800000"/>
-                <a:headEnd/>
-                <a:tailEnd/>
-              </a14:hiddenLine>
-            </a:ext>
-          </a:extLst>
-        </p:spPr>
-        <p:txBody>
-          <a:bodyPr vert="horz" wrap="none" lIns="0" tIns="0" rIns="0" bIns="0" numCol="1" anchor="t" anchorCtr="0" compatLnSpc="1">
-            <a:prstTxWarp prst="textNoShape">
-              <a:avLst/>
-            </a:prstTxWarp>
-            <a:spAutoFit/>
-          </a:bodyPr>
-          <a:lstStyle>
-            <a:lvl1pPr eaLnBrk="0" fontAlgn="base" hangingPunct="0">
-              <a:spcBef>
-                <a:spcPct val="0"/>
-              </a:spcBef>
-              <a:spcAft>
-                <a:spcPct val="0"/>
-              </a:spcAft>
-              <a:defRPr>
-                <a:solidFill>
-                  <a:schemeClr val="tx1"/>
-                </a:solidFill>
-                <a:latin typeface="Arial" panose="020B0604020202020204" pitchFamily="34" charset="0"/>
-              </a:defRPr>
-            </a:lvl1pPr>
-            <a:lvl2pPr eaLnBrk="0" fontAlgn="base" hangingPunct="0">
-              <a:spcBef>
-                <a:spcPct val="0"/>
-              </a:spcBef>
-              <a:spcAft>
-                <a:spcPct val="0"/>
-              </a:spcAft>
-              <a:defRPr>
-                <a:solidFill>
-                  <a:schemeClr val="tx1"/>
-                </a:solidFill>
-                <a:latin typeface="Arial" panose="020B0604020202020204" pitchFamily="34" charset="0"/>
-              </a:defRPr>
-            </a:lvl2pPr>
-            <a:lvl3pPr eaLnBrk="0" fontAlgn="base" hangingPunct="0">
-              <a:spcBef>
-                <a:spcPct val="0"/>
-              </a:spcBef>
-              <a:spcAft>
-                <a:spcPct val="0"/>
-              </a:spcAft>
-              <a:defRPr>
-                <a:solidFill>
-                  <a:schemeClr val="tx1"/>
-                </a:solidFill>
-                <a:latin typeface="Arial" panose="020B0604020202020204" pitchFamily="34" charset="0"/>
-              </a:defRPr>
-            </a:lvl3pPr>
-            <a:lvl4pPr eaLnBrk="0" fontAlgn="base" hangingPunct="0">
-              <a:spcBef>
-                <a:spcPct val="0"/>
-              </a:spcBef>
-              <a:spcAft>
-                <a:spcPct val="0"/>
-              </a:spcAft>
-              <a:defRPr>
-                <a:solidFill>
-                  <a:schemeClr val="tx1"/>
-                </a:solidFill>
-                <a:latin typeface="Arial" panose="020B0604020202020204" pitchFamily="34" charset="0"/>
-              </a:defRPr>
-            </a:lvl4pPr>
-            <a:lvl5pPr eaLnBrk="0" fontAlgn="base" hangingPunct="0">
-              <a:spcBef>
-                <a:spcPct val="0"/>
-              </a:spcBef>
-              <a:spcAft>
-                <a:spcPct val="0"/>
-              </a:spcAft>
-              <a:defRPr>
-                <a:solidFill>
-                  <a:schemeClr val="tx1"/>
-                </a:solidFill>
-                <a:latin typeface="Arial" panose="020B0604020202020204" pitchFamily="34" charset="0"/>
-              </a:defRPr>
-            </a:lvl5pPr>
-            <a:lvl6pPr eaLnBrk="0" fontAlgn="base" hangingPunct="0">
-              <a:spcBef>
-                <a:spcPct val="0"/>
-              </a:spcBef>
-              <a:spcAft>
-                <a:spcPct val="0"/>
-              </a:spcAft>
-              <a:defRPr>
-                <a:solidFill>
-                  <a:schemeClr val="tx1"/>
-                </a:solidFill>
-                <a:latin typeface="Arial" panose="020B0604020202020204" pitchFamily="34" charset="0"/>
-              </a:defRPr>
-            </a:lvl6pPr>
-            <a:lvl7pPr eaLnBrk="0" fontAlgn="base" hangingPunct="0">
-              <a:spcBef>
-                <a:spcPct val="0"/>
-              </a:spcBef>
-              <a:spcAft>
-                <a:spcPct val="0"/>
-              </a:spcAft>
-              <a:defRPr>
-                <a:solidFill>
-                  <a:schemeClr val="tx1"/>
-                </a:solidFill>
-                <a:latin typeface="Arial" panose="020B0604020202020204" pitchFamily="34" charset="0"/>
-              </a:defRPr>
-            </a:lvl7pPr>
-            <a:lvl8pPr eaLnBrk="0" fontAlgn="base" hangingPunct="0">
-              <a:spcBef>
-                <a:spcPct val="0"/>
-              </a:spcBef>
-              <a:spcAft>
-                <a:spcPct val="0"/>
-              </a:spcAft>
-              <a:defRPr>
-                <a:solidFill>
-                  <a:schemeClr val="tx1"/>
-                </a:solidFill>
-                <a:latin typeface="Arial" panose="020B0604020202020204" pitchFamily="34" charset="0"/>
-              </a:defRPr>
-            </a:lvl8pPr>
-            <a:lvl9pPr eaLnBrk="0" fontAlgn="base" hangingPunct="0">
-              <a:spcBef>
-                <a:spcPct val="0"/>
-              </a:spcBef>
-              <a:spcAft>
-                <a:spcPct val="0"/>
-              </a:spcAft>
-              <a:defRPr>
-                <a:solidFill>
-                  <a:schemeClr val="tx1"/>
-                </a:solidFill>
-                <a:latin typeface="Arial" panose="020B0604020202020204" pitchFamily="34" charset="0"/>
-              </a:defRPr>
-            </a:lvl9pPr>
-          </a:lstStyle>
-          <a:p>
-            <a:r>
-              <a:rPr lang="ru-RU" sz="6000" b="1" dirty="0"/>
-              <a:t>Логические операторы</a:t>
-            </a:r>
-          </a:p>
-        </p:txBody>
-      </p:sp>
-      <p:pic>
-        <p:nvPicPr>
-          <p:cNvPr id="3" name="Рисунок 2">
-            <a:extLst>
-              <a:ext uri="{FF2B5EF4-FFF2-40B4-BE49-F238E27FC236}">
-                <a16:creationId xmlns:a16="http://schemas.microsoft.com/office/drawing/2014/main" id="{B67F111E-26CD-0612-130E-D95701D1661B}"/>
-              </a:ext>
-            </a:extLst>
-          </p:cNvPr>
-          <p:cNvPicPr>
-            <a:picLocks noChangeAspect="1"/>
-          </p:cNvPicPr>
-          <p:nvPr/>
-        </p:nvPicPr>
-        <p:blipFill>
-          <a:blip r:embed="rId4"/>
-          <a:stretch>
-            <a:fillRect/>
-          </a:stretch>
-        </p:blipFill>
-        <p:spPr>
-          <a:xfrm>
-            <a:off x="3242847" y="1646826"/>
-            <a:ext cx="5706303" cy="1782174"/>
-          </a:xfrm>
-          <a:prstGeom prst="rect">
-            <a:avLst/>
-          </a:prstGeom>
-          <a:solidFill>
-            <a:srgbClr val="FFFFFF">
-              <a:shade val="85000"/>
-            </a:srgbClr>
-          </a:solidFill>
-          <a:ln w="88900" cap="sq">
-            <a:solidFill>
-              <a:srgbClr val="FFFFFF"/>
-            </a:solidFill>
-            <a:miter lim="800000"/>
-          </a:ln>
-          <a:effectLst>
-            <a:outerShdw blurRad="55000" dist="18000" dir="5400000" algn="tl" rotWithShape="0">
-              <a:srgbClr val="000000">
-                <a:alpha val="40000"/>
-              </a:srgbClr>
-            </a:outerShdw>
-          </a:effectLst>
-          <a:scene3d>
-            <a:camera prst="orthographicFront"/>
-            <a:lightRig rig="twoPt" dir="t">
-              <a:rot lat="0" lon="0" rev="7200000"/>
-            </a:lightRig>
-          </a:scene3d>
-          <a:sp3d>
-            <a:bevelT w="25400" h="19050"/>
-            <a:contourClr>
-              <a:srgbClr val="FFFFFF"/>
-            </a:contourClr>
-          </a:sp3d>
-        </p:spPr>
-      </p:pic>
-      <p:pic>
-        <p:nvPicPr>
-          <p:cNvPr id="6" name="Рисунок 5">
-            <a:extLst>
-              <a:ext uri="{FF2B5EF4-FFF2-40B4-BE49-F238E27FC236}">
-                <a16:creationId xmlns:a16="http://schemas.microsoft.com/office/drawing/2014/main" id="{BDECA11B-9497-AEE5-04F7-461AAD08BDF2}"/>
-              </a:ext>
-            </a:extLst>
-          </p:cNvPr>
-          <p:cNvPicPr>
-            <a:picLocks noChangeAspect="1"/>
-          </p:cNvPicPr>
-          <p:nvPr/>
-        </p:nvPicPr>
-        <p:blipFill>
-          <a:blip r:embed="rId5"/>
-          <a:stretch>
-            <a:fillRect/>
-          </a:stretch>
-        </p:blipFill>
-        <p:spPr>
-          <a:xfrm>
-            <a:off x="7342047" y="3928742"/>
-            <a:ext cx="3924848" cy="2400635"/>
-          </a:xfrm>
-          <a:prstGeom prst="rect">
-            <a:avLst/>
-          </a:prstGeom>
-          <a:solidFill>
-            <a:srgbClr val="FFFFFF">
-              <a:shade val="85000"/>
-            </a:srgbClr>
-          </a:solidFill>
-          <a:ln w="88900" cap="sq">
-            <a:solidFill>
-              <a:srgbClr val="FFFFFF"/>
-            </a:solidFill>
-            <a:miter lim="800000"/>
-          </a:ln>
-          <a:effectLst>
-            <a:outerShdw blurRad="55000" dist="18000" dir="5400000" algn="tl" rotWithShape="0">
-              <a:srgbClr val="000000">
-                <a:alpha val="40000"/>
-              </a:srgbClr>
-            </a:outerShdw>
-          </a:effectLst>
-          <a:scene3d>
-            <a:camera prst="orthographicFront"/>
-            <a:lightRig rig="twoPt" dir="t">
-              <a:rot lat="0" lon="0" rev="7200000"/>
-            </a:lightRig>
-          </a:scene3d>
-          <a:sp3d>
-            <a:bevelT w="25400" h="19050"/>
-            <a:contourClr>
-              <a:srgbClr val="FFFFFF"/>
-            </a:contourClr>
-          </a:sp3d>
-        </p:spPr>
-      </p:pic>
-      <p:pic>
-        <p:nvPicPr>
-          <p:cNvPr id="8" name="Рисунок 7">
-            <a:extLst>
-              <a:ext uri="{FF2B5EF4-FFF2-40B4-BE49-F238E27FC236}">
-                <a16:creationId xmlns:a16="http://schemas.microsoft.com/office/drawing/2014/main" id="{BE2AFAAC-ECCD-9396-C354-AFAFD9434DD8}"/>
-              </a:ext>
-            </a:extLst>
-          </p:cNvPr>
-          <p:cNvPicPr>
-            <a:picLocks noChangeAspect="1"/>
-          </p:cNvPicPr>
-          <p:nvPr/>
-        </p:nvPicPr>
-        <p:blipFill>
-          <a:blip r:embed="rId6"/>
-          <a:stretch>
-            <a:fillRect/>
-          </a:stretch>
-        </p:blipFill>
-        <p:spPr>
-          <a:xfrm>
-            <a:off x="485775" y="3928742"/>
-            <a:ext cx="3886742" cy="2438740"/>
-          </a:xfrm>
-          <a:prstGeom prst="rect">
-            <a:avLst/>
-          </a:prstGeom>
-          <a:solidFill>
-            <a:srgbClr val="FFFFFF">
-              <a:shade val="85000"/>
-            </a:srgbClr>
-          </a:solidFill>
-          <a:ln w="88900" cap="sq">
-            <a:solidFill>
-              <a:srgbClr val="FFFFFF"/>
-            </a:solidFill>
-            <a:miter lim="800000"/>
-          </a:ln>
-          <a:effectLst>
-            <a:outerShdw blurRad="55000" dist="18000" dir="5400000" algn="tl" rotWithShape="0">
-              <a:srgbClr val="000000">
-                <a:alpha val="40000"/>
-              </a:srgbClr>
-            </a:outerShdw>
-          </a:effectLst>
-          <a:scene3d>
-            <a:camera prst="orthographicFront"/>
-            <a:lightRig rig="twoPt" dir="t">
-              <a:rot lat="0" lon="0" rev="7200000"/>
-            </a:lightRig>
-          </a:scene3d>
-          <a:sp3d>
-            <a:bevelT w="25400" h="19050"/>
-            <a:contourClr>
-              <a:srgbClr val="FFFFFF"/>
-            </a:contourClr>
-          </a:sp3d>
-        </p:spPr>
-      </p:pic>
-    </p:spTree>
-    <p:extLst>
-      <p:ext uri="{BB962C8B-B14F-4D97-AF65-F5344CB8AC3E}">
-        <p14:creationId xmlns:p14="http://schemas.microsoft.com/office/powerpoint/2010/main" val="1037235786"/>
-      </p:ext>
-    </p:extLst>
-  </p:cSld>
-  <p:clrMapOvr>
-    <a:masterClrMapping/>
-  </p:clrMapOvr>
-</p:sld>
-</file>
-
-<file path=ppt/slides/slide9.xml><?xml version="1.0" encoding="utf-8"?>
-<p:sld xmlns:a="http://schemas.openxmlformats.org/drawingml/2006/main" xmlns:r="http://schemas.openxmlformats.org/officeDocument/2006/relationships" xmlns:p="http://schemas.openxmlformats.org/presentationml/2006/main">
-  <p:cSld>
-    <p:spTree>
-      <p:nvGrpSpPr>
-        <p:cNvPr id="1" name="">
-          <a:extLst>
-            <a:ext uri="{FF2B5EF4-FFF2-40B4-BE49-F238E27FC236}">
-              <a16:creationId xmlns:a16="http://schemas.microsoft.com/office/drawing/2014/main" id="{4D451EF6-1669-D0BE-5C75-31ABD253BE6F}"/>
-            </a:ext>
-          </a:extLst>
-        </p:cNvPr>
-        <p:cNvGrpSpPr/>
-        <p:nvPr/>
-      </p:nvGrpSpPr>
-      <p:grpSpPr>
-        <a:xfrm>
-          <a:off x="0" y="0"/>
-          <a:ext cx="0" cy="0"/>
-          <a:chOff x="0" y="0"/>
-          <a:chExt cx="0" cy="0"/>
-        </a:xfrm>
-      </p:grpSpPr>
-      <p:pic>
-        <p:nvPicPr>
-          <p:cNvPr id="2075" name="Рисунок 2074">
-            <a:extLst>
-              <a:ext uri="{FF2B5EF4-FFF2-40B4-BE49-F238E27FC236}">
-                <a16:creationId xmlns:a16="http://schemas.microsoft.com/office/drawing/2014/main" id="{D0E60EA0-320B-FD47-E26E-C825633A1799}"/>
-              </a:ext>
-            </a:extLst>
-          </p:cNvPr>
-          <p:cNvPicPr>
-            <a:picLocks noChangeAspect="1"/>
-          </p:cNvPicPr>
-          <p:nvPr/>
-        </p:nvPicPr>
-        <p:blipFill>
-          <a:blip r:embed="rId3">
-            <a:extLst>
-              <a:ext uri="{28A0092B-C50C-407E-A947-70E740481C1C}">
-                <a14:useLocalDpi xmlns:a14="http://schemas.microsoft.com/office/drawing/2010/main" val="0"/>
-              </a:ext>
-            </a:extLst>
-          </a:blip>
-          <a:stretch>
-            <a:fillRect/>
-          </a:stretch>
-        </p:blipFill>
-        <p:spPr>
-          <a:xfrm>
-            <a:off x="0" y="0"/>
-            <a:ext cx="12191999" cy="6858000"/>
-          </a:xfrm>
-          <a:prstGeom prst="rect">
-            <a:avLst/>
-          </a:prstGeom>
-        </p:spPr>
-      </p:pic>
-      <p:sp>
-        <p:nvSpPr>
-          <p:cNvPr id="5" name="Rectangle 6">
-            <a:extLst>
-              <a:ext uri="{FF2B5EF4-FFF2-40B4-BE49-F238E27FC236}">
-                <a16:creationId xmlns:a16="http://schemas.microsoft.com/office/drawing/2014/main" id="{EDD72790-FCAA-E507-08DD-8388B7B874F1}"/>
-              </a:ext>
-            </a:extLst>
-          </p:cNvPr>
-          <p:cNvSpPr>
-            <a:spLocks noChangeArrowheads="1"/>
-          </p:cNvSpPr>
-          <p:nvPr/>
-        </p:nvSpPr>
-        <p:spPr bwMode="auto">
-          <a:xfrm>
-            <a:off x="485775" y="412750"/>
-            <a:ext cx="1920398" cy="846386"/>
-          </a:xfrm>
-          <a:prstGeom prst="rect">
-            <a:avLst/>
-          </a:prstGeom>
-          <a:noFill/>
-          <a:ln>
-            <a:noFill/>
-          </a:ln>
-          <a:extLst>
-            <a:ext uri="{909E8E84-426E-40DD-AFC4-6F175D3DCCD1}">
-              <a14:hiddenFill xmlns:a14="http://schemas.microsoft.com/office/drawing/2010/main">
-                <a:solidFill>
-                  <a:srgbClr val="FFFFFF"/>
-                </a:solidFill>
-              </a14:hiddenFill>
-            </a:ext>
-            <a:ext uri="{91240B29-F687-4F45-9708-019B960494DF}">
-              <a14:hiddenLine xmlns:a14="http://schemas.microsoft.com/office/drawing/2010/main" w="9525">
-                <a:solidFill>
-                  <a:srgbClr val="000000"/>
-                </a:solidFill>
-                <a:miter lim="800000"/>
-                <a:headEnd/>
-                <a:tailEnd/>
-              </a14:hiddenLine>
-            </a:ext>
-          </a:extLst>
-        </p:spPr>
-        <p:txBody>
-          <a:bodyPr vert="horz" wrap="none" lIns="0" tIns="0" rIns="0" bIns="0" numCol="1" anchor="t" anchorCtr="0" compatLnSpc="1">
-            <a:prstTxWarp prst="textNoShape">
-              <a:avLst/>
-            </a:prstTxWarp>
-            <a:spAutoFit/>
-          </a:bodyPr>
-          <a:lstStyle>
-            <a:lvl1pPr eaLnBrk="0" fontAlgn="base" hangingPunct="0">
-              <a:spcBef>
-                <a:spcPct val="0"/>
-              </a:spcBef>
-              <a:spcAft>
-                <a:spcPct val="0"/>
-              </a:spcAft>
-              <a:defRPr>
-                <a:solidFill>
-                  <a:schemeClr val="tx1"/>
-                </a:solidFill>
-                <a:latin typeface="Arial" panose="020B0604020202020204" pitchFamily="34" charset="0"/>
-              </a:defRPr>
-            </a:lvl1pPr>
-            <a:lvl2pPr eaLnBrk="0" fontAlgn="base" hangingPunct="0">
-              <a:spcBef>
-                <a:spcPct val="0"/>
-              </a:spcBef>
-              <a:spcAft>
-                <a:spcPct val="0"/>
-              </a:spcAft>
-              <a:defRPr>
-                <a:solidFill>
-                  <a:schemeClr val="tx1"/>
-                </a:solidFill>
-                <a:latin typeface="Arial" panose="020B0604020202020204" pitchFamily="34" charset="0"/>
-              </a:defRPr>
-            </a:lvl2pPr>
-            <a:lvl3pPr eaLnBrk="0" fontAlgn="base" hangingPunct="0">
-              <a:spcBef>
-                <a:spcPct val="0"/>
-              </a:spcBef>
-              <a:spcAft>
-                <a:spcPct val="0"/>
-              </a:spcAft>
-              <a:defRPr>
-                <a:solidFill>
-                  <a:schemeClr val="tx1"/>
-                </a:solidFill>
-                <a:latin typeface="Arial" panose="020B0604020202020204" pitchFamily="34" charset="0"/>
-              </a:defRPr>
-            </a:lvl3pPr>
-            <a:lvl4pPr eaLnBrk="0" fontAlgn="base" hangingPunct="0">
-              <a:spcBef>
-                <a:spcPct val="0"/>
-              </a:spcBef>
-              <a:spcAft>
-                <a:spcPct val="0"/>
-              </a:spcAft>
-              <a:defRPr>
-                <a:solidFill>
-                  <a:schemeClr val="tx1"/>
-                </a:solidFill>
-                <a:latin typeface="Arial" panose="020B0604020202020204" pitchFamily="34" charset="0"/>
-              </a:defRPr>
-            </a:lvl4pPr>
-            <a:lvl5pPr eaLnBrk="0" fontAlgn="base" hangingPunct="0">
-              <a:spcBef>
-                <a:spcPct val="0"/>
-              </a:spcBef>
-              <a:spcAft>
-                <a:spcPct val="0"/>
-              </a:spcAft>
-              <a:defRPr>
-                <a:solidFill>
-                  <a:schemeClr val="tx1"/>
-                </a:solidFill>
-                <a:latin typeface="Arial" panose="020B0604020202020204" pitchFamily="34" charset="0"/>
-              </a:defRPr>
-            </a:lvl5pPr>
-            <a:lvl6pPr eaLnBrk="0" fontAlgn="base" hangingPunct="0">
-              <a:spcBef>
-                <a:spcPct val="0"/>
-              </a:spcBef>
-              <a:spcAft>
-                <a:spcPct val="0"/>
-              </a:spcAft>
-              <a:defRPr>
-                <a:solidFill>
-                  <a:schemeClr val="tx1"/>
-                </a:solidFill>
-                <a:latin typeface="Arial" panose="020B0604020202020204" pitchFamily="34" charset="0"/>
-              </a:defRPr>
-            </a:lvl6pPr>
-            <a:lvl7pPr eaLnBrk="0" fontAlgn="base" hangingPunct="0">
-              <a:spcBef>
-                <a:spcPct val="0"/>
-              </a:spcBef>
-              <a:spcAft>
-                <a:spcPct val="0"/>
-              </a:spcAft>
-              <a:defRPr>
-                <a:solidFill>
-                  <a:schemeClr val="tx1"/>
-                </a:solidFill>
-                <a:latin typeface="Arial" panose="020B0604020202020204" pitchFamily="34" charset="0"/>
-              </a:defRPr>
-            </a:lvl7pPr>
-            <a:lvl8pPr eaLnBrk="0" fontAlgn="base" hangingPunct="0">
-              <a:spcBef>
-                <a:spcPct val="0"/>
-              </a:spcBef>
-              <a:spcAft>
-                <a:spcPct val="0"/>
-              </a:spcAft>
-              <a:defRPr>
-                <a:solidFill>
-                  <a:schemeClr val="tx1"/>
-                </a:solidFill>
-                <a:latin typeface="Arial" panose="020B0604020202020204" pitchFamily="34" charset="0"/>
-              </a:defRPr>
-            </a:lvl8pPr>
-            <a:lvl9pPr eaLnBrk="0" fontAlgn="base" hangingPunct="0">
-              <a:spcBef>
-                <a:spcPct val="0"/>
-              </a:spcBef>
-              <a:spcAft>
-                <a:spcPct val="0"/>
-              </a:spcAft>
-              <a:defRPr>
-                <a:solidFill>
-                  <a:schemeClr val="tx1"/>
-                </a:solidFill>
-                <a:latin typeface="Arial" panose="020B0604020202020204" pitchFamily="34" charset="0"/>
-              </a:defRPr>
-            </a:lvl9pPr>
-          </a:lstStyle>
-          <a:p>
-            <a:pPr marL="0" marR="0" lvl="0" indent="0" algn="l" defTabSz="914400" rtl="0" eaLnBrk="0" fontAlgn="base" latinLnBrk="0" hangingPunct="0">
-              <a:lnSpc>
-                <a:spcPct val="100000"/>
-              </a:lnSpc>
-              <a:spcBef>
-                <a:spcPct val="0"/>
-              </a:spcBef>
-              <a:spcAft>
-                <a:spcPct val="0"/>
-              </a:spcAft>
-              <a:buClrTx/>
-              <a:buSzTx/>
-              <a:buFontTx/>
-              <a:buNone/>
-              <a:tabLst/>
-            </a:pPr>
-            <a:r>
-              <a:rPr kumimoji="0" lang="en-US" altLang="ru-RU" sz="5500" b="1" i="0" u="none" strike="noStrike" cap="none" normalizeH="0" baseline="0" dirty="0">
-                <a:ln>
-                  <a:noFill/>
-                </a:ln>
-                <a:solidFill>
-                  <a:srgbClr val="000000"/>
-                </a:solidFill>
-                <a:effectLst/>
-                <a:latin typeface="Times New Roman" panose="02020603050405020304" pitchFamily="18" charset="0"/>
-                <a:cs typeface="Times New Roman" panose="02020603050405020304" pitchFamily="18" charset="0"/>
-              </a:rPr>
-              <a:t>switch</a:t>
-            </a:r>
-            <a:endParaRPr kumimoji="0" lang="ru-RU" altLang="ru-RU" sz="1800" b="0" i="0" u="none" strike="noStrike" cap="none" normalizeH="0" baseline="0" dirty="0">
-              <a:ln>
-                <a:noFill/>
-              </a:ln>
-              <a:solidFill>
-                <a:schemeClr val="tx1"/>
-              </a:solidFill>
-              <a:effectLst/>
-              <a:latin typeface="Times New Roman" panose="02020603050405020304" pitchFamily="18" charset="0"/>
-              <a:cs typeface="Times New Roman" panose="02020603050405020304" pitchFamily="18" charset="0"/>
-            </a:endParaRPr>
-          </a:p>
-        </p:txBody>
-      </p:sp>
-      <p:pic>
-        <p:nvPicPr>
-          <p:cNvPr id="3" name="Рисунок 2">
-            <a:extLst>
-              <a:ext uri="{FF2B5EF4-FFF2-40B4-BE49-F238E27FC236}">
-                <a16:creationId xmlns:a16="http://schemas.microsoft.com/office/drawing/2014/main" id="{A2197F4F-DF34-89EE-8FDE-01CBEDE9D8F7}"/>
-              </a:ext>
-            </a:extLst>
-          </p:cNvPr>
-          <p:cNvPicPr>
-            <a:picLocks noChangeAspect="1"/>
-          </p:cNvPicPr>
-          <p:nvPr/>
-        </p:nvPicPr>
-        <p:blipFill>
-          <a:blip r:embed="rId4"/>
-          <a:stretch>
-            <a:fillRect/>
-          </a:stretch>
-        </p:blipFill>
-        <p:spPr>
-          <a:xfrm>
-            <a:off x="3108669" y="1432414"/>
-            <a:ext cx="5974660" cy="5019603"/>
-          </a:xfrm>
-          <a:prstGeom prst="rect">
-            <a:avLst/>
-          </a:prstGeom>
-          <a:solidFill>
-            <a:srgbClr val="FFFFFF">
-              <a:shade val="85000"/>
-            </a:srgbClr>
-          </a:solidFill>
-          <a:ln w="88900" cap="sq">
-            <a:solidFill>
-              <a:srgbClr val="FFFFFF"/>
-            </a:solidFill>
-            <a:miter lim="800000"/>
-          </a:ln>
-          <a:effectLst>
-            <a:outerShdw blurRad="55000" dist="18000" dir="5400000" algn="tl" rotWithShape="0">
-              <a:srgbClr val="000000">
-                <a:alpha val="40000"/>
-              </a:srgbClr>
-            </a:outerShdw>
-          </a:effectLst>
-          <a:scene3d>
-            <a:camera prst="orthographicFront"/>
-            <a:lightRig rig="twoPt" dir="t">
-              <a:rot lat="0" lon="0" rev="7200000"/>
-            </a:lightRig>
-          </a:scene3d>
-          <a:sp3d>
-            <a:bevelT w="25400" h="19050"/>
-            <a:contourClr>
-              <a:srgbClr val="FFFFFF"/>
-            </a:contourClr>
-          </a:sp3d>
-        </p:spPr>
-      </p:pic>
-    </p:spTree>
-    <p:extLst>
-      <p:ext uri="{BB962C8B-B14F-4D97-AF65-F5344CB8AC3E}">
-        <p14:creationId xmlns:p14="http://schemas.microsoft.com/office/powerpoint/2010/main" val="1462149807"/>
-      </p:ext>
-    </p:extLst>
-  </p:cSld>
-  <p:clrMapOvr>
-    <a:masterClrMapping/>
-  </p:clrMapOvr>
 </p:sld>
 </file>
 
